--- a/documents/Modelisation_Statistique_Agronomie.pptx
+++ b/documents/Modelisation_Statistique_Agronomie.pptx
@@ -4,6 +4,9 @@
   <p:sldMasterIdLst>
     <p:sldMasterId id="2147483648" r:id="rId1"/>
   </p:sldMasterIdLst>
+  <p:notesMasterIdLst>
+    <p:notesMasterId r:id="rId14"/>
+  </p:notesMasterIdLst>
   <p:sldIdLst>
     <p:sldId id="256" r:id="rId2"/>
     <p:sldId id="257" r:id="rId3"/>
@@ -18,10 +21,7 @@
     <p:sldId id="266" r:id="rId12"/>
     <p:sldId id="267" r:id="rId13"/>
   </p:sldIdLst>
-  <p:notesMasterIdLst>
-    <p:notesMasterId r:id="rId14"/>
-  </p:notesMasterIdLst>
-  <p:sldSz cx="9144000" cy="5143500"/>
+  <p:sldSz cx="9144000" cy="5143500" type="screen16x9"/>
   <p:notesSz cx="5143500" cy="9144000"/>
   <p:defaultTextStyle>
     <a:lvl1pPr marL="0" algn="l" defTabSz="914400" rtl="0" eaLnBrk="1" latinLnBrk="0" hangingPunct="1">
@@ -115,6 +115,11 @@
       </a:defRPr>
     </a:lvl9pPr>
   </p:defaultTextStyle>
+  <p:extLst>
+    <p:ext uri="{EFAFB233-063F-42B5-8137-9DF3F51BA10A}">
+      <p15:sldGuideLst xmlns:p15="http://schemas.microsoft.com/office/powerpoint/2012/main"/>
+    </p:ext>
+  </p:extLst>
 </p:presentation>
 </file>
 
@@ -140,234 +145,10 @@
           <a:chExt cx="0" cy="0"/>
         </a:xfrm>
       </p:grpSpPr>
-      <p:sp>
-        <p:nvSpPr>
-          <p:cNvPr id="2" name="Header Placeholder 1"/>
-          <p:cNvSpPr>
-            <a:spLocks noGrp="1"/>
-          </p:cNvSpPr>
-          <p:nvPr>
-            <p:ph type="hdr" sz="quarter"/>
-          </p:nvPr>
-        </p:nvSpPr>
-        <p:spPr>
-          <a:xfrm>
-            <a:off x="0" y="0"/>
-            <a:ext cx="2971800" cy="458788"/>
-          </a:xfrm>
-          <a:prstGeom prst="rect">
-            <a:avLst/>
-          </a:prstGeom>
-        </p:spPr>
-        <p:txBody>
-          <a:bodyPr vert="horz" lIns="91440" tIns="45720" rIns="91440" bIns="45720" rtlCol="0"/>
-          <a:lstStyle>
-            <a:lvl1pPr algn="l">
-              <a:defRPr sz="1200"/>
-            </a:lvl1pPr>
-          </a:lstStyle>
-          <a:p>
-            <a:endParaRPr lang="en-US"/>
-          </a:p>
-        </p:txBody>
-      </p:sp>
-      <p:sp>
-        <p:nvSpPr>
-          <p:cNvPr id="3" name="Date Placeholder 2"/>
-          <p:cNvSpPr>
-            <a:spLocks noGrp="1"/>
-          </p:cNvSpPr>
-          <p:nvPr>
-            <p:ph type="dt" idx="1"/>
-          </p:nvPr>
-        </p:nvSpPr>
-        <p:spPr>
-          <a:xfrm>
-            <a:off x="3884613" y="0"/>
-            <a:ext cx="2971800" cy="458788"/>
-          </a:xfrm>
-          <a:prstGeom prst="rect">
-            <a:avLst/>
-          </a:prstGeom>
-        </p:spPr>
-        <p:txBody>
-          <a:bodyPr vert="horz" lIns="91440" tIns="45720" rIns="91440" bIns="45720" rtlCol="0"/>
-          <a:lstStyle>
-            <a:lvl1pPr algn="r">
-              <a:defRPr sz="1200"/>
-            </a:lvl1pPr>
-          </a:lstStyle>
-          <a:p>
-            <a:fld id="{5282F153-3F37-0F45-9E97-73ACFA13230C}" type="datetimeFigureOut">
-              <a:rPr lang="en-US"/>
-              <a:t>7/23/19</a:t>
-            </a:fld>
-            <a:endParaRPr lang="en-US"/>
-          </a:p>
-        </p:txBody>
-      </p:sp>
-      <p:sp>
-        <p:nvSpPr>
-          <p:cNvPr id="4" name="Slide Image Placeholder 3"/>
-          <p:cNvSpPr>
-            <a:spLocks noGrp="1" noRot="1" noChangeAspect="1"/>
-          </p:cNvSpPr>
-          <p:nvPr>
-            <p:ph type="sldImg" idx="2"/>
-          </p:nvPr>
-        </p:nvSpPr>
-        <p:spPr>
-          <a:xfrm>
-            <a:off x="685800" y="1143000"/>
-            <a:ext cx="5486400" cy="3086100"/>
-          </a:xfrm>
-          <a:prstGeom prst="rect">
-            <a:avLst/>
-          </a:prstGeom>
-          <a:noFill/>
-          <a:ln w="12700">
-            <a:solidFill>
-              <a:prstClr val="black"/>
-            </a:solidFill>
-          </a:ln>
-        </p:spPr>
-        <p:txBody>
-          <a:bodyPr vert="horz" lIns="91440" tIns="45720" rIns="91440" bIns="45720" rtlCol="0" anchor="ctr"/>
-          <a:lstStyle/>
-          <a:p>
-            <a:endParaRPr lang="en-US"/>
-          </a:p>
-        </p:txBody>
-      </p:sp>
-      <p:sp>
-        <p:nvSpPr>
-          <p:cNvPr id="5" name="Notes Placeholder 4"/>
-          <p:cNvSpPr>
-            <a:spLocks noGrp="1"/>
-          </p:cNvSpPr>
-          <p:nvPr>
-            <p:ph type="body" sz="quarter" idx="3"/>
-          </p:nvPr>
-        </p:nvSpPr>
-        <p:spPr>
-          <a:xfrm>
-            <a:off x="685800" y="4400550"/>
-            <a:ext cx="5486400" cy="3600450"/>
-          </a:xfrm>
-          <a:prstGeom prst="rect">
-            <a:avLst/>
-          </a:prstGeom>
-        </p:spPr>
-        <p:txBody>
-          <a:bodyPr vert="horz" lIns="91440" tIns="45720" rIns="91440" bIns="45720" rtlCol="0"/>
-          <a:lstStyle/>
-          <a:p>
-            <a:pPr lvl="0"/>
-            <a:r>
-              <a:rPr lang="en-US"/>
-              <a:t>Click to edit Master text styles</a:t>
-            </a:r>
-          </a:p>
-          <a:p>
-            <a:pPr lvl="1"/>
-            <a:r>
-              <a:rPr lang="en-US"/>
-              <a:t>Second level</a:t>
-            </a:r>
-          </a:p>
-          <a:p>
-            <a:pPr lvl="2"/>
-            <a:r>
-              <a:rPr lang="en-US"/>
-              <a:t>Third level</a:t>
-            </a:r>
-          </a:p>
-          <a:p>
-            <a:pPr lvl="3"/>
-            <a:r>
-              <a:rPr lang="en-US"/>
-              <a:t>Fourth level</a:t>
-            </a:r>
-          </a:p>
-          <a:p>
-            <a:pPr lvl="4"/>
-            <a:r>
-              <a:rPr lang="en-US"/>
-              <a:t>Fifth level</a:t>
-            </a:r>
-          </a:p>
-        </p:txBody>
-      </p:sp>
-      <p:sp>
-        <p:nvSpPr>
-          <p:cNvPr id="6" name="Footer Placeholder 5"/>
-          <p:cNvSpPr>
-            <a:spLocks noGrp="1"/>
-          </p:cNvSpPr>
-          <p:nvPr>
-            <p:ph type="ftr" sz="quarter" idx="4"/>
-          </p:nvPr>
-        </p:nvSpPr>
-        <p:spPr>
-          <a:xfrm>
-            <a:off x="0" y="8685213"/>
-            <a:ext cx="2971800" cy="458787"/>
-          </a:xfrm>
-          <a:prstGeom prst="rect">
-            <a:avLst/>
-          </a:prstGeom>
-        </p:spPr>
-        <p:txBody>
-          <a:bodyPr vert="horz" lIns="91440" tIns="45720" rIns="91440" bIns="45720" rtlCol="0" anchor="b"/>
-          <a:lstStyle>
-            <a:lvl1pPr algn="l">
-              <a:defRPr sz="1200"/>
-            </a:lvl1pPr>
-          </a:lstStyle>
-          <a:p>
-            <a:endParaRPr lang="en-US"/>
-          </a:p>
-        </p:txBody>
-      </p:sp>
-      <p:sp>
-        <p:nvSpPr>
-          <p:cNvPr id="7" name="Slide Number Placeholder 6"/>
-          <p:cNvSpPr>
-            <a:spLocks noGrp="1"/>
-          </p:cNvSpPr>
-          <p:nvPr>
-            <p:ph type="sldNum" sz="quarter" idx="5"/>
-          </p:nvPr>
-        </p:nvSpPr>
-        <p:spPr>
-          <a:xfrm>
-            <a:off x="3884613" y="8685213"/>
-            <a:ext cx="2971800" cy="458787"/>
-          </a:xfrm>
-          <a:prstGeom prst="rect">
-            <a:avLst/>
-          </a:prstGeom>
-        </p:spPr>
-        <p:txBody>
-          <a:bodyPr vert="horz" lIns="91440" tIns="45720" rIns="91440" bIns="45720" rtlCol="0" anchor="b"/>
-          <a:lstStyle>
-            <a:lvl1pPr algn="r">
-              <a:defRPr sz="1200"/>
-            </a:lvl1pPr>
-          </a:lstStyle>
-          <a:p>
-            <a:fld id="{CE5E9CC1-C706-0F49-92D6-E571CC5EEA8F}" type="slidenum">
-              <a:rPr lang="en-US"/>
-              <a:t>‹#›</a:t>
-            </a:fld>
-            <a:endParaRPr lang="en-US"/>
-          </a:p>
-        </p:txBody>
-      </p:sp>
     </p:spTree>
     <p:extLst>
       <p:ext uri="{BB962C8B-B14F-4D97-AF65-F5344CB8AC3E}">
-        <p14:creationId xmlns:p14="http://schemas.microsoft.com/office/powerpoint/2010/main" val="1024086991"/>
+        <p14:creationId xmlns:p14="http://schemas.microsoft.com/office/powerpoint/2010/main" val="1027060108"/>
       </p:ext>
     </p:extLst>
   </p:cSld>
@@ -511,10 +292,6 @@
           <a:bodyPr/>
           <a:lstStyle/>
           <a:p>
-            <a:r>
-              <a:rPr lang="en-US" dirty="0"/>
-              <a:t/>
-            </a:r>
             <a:endParaRPr lang="en-US" dirty="0"/>
           </a:p>
         </p:txBody>
@@ -599,10 +376,6 @@
           <a:bodyPr/>
           <a:lstStyle/>
           <a:p>
-            <a:r>
-              <a:rPr lang="en-US" dirty="0"/>
-              <a:t/>
-            </a:r>
             <a:endParaRPr lang="en-US" dirty="0"/>
           </a:p>
         </p:txBody>
@@ -687,10 +460,6 @@
           <a:bodyPr/>
           <a:lstStyle/>
           <a:p>
-            <a:r>
-              <a:rPr lang="en-US" dirty="0"/>
-              <a:t/>
-            </a:r>
             <a:endParaRPr lang="en-US" dirty="0"/>
           </a:p>
         </p:txBody>
@@ -775,10 +544,6 @@
           <a:bodyPr/>
           <a:lstStyle/>
           <a:p>
-            <a:r>
-              <a:rPr lang="en-US" dirty="0"/>
-              <a:t/>
-            </a:r>
             <a:endParaRPr lang="en-US" dirty="0"/>
           </a:p>
         </p:txBody>
@@ -863,10 +628,6 @@
           <a:bodyPr/>
           <a:lstStyle/>
           <a:p>
-            <a:r>
-              <a:rPr lang="en-US" dirty="0"/>
-              <a:t/>
-            </a:r>
             <a:endParaRPr lang="en-US" dirty="0"/>
           </a:p>
         </p:txBody>
@@ -951,10 +712,6 @@
           <a:bodyPr/>
           <a:lstStyle/>
           <a:p>
-            <a:r>
-              <a:rPr lang="en-US" dirty="0"/>
-              <a:t/>
-            </a:r>
             <a:endParaRPr lang="en-US" dirty="0"/>
           </a:p>
         </p:txBody>
@@ -1039,10 +796,6 @@
           <a:bodyPr/>
           <a:lstStyle/>
           <a:p>
-            <a:r>
-              <a:rPr lang="en-US" dirty="0"/>
-              <a:t/>
-            </a:r>
             <a:endParaRPr lang="en-US" dirty="0"/>
           </a:p>
         </p:txBody>
@@ -1127,10 +880,6 @@
           <a:bodyPr/>
           <a:lstStyle/>
           <a:p>
-            <a:r>
-              <a:rPr lang="en-US" dirty="0"/>
-              <a:t/>
-            </a:r>
             <a:endParaRPr lang="en-US" dirty="0"/>
           </a:p>
         </p:txBody>
@@ -1215,10 +964,6 @@
           <a:bodyPr/>
           <a:lstStyle/>
           <a:p>
-            <a:r>
-              <a:rPr lang="en-US" dirty="0"/>
-              <a:t/>
-            </a:r>
             <a:endParaRPr lang="en-US" dirty="0"/>
           </a:p>
         </p:txBody>
@@ -1303,10 +1048,6 @@
           <a:bodyPr/>
           <a:lstStyle/>
           <a:p>
-            <a:r>
-              <a:rPr lang="en-US" dirty="0"/>
-              <a:t/>
-            </a:r>
             <a:endParaRPr lang="en-US" dirty="0"/>
           </a:p>
         </p:txBody>
@@ -1391,10 +1132,6 @@
           <a:bodyPr/>
           <a:lstStyle/>
           <a:p>
-            <a:r>
-              <a:rPr lang="en-US" dirty="0"/>
-              <a:t/>
-            </a:r>
             <a:endParaRPr lang="en-US" dirty="0"/>
           </a:p>
         </p:txBody>
@@ -1479,10 +1216,6 @@
           <a:bodyPr/>
           <a:lstStyle/>
           <a:p>
-            <a:r>
-              <a:rPr lang="en-US" dirty="0"/>
-              <a:t/>
-            </a:r>
             <a:endParaRPr lang="en-US" dirty="0"/>
           </a:p>
         </p:txBody>
@@ -1556,6 +1289,11 @@
 <file path=ppt/slideMasters/slideMaster1.xml><?xml version="1.0" encoding="utf-8"?>
 <p:sldMaster xmlns:a="http://schemas.openxmlformats.org/drawingml/2006/main" xmlns:r="http://schemas.openxmlformats.org/officeDocument/2006/relationships" xmlns:p="http://schemas.openxmlformats.org/presentationml/2006/main">
   <p:cSld>
+    <p:bg>
+      <p:bgRef idx="1001">
+        <a:schemeClr val="bg1"/>
+      </p:bgRef>
+    </p:bg>
     <p:spTree>
       <p:nvGrpSpPr>
         <p:cNvPr id="1" name=""/>
@@ -1838,6 +1576,7 @@
         <a:solidFill>
           <a:srgbClr val="1B4332"/>
         </a:solidFill>
+        <a:effectLst/>
       </p:bgPr>
     </p:bg>
     <p:spTree>
@@ -1915,7 +1654,7 @@
           <a:bodyPr wrap="square" lIns="0" tIns="0" rIns="0" bIns="0" rtlCol="0" anchor="ctr"/>
           <a:lstStyle/>
           <a:p>
-            <a:pPr indent="0" marL="0">
+            <a:pPr marL="0" indent="0">
               <a:buNone/>
             </a:pPr>
             <a:r>
@@ -1954,7 +1693,7 @@
           <a:bodyPr wrap="square" lIns="0" tIns="0" rIns="0" bIns="0" rtlCol="0" anchor="ctr"/>
           <a:lstStyle/>
           <a:p>
-            <a:pPr indent="0" marL="0">
+            <a:pPr marL="0" indent="0">
               <a:buNone/>
             </a:pPr>
             <a:r>
@@ -1991,7 +1730,7 @@
           </a:solidFill>
           <a:ln/>
           <a:effectLst>
-            <a:outerShdw sx="100000" sy="100000" kx="0" ky="0" algn="bl" rotWithShape="0" blurRad="101600" dist="38100" dir="8100000">
+            <a:outerShdw blurRad="101600" dist="38100" dir="8100000" algn="bl" rotWithShape="0">
               <a:srgbClr val="000000">
                 <a:alpha val="12000"/>
               </a:srgbClr>
@@ -2020,7 +1759,7 @@
           <a:bodyPr wrap="square" lIns="2540" tIns="2540" rIns="2540" bIns="2540" rtlCol="0" anchor="ctr"/>
           <a:lstStyle/>
           <a:p>
-            <a:pPr algn="ctr" indent="0" marL="0">
+            <a:pPr marL="0" indent="0" algn="ctr">
               <a:buNone/>
             </a:pPr>
             <a:r>
@@ -2034,13 +1773,13 @@
             <a:endParaRPr lang="en-US" sz="1400" dirty="0"/>
           </a:p>
           <a:p>
-            <a:pPr algn="ctr" indent="0" marL="0">
+            <a:pPr marL="0" indent="0" algn="ctr">
               <a:buNone/>
             </a:pPr>
             <a:endParaRPr lang="en-US" sz="1400" dirty="0"/>
           </a:p>
           <a:p>
-            <a:pPr algn="ctr" indent="0" marL="0">
+            <a:pPr marL="0" indent="0" algn="ctr">
               <a:buNone/>
             </a:pPr>
             <a:r>
@@ -2098,7 +1837,7 @@
           <a:bodyPr wrap="square" lIns="0" tIns="0" rIns="0" bIns="0" rtlCol="0" anchor="ctr"/>
           <a:lstStyle/>
           <a:p>
-            <a:pPr algn="ctr" indent="0" marL="0">
+            <a:pPr marL="0" indent="0" algn="ctr">
               <a:buNone/>
             </a:pPr>
             <a:r>
@@ -2156,7 +1895,7 @@
           <a:bodyPr wrap="square" lIns="0" tIns="0" rIns="0" bIns="0" rtlCol="0" anchor="ctr"/>
           <a:lstStyle/>
           <a:p>
-            <a:pPr algn="ctr" indent="0" marL="0">
+            <a:pPr marL="0" indent="0" algn="ctr">
               <a:buNone/>
             </a:pPr>
             <a:r>
@@ -2214,7 +1953,7 @@
           <a:bodyPr wrap="square" lIns="0" tIns="0" rIns="0" bIns="0" rtlCol="0" anchor="ctr"/>
           <a:lstStyle/>
           <a:p>
-            <a:pPr algn="ctr" indent="0" marL="0">
+            <a:pPr marL="0" indent="0" algn="ctr">
               <a:buNone/>
             </a:pPr>
             <a:r>
@@ -2272,7 +2011,7 @@
           <a:bodyPr wrap="square" lIns="0" tIns="0" rIns="0" bIns="0" rtlCol="0" anchor="ctr"/>
           <a:lstStyle/>
           <a:p>
-            <a:pPr algn="ctr" indent="0" marL="0">
+            <a:pPr marL="0" indent="0" algn="ctr">
               <a:buNone/>
             </a:pPr>
             <a:r>
@@ -2330,7 +2069,7 @@
           <a:bodyPr wrap="square" lIns="0" tIns="0" rIns="0" bIns="0" rtlCol="0" anchor="ctr"/>
           <a:lstStyle/>
           <a:p>
-            <a:pPr algn="ctr" indent="0" marL="0">
+            <a:pPr marL="0" indent="0" algn="ctr">
               <a:buNone/>
             </a:pPr>
             <a:r>
@@ -2388,7 +2127,7 @@
           <a:bodyPr wrap="square" lIns="0" tIns="0" rIns="0" bIns="0" rtlCol="0" anchor="ctr"/>
           <a:lstStyle/>
           <a:p>
-            <a:pPr algn="ctr" indent="0" marL="0">
+            <a:pPr marL="0" indent="0" algn="ctr">
               <a:buNone/>
             </a:pPr>
             <a:r>
@@ -2424,7 +2163,7 @@
           <a:bodyPr wrap="square" lIns="0" tIns="0" rIns="0" bIns="0" rtlCol="0" anchor="ctr"/>
           <a:lstStyle/>
           <a:p>
-            <a:pPr algn="ctr" indent="0" marL="0">
+            <a:pPr marL="0" indent="0" algn="ctr">
               <a:buNone/>
             </a:pPr>
             <a:r>
@@ -2439,6 +2178,36 @@
           </a:p>
         </p:txBody>
       </p:sp>
+      <p:pic>
+        <p:nvPicPr>
+          <p:cNvPr id="21" name="Image 20"/>
+          <p:cNvPicPr>
+            <a:picLocks noChangeAspect="1"/>
+          </p:cNvPicPr>
+          <p:nvPr/>
+        </p:nvPicPr>
+        <p:blipFill>
+          <a:blip r:embed="rId3">
+            <a:extLst>
+              <a:ext uri="{28A0092B-C50C-407E-A947-70E740481C1C}">
+                <a14:useLocalDpi xmlns:a14="http://schemas.microsoft.com/office/drawing/2010/main" val="0"/>
+              </a:ext>
+            </a:extLst>
+          </a:blip>
+          <a:stretch>
+            <a:fillRect/>
+          </a:stretch>
+        </p:blipFill>
+        <p:spPr>
+          <a:xfrm>
+            <a:off x="7236259" y="212300"/>
+            <a:ext cx="1986682" cy="489800"/>
+          </a:xfrm>
+          <a:prstGeom prst="rect">
+            <a:avLst/>
+          </a:prstGeom>
+        </p:spPr>
+      </p:pic>
     </p:spTree>
   </p:cSld>
   <p:clrMapOvr>
@@ -2455,6 +2224,7 @@
         <a:solidFill>
           <a:srgbClr val="FFFFFF"/>
         </a:solidFill>
+        <a:effectLst/>
       </p:bgPr>
     </p:bg>
     <p:spTree>
@@ -2512,7 +2282,7 @@
           <a:bodyPr wrap="square" lIns="0" tIns="0" rIns="0" bIns="0" rtlCol="0" anchor="ctr"/>
           <a:lstStyle/>
           <a:p>
-            <a:pPr indent="0" marL="0">
+            <a:pPr marL="0" indent="0">
               <a:buNone/>
             </a:pPr>
             <a:r>
@@ -2546,7 +2316,7 @@
           </a:solidFill>
           <a:ln/>
           <a:effectLst>
-            <a:outerShdw sx="100000" sy="100000" kx="0" ky="0" algn="bl" rotWithShape="0" blurRad="101600" dist="38100" dir="8100000">
+            <a:outerShdw blurRad="101600" dist="38100" dir="8100000" algn="bl" rotWithShape="0">
               <a:srgbClr val="000000">
                 <a:alpha val="12000"/>
               </a:srgbClr>
@@ -2595,7 +2365,7 @@
           <a:bodyPr wrap="square" lIns="0" tIns="0" rIns="0" bIns="0" rtlCol="0" anchor="ctr"/>
           <a:lstStyle/>
           <a:p>
-            <a:pPr algn="ctr" indent="0" marL="0">
+            <a:pPr marL="0" indent="0" algn="ctr">
               <a:buNone/>
             </a:pPr>
             <a:r>
@@ -2631,7 +2401,7 @@
           <a:bodyPr wrap="square" lIns="0" tIns="0" rIns="0" bIns="0" rtlCol="0" anchor="ctr"/>
           <a:lstStyle/>
           <a:p>
-            <a:pPr algn="ctr" indent="0" marL="0">
+            <a:pPr marL="0" indent="0" algn="ctr">
               <a:buNone/>
             </a:pPr>
             <a:r>
@@ -2667,7 +2437,7 @@
           <a:bodyPr wrap="square" lIns="0" tIns="0" rIns="0" bIns="0" rtlCol="0" anchor="t"/>
           <a:lstStyle/>
           <a:p>
-            <a:pPr indent="0" marL="0">
+            <a:pPr marL="0" indent="0">
               <a:buNone/>
             </a:pPr>
             <a:r>
@@ -2681,7 +2451,7 @@
             <a:endParaRPr lang="en-US" sz="1000" dirty="0"/>
           </a:p>
           <a:p>
-            <a:pPr indent="0" marL="0">
+            <a:pPr marL="0" indent="0">
               <a:buNone/>
             </a:pPr>
             <a:r>
@@ -2695,7 +2465,7 @@
             <a:endParaRPr lang="en-US" sz="1000" dirty="0"/>
           </a:p>
           <a:p>
-            <a:pPr indent="0" marL="0">
+            <a:pPr marL="0" indent="0">
               <a:buNone/>
             </a:pPr>
             <a:r>
@@ -2709,7 +2479,7 @@
             <a:endParaRPr lang="en-US" sz="1000" dirty="0"/>
           </a:p>
           <a:p>
-            <a:pPr indent="0" marL="0">
+            <a:pPr marL="0" indent="0">
               <a:buNone/>
             </a:pPr>
             <a:r>
@@ -2743,7 +2513,7 @@
           </a:solidFill>
           <a:ln/>
           <a:effectLst>
-            <a:outerShdw sx="100000" sy="100000" kx="0" ky="0" algn="bl" rotWithShape="0" blurRad="101600" dist="38100" dir="8100000">
+            <a:outerShdw blurRad="101600" dist="38100" dir="8100000" algn="bl" rotWithShape="0">
               <a:srgbClr val="000000">
                 <a:alpha val="12000"/>
               </a:srgbClr>
@@ -2792,7 +2562,7 @@
           <a:bodyPr wrap="square" lIns="0" tIns="0" rIns="0" bIns="0" rtlCol="0" anchor="ctr"/>
           <a:lstStyle/>
           <a:p>
-            <a:pPr algn="ctr" indent="0" marL="0">
+            <a:pPr marL="0" indent="0" algn="ctr">
               <a:buNone/>
             </a:pPr>
             <a:r>
@@ -2828,7 +2598,7 @@
           <a:bodyPr wrap="square" lIns="0" tIns="0" rIns="0" bIns="0" rtlCol="0" anchor="ctr"/>
           <a:lstStyle/>
           <a:p>
-            <a:pPr algn="ctr" indent="0" marL="0">
+            <a:pPr marL="0" indent="0" algn="ctr">
               <a:buNone/>
             </a:pPr>
             <a:r>
@@ -2864,7 +2634,7 @@
           <a:bodyPr wrap="square" lIns="0" tIns="0" rIns="0" bIns="0" rtlCol="0" anchor="t"/>
           <a:lstStyle/>
           <a:p>
-            <a:pPr indent="0" marL="0">
+            <a:pPr marL="0" indent="0">
               <a:buNone/>
             </a:pPr>
             <a:r>
@@ -2878,7 +2648,7 @@
             <a:endParaRPr lang="en-US" sz="1000" dirty="0"/>
           </a:p>
           <a:p>
-            <a:pPr indent="0" marL="0">
+            <a:pPr marL="0" indent="0">
               <a:buNone/>
             </a:pPr>
             <a:r>
@@ -2892,7 +2662,7 @@
             <a:endParaRPr lang="en-US" sz="1000" dirty="0"/>
           </a:p>
           <a:p>
-            <a:pPr indent="0" marL="0">
+            <a:pPr marL="0" indent="0">
               <a:buNone/>
             </a:pPr>
             <a:r>
@@ -2926,7 +2696,7 @@
           </a:solidFill>
           <a:ln/>
           <a:effectLst>
-            <a:outerShdw sx="100000" sy="100000" kx="0" ky="0" algn="bl" rotWithShape="0" blurRad="101600" dist="38100" dir="8100000">
+            <a:outerShdw blurRad="101600" dist="38100" dir="8100000" algn="bl" rotWithShape="0">
               <a:srgbClr val="000000">
                 <a:alpha val="12000"/>
               </a:srgbClr>
@@ -2975,7 +2745,7 @@
           <a:bodyPr wrap="square" lIns="0" tIns="0" rIns="0" bIns="0" rtlCol="0" anchor="ctr"/>
           <a:lstStyle/>
           <a:p>
-            <a:pPr algn="ctr" indent="0" marL="0">
+            <a:pPr marL="0" indent="0" algn="ctr">
               <a:buNone/>
             </a:pPr>
             <a:r>
@@ -3011,7 +2781,7 @@
           <a:bodyPr wrap="square" lIns="0" tIns="0" rIns="0" bIns="0" rtlCol="0" anchor="ctr"/>
           <a:lstStyle/>
           <a:p>
-            <a:pPr algn="ctr" indent="0" marL="0">
+            <a:pPr marL="0" indent="0" algn="ctr">
               <a:buNone/>
             </a:pPr>
             <a:r>
@@ -3047,7 +2817,7 @@
           <a:bodyPr wrap="square" lIns="0" tIns="0" rIns="0" bIns="0" rtlCol="0" anchor="t"/>
           <a:lstStyle/>
           <a:p>
-            <a:pPr indent="0" marL="0">
+            <a:pPr marL="0" indent="0">
               <a:buNone/>
             </a:pPr>
             <a:r>
@@ -3061,7 +2831,7 @@
             <a:endParaRPr lang="en-US" sz="1000" dirty="0"/>
           </a:p>
           <a:p>
-            <a:pPr indent="0" marL="0">
+            <a:pPr marL="0" indent="0">
               <a:buNone/>
             </a:pPr>
             <a:r>
@@ -3075,7 +2845,7 @@
             <a:endParaRPr lang="en-US" sz="1000" dirty="0"/>
           </a:p>
           <a:p>
-            <a:pPr indent="0" marL="0">
+            <a:pPr marL="0" indent="0">
               <a:buNone/>
             </a:pPr>
             <a:r>
@@ -3109,7 +2879,7 @@
           </a:solidFill>
           <a:ln/>
           <a:effectLst>
-            <a:outerShdw sx="100000" sy="100000" kx="0" ky="0" algn="bl" rotWithShape="0" blurRad="101600" dist="38100" dir="8100000">
+            <a:outerShdw blurRad="101600" dist="38100" dir="8100000" algn="bl" rotWithShape="0">
               <a:srgbClr val="000000">
                 <a:alpha val="12000"/>
               </a:srgbClr>
@@ -3158,7 +2928,7 @@
           <a:bodyPr wrap="square" lIns="0" tIns="0" rIns="0" bIns="0" rtlCol="0" anchor="ctr"/>
           <a:lstStyle/>
           <a:p>
-            <a:pPr algn="ctr" indent="0" marL="0">
+            <a:pPr marL="0" indent="0" algn="ctr">
               <a:buNone/>
             </a:pPr>
             <a:r>
@@ -3194,7 +2964,7 @@
           <a:bodyPr wrap="square" lIns="0" tIns="0" rIns="0" bIns="0" rtlCol="0" anchor="ctr"/>
           <a:lstStyle/>
           <a:p>
-            <a:pPr algn="ctr" indent="0" marL="0">
+            <a:pPr marL="0" indent="0" algn="ctr">
               <a:buNone/>
             </a:pPr>
             <a:r>
@@ -3230,7 +3000,7 @@
           <a:bodyPr wrap="square" lIns="0" tIns="0" rIns="0" bIns="0" rtlCol="0" anchor="t"/>
           <a:lstStyle/>
           <a:p>
-            <a:pPr indent="0" marL="0">
+            <a:pPr marL="0" indent="0">
               <a:buNone/>
             </a:pPr>
             <a:r>
@@ -3244,7 +3014,7 @@
             <a:endParaRPr lang="en-US" sz="1000" dirty="0"/>
           </a:p>
           <a:p>
-            <a:pPr indent="0" marL="0">
+            <a:pPr marL="0" indent="0">
               <a:buNone/>
             </a:pPr>
             <a:r>
@@ -3258,7 +3028,7 @@
             <a:endParaRPr lang="en-US" sz="1000" dirty="0"/>
           </a:p>
           <a:p>
-            <a:pPr indent="0" marL="0">
+            <a:pPr marL="0" indent="0">
               <a:buNone/>
             </a:pPr>
             <a:r>
@@ -3292,7 +3062,7 @@
           </a:solidFill>
           <a:ln/>
           <a:effectLst>
-            <a:outerShdw sx="100000" sy="100000" kx="0" ky="0" algn="bl" rotWithShape="0" blurRad="101600" dist="38100" dir="8100000">
+            <a:outerShdw blurRad="101600" dist="38100" dir="8100000" algn="bl" rotWithShape="0">
               <a:srgbClr val="000000">
                 <a:alpha val="12000"/>
               </a:srgbClr>
@@ -3341,7 +3111,7 @@
           <a:bodyPr wrap="square" lIns="0" tIns="0" rIns="0" bIns="0" rtlCol="0" anchor="ctr"/>
           <a:lstStyle/>
           <a:p>
-            <a:pPr algn="ctr" indent="0" marL="0">
+            <a:pPr marL="0" indent="0" algn="ctr">
               <a:buNone/>
             </a:pPr>
             <a:r>
@@ -3377,7 +3147,7 @@
           <a:bodyPr wrap="square" lIns="0" tIns="0" rIns="0" bIns="0" rtlCol="0" anchor="ctr"/>
           <a:lstStyle/>
           <a:p>
-            <a:pPr algn="ctr" indent="0" marL="0">
+            <a:pPr marL="0" indent="0" algn="ctr">
               <a:buNone/>
             </a:pPr>
             <a:r>
@@ -3413,7 +3183,7 @@
           <a:bodyPr wrap="square" lIns="0" tIns="0" rIns="0" bIns="0" rtlCol="0" anchor="t"/>
           <a:lstStyle/>
           <a:p>
-            <a:pPr indent="0" marL="0">
+            <a:pPr marL="0" indent="0">
               <a:buNone/>
             </a:pPr>
             <a:r>
@@ -3427,7 +3197,7 @@
             <a:endParaRPr lang="en-US" sz="1000" dirty="0"/>
           </a:p>
           <a:p>
-            <a:pPr indent="0" marL="0">
+            <a:pPr marL="0" indent="0">
               <a:buNone/>
             </a:pPr>
             <a:r>
@@ -3441,7 +3211,7 @@
             <a:endParaRPr lang="en-US" sz="1000" dirty="0"/>
           </a:p>
           <a:p>
-            <a:pPr indent="0" marL="0">
+            <a:pPr marL="0" indent="0">
               <a:buNone/>
             </a:pPr>
             <a:r>
@@ -3475,7 +3245,7 @@
           </a:solidFill>
           <a:ln/>
           <a:effectLst>
-            <a:outerShdw sx="100000" sy="100000" kx="0" ky="0" algn="bl" rotWithShape="0" blurRad="101600" dist="38100" dir="8100000">
+            <a:outerShdw blurRad="101600" dist="38100" dir="8100000" algn="bl" rotWithShape="0">
               <a:srgbClr val="000000">
                 <a:alpha val="12000"/>
               </a:srgbClr>
@@ -3504,7 +3274,7 @@
           <a:bodyPr wrap="square" lIns="1905" tIns="1905" rIns="1905" bIns="1905" rtlCol="0" anchor="ctr"/>
           <a:lstStyle/>
           <a:p>
-            <a:pPr algn="ctr" indent="0" marL="0">
+            <a:pPr marL="0" indent="0" algn="ctr">
               <a:buNone/>
             </a:pPr>
             <a:r>
@@ -3515,9 +3285,6 @@
               </a:rPr>
               <a:t>Règle d'or : </a:t>
             </a:r>
-            <a:pPr algn="ctr" indent="0" marL="0">
-              <a:buNone/>
-            </a:pPr>
             <a:r>
               <a:rPr lang="en-US" sz="1150" dirty="0">
                 <a:solidFill>
@@ -3526,9 +3293,6 @@
               </a:rPr>
               <a:t>« Choisir le modèle le plus simple qui répond correctement à la question posée » – </a:t>
             </a:r>
-            <a:pPr algn="ctr" indent="0" marL="0">
-              <a:buNone/>
-            </a:pPr>
             <a:r>
               <a:rPr lang="en-US" sz="1150" b="1" i="1" dirty="0">
                 <a:solidFill>
@@ -3557,6 +3321,7 @@
         <a:solidFill>
           <a:srgbClr val="F8F9FA"/>
         </a:solidFill>
+        <a:effectLst/>
       </p:bgPr>
     </p:bg>
     <p:spTree>
@@ -3614,7 +3379,7 @@
           <a:bodyPr wrap="square" lIns="0" tIns="0" rIns="0" bIns="0" rtlCol="0" anchor="ctr"/>
           <a:lstStyle/>
           <a:p>
-            <a:pPr indent="0" marL="0">
+            <a:pPr marL="0" indent="0">
               <a:buNone/>
             </a:pPr>
             <a:r>
@@ -3652,11 +3417,41 @@
             <a:tbl>
               <a:tblPr/>
               <a:tblGrid>
-                <a:gridCol w="1645920"/>
-                <a:gridCol w="914400"/>
-                <a:gridCol w="1188720"/>
-                <a:gridCol w="1463040"/>
-                <a:gridCol w="3474720"/>
+                <a:gridCol w="1645920">
+                  <a:extLst>
+                    <a:ext uri="{9D8B030D-6E8A-4147-A177-3AD203B41FA5}">
+                      <a16:colId xmlns:a16="http://schemas.microsoft.com/office/drawing/2014/main" val="20000"/>
+                    </a:ext>
+                  </a:extLst>
+                </a:gridCol>
+                <a:gridCol w="914400">
+                  <a:extLst>
+                    <a:ext uri="{9D8B030D-6E8A-4147-A177-3AD203B41FA5}">
+                      <a16:colId xmlns:a16="http://schemas.microsoft.com/office/drawing/2014/main" val="20001"/>
+                    </a:ext>
+                  </a:extLst>
+                </a:gridCol>
+                <a:gridCol w="1188720">
+                  <a:extLst>
+                    <a:ext uri="{9D8B030D-6E8A-4147-A177-3AD203B41FA5}">
+                      <a16:colId xmlns:a16="http://schemas.microsoft.com/office/drawing/2014/main" val="20002"/>
+                    </a:ext>
+                  </a:extLst>
+                </a:gridCol>
+                <a:gridCol w="1463040">
+                  <a:extLst>
+                    <a:ext uri="{9D8B030D-6E8A-4147-A177-3AD203B41FA5}">
+                      <a16:colId xmlns:a16="http://schemas.microsoft.com/office/drawing/2014/main" val="20003"/>
+                    </a:ext>
+                  </a:extLst>
+                </a:gridCol>
+                <a:gridCol w="3474720">
+                  <a:extLst>
+                    <a:ext uri="{9D8B030D-6E8A-4147-A177-3AD203B41FA5}">
+                      <a16:colId xmlns:a16="http://schemas.microsoft.com/office/drawing/2014/main" val="20004"/>
+                    </a:ext>
+                  </a:extLst>
+                </a:gridCol>
               </a:tblGrid>
               <a:tr h="420624">
                 <a:tc>
@@ -3664,7 +3459,7 @@
                     <a:bodyPr/>
                     <a:lstStyle/>
                     <a:p>
-                      <a:pPr indent="0" marL="0">
+                      <a:pPr marL="0" indent="0">
                         <a:buNone/>
                       </a:pPr>
                       <a:r>
@@ -3678,7 +3473,7 @@
                       <a:endParaRPr lang="en-US" sz="950" dirty="0"/>
                     </a:p>
                   </a:txBody>
-                  <a:tcPr marL="91440" marR="91440" marT="45720" marB="45720">
+                  <a:tcPr>
                     <a:lnL w="6350" cap="flat" cmpd="sng" algn="ctr">
                       <a:solidFill>
                         <a:srgbClr val="D0E0D8"/>
@@ -3725,7 +3520,7 @@
                     <a:bodyPr/>
                     <a:lstStyle/>
                     <a:p>
-                      <a:pPr indent="0" marL="0">
+                      <a:pPr marL="0" indent="0">
                         <a:buNone/>
                       </a:pPr>
                       <a:r>
@@ -3739,7 +3534,7 @@
                       <a:endParaRPr lang="en-US" sz="950" dirty="0"/>
                     </a:p>
                   </a:txBody>
-                  <a:tcPr marL="91440" marR="91440" marT="45720" marB="45720">
+                  <a:tcPr>
                     <a:lnL w="6350" cap="flat" cmpd="sng" algn="ctr">
                       <a:solidFill>
                         <a:srgbClr val="D0E0D8"/>
@@ -3786,7 +3581,7 @@
                     <a:bodyPr/>
                     <a:lstStyle/>
                     <a:p>
-                      <a:pPr indent="0" marL="0">
+                      <a:pPr marL="0" indent="0">
                         <a:buNone/>
                       </a:pPr>
                       <a:r>
@@ -3800,7 +3595,7 @@
                       <a:endParaRPr lang="en-US" sz="950" dirty="0"/>
                     </a:p>
                   </a:txBody>
-                  <a:tcPr marL="91440" marR="91440" marT="45720" marB="45720">
+                  <a:tcPr>
                     <a:lnL w="6350" cap="flat" cmpd="sng" algn="ctr">
                       <a:solidFill>
                         <a:srgbClr val="D0E0D8"/>
@@ -3847,7 +3642,7 @@
                     <a:bodyPr/>
                     <a:lstStyle/>
                     <a:p>
-                      <a:pPr indent="0" marL="0">
+                      <a:pPr marL="0" indent="0">
                         <a:buNone/>
                       </a:pPr>
                       <a:r>
@@ -3861,7 +3656,7 @@
                       <a:endParaRPr lang="en-US" sz="950" dirty="0"/>
                     </a:p>
                   </a:txBody>
-                  <a:tcPr marL="91440" marR="91440" marT="45720" marB="45720">
+                  <a:tcPr>
                     <a:lnL w="6350" cap="flat" cmpd="sng" algn="ctr">
                       <a:solidFill>
                         <a:srgbClr val="D0E0D8"/>
@@ -3908,7 +3703,7 @@
                     <a:bodyPr/>
                     <a:lstStyle/>
                     <a:p>
-                      <a:pPr indent="0" marL="0">
+                      <a:pPr marL="0" indent="0">
                         <a:buNone/>
                       </a:pPr>
                       <a:r>
@@ -3922,7 +3717,7 @@
                       <a:endParaRPr lang="en-US" sz="950" dirty="0"/>
                     </a:p>
                   </a:txBody>
-                  <a:tcPr marL="91440" marR="91440" marT="45720" marB="45720">
+                  <a:tcPr>
                     <a:lnL w="6350" cap="flat" cmpd="sng" algn="ctr">
                       <a:solidFill>
                         <a:srgbClr val="D0E0D8"/>
@@ -3964,6 +3759,11 @@
                     </a:solidFill>
                   </a:tcPr>
                 </a:tc>
+                <a:extLst>
+                  <a:ext uri="{0D108BD9-81ED-4DB2-BD59-A6C34878D82A}">
+                    <a16:rowId xmlns:a16="http://schemas.microsoft.com/office/drawing/2014/main" val="10000"/>
+                  </a:ext>
+                </a:extLst>
               </a:tr>
               <a:tr h="420624">
                 <a:tc>
@@ -3971,7 +3771,7 @@
                     <a:bodyPr/>
                     <a:lstStyle/>
                     <a:p>
-                      <a:pPr indent="0" marL="0">
+                      <a:pPr marL="0" indent="0">
                         <a:buNone/>
                       </a:pPr>
                       <a:r>
@@ -3985,7 +3785,7 @@
                       <a:endParaRPr lang="en-US" sz="950" dirty="0"/>
                     </a:p>
                   </a:txBody>
-                  <a:tcPr marL="91440" marR="91440" marT="45720" marB="45720">
+                  <a:tcPr>
                     <a:lnL w="6350" cap="flat" cmpd="sng" algn="ctr">
                       <a:solidFill>
                         <a:srgbClr val="D0E0D8"/>
@@ -4032,7 +3832,7 @@
                     <a:bodyPr/>
                     <a:lstStyle/>
                     <a:p>
-                      <a:pPr indent="0" marL="0">
+                      <a:pPr marL="0" indent="0">
                         <a:buNone/>
                       </a:pPr>
                       <a:r>
@@ -4046,7 +3846,7 @@
                       <a:endParaRPr lang="en-US" sz="950" dirty="0"/>
                     </a:p>
                   </a:txBody>
-                  <a:tcPr marL="91440" marR="91440" marT="45720" marB="45720">
+                  <a:tcPr>
                     <a:lnL w="6350" cap="flat" cmpd="sng" algn="ctr">
                       <a:solidFill>
                         <a:srgbClr val="D0E0D8"/>
@@ -4093,7 +3893,7 @@
                     <a:bodyPr/>
                     <a:lstStyle/>
                     <a:p>
-                      <a:pPr indent="0" marL="0">
+                      <a:pPr marL="0" indent="0">
                         <a:buNone/>
                       </a:pPr>
                       <a:r>
@@ -4107,7 +3907,7 @@
                       <a:endParaRPr lang="en-US" sz="950" dirty="0"/>
                     </a:p>
                   </a:txBody>
-                  <a:tcPr marL="91440" marR="91440" marT="45720" marB="45720">
+                  <a:tcPr>
                     <a:lnL w="6350" cap="flat" cmpd="sng" algn="ctr">
                       <a:solidFill>
                         <a:srgbClr val="D0E0D8"/>
@@ -4154,7 +3954,7 @@
                     <a:bodyPr/>
                     <a:lstStyle/>
                     <a:p>
-                      <a:pPr indent="0" marL="0">
+                      <a:pPr marL="0" indent="0">
                         <a:buNone/>
                       </a:pPr>
                       <a:r>
@@ -4168,7 +3968,7 @@
                       <a:endParaRPr lang="en-US" sz="950" dirty="0"/>
                     </a:p>
                   </a:txBody>
-                  <a:tcPr marL="91440" marR="91440" marT="45720" marB="45720">
+                  <a:tcPr>
                     <a:lnL w="6350" cap="flat" cmpd="sng" algn="ctr">
                       <a:solidFill>
                         <a:srgbClr val="D0E0D8"/>
@@ -4215,7 +4015,7 @@
                     <a:bodyPr/>
                     <a:lstStyle/>
                     <a:p>
-                      <a:pPr indent="0" marL="0">
+                      <a:pPr marL="0" indent="0">
                         <a:buNone/>
                       </a:pPr>
                       <a:r>
@@ -4229,7 +4029,7 @@
                       <a:endParaRPr lang="en-US" sz="950" dirty="0"/>
                     </a:p>
                   </a:txBody>
-                  <a:tcPr marL="91440" marR="91440" marT="45720" marB="45720">
+                  <a:tcPr>
                     <a:lnL w="6350" cap="flat" cmpd="sng" algn="ctr">
                       <a:solidFill>
                         <a:srgbClr val="D0E0D8"/>
@@ -4271,6 +4071,11 @@
                     </a:solidFill>
                   </a:tcPr>
                 </a:tc>
+                <a:extLst>
+                  <a:ext uri="{0D108BD9-81ED-4DB2-BD59-A6C34878D82A}">
+                    <a16:rowId xmlns:a16="http://schemas.microsoft.com/office/drawing/2014/main" val="10001"/>
+                  </a:ext>
+                </a:extLst>
               </a:tr>
               <a:tr h="420624">
                 <a:tc>
@@ -4278,7 +4083,7 @@
                     <a:bodyPr/>
                     <a:lstStyle/>
                     <a:p>
-                      <a:pPr indent="0" marL="0">
+                      <a:pPr marL="0" indent="0">
                         <a:buNone/>
                       </a:pPr>
                       <a:r>
@@ -4292,7 +4097,7 @@
                       <a:endParaRPr lang="en-US" sz="950" dirty="0"/>
                     </a:p>
                   </a:txBody>
-                  <a:tcPr marL="91440" marR="91440" marT="45720" marB="45720">
+                  <a:tcPr>
                     <a:lnL w="6350" cap="flat" cmpd="sng" algn="ctr">
                       <a:solidFill>
                         <a:srgbClr val="D0E0D8"/>
@@ -4339,7 +4144,7 @@
                     <a:bodyPr/>
                     <a:lstStyle/>
                     <a:p>
-                      <a:pPr indent="0" marL="0">
+                      <a:pPr marL="0" indent="0">
                         <a:buNone/>
                       </a:pPr>
                       <a:r>
@@ -4353,7 +4158,7 @@
                       <a:endParaRPr lang="en-US" sz="950" dirty="0"/>
                     </a:p>
                   </a:txBody>
-                  <a:tcPr marL="91440" marR="91440" marT="45720" marB="45720">
+                  <a:tcPr>
                     <a:lnL w="6350" cap="flat" cmpd="sng" algn="ctr">
                       <a:solidFill>
                         <a:srgbClr val="D0E0D8"/>
@@ -4400,7 +4205,7 @@
                     <a:bodyPr/>
                     <a:lstStyle/>
                     <a:p>
-                      <a:pPr indent="0" marL="0">
+                      <a:pPr marL="0" indent="0">
                         <a:buNone/>
                       </a:pPr>
                       <a:r>
@@ -4414,7 +4219,7 @@
                       <a:endParaRPr lang="en-US" sz="950" dirty="0"/>
                     </a:p>
                   </a:txBody>
-                  <a:tcPr marL="91440" marR="91440" marT="45720" marB="45720">
+                  <a:tcPr>
                     <a:lnL w="6350" cap="flat" cmpd="sng" algn="ctr">
                       <a:solidFill>
                         <a:srgbClr val="D0E0D8"/>
@@ -4461,7 +4266,7 @@
                     <a:bodyPr/>
                     <a:lstStyle/>
                     <a:p>
-                      <a:pPr indent="0" marL="0">
+                      <a:pPr marL="0" indent="0">
                         <a:buNone/>
                       </a:pPr>
                       <a:r>
@@ -4475,7 +4280,7 @@
                       <a:endParaRPr lang="en-US" sz="950" dirty="0"/>
                     </a:p>
                   </a:txBody>
-                  <a:tcPr marL="91440" marR="91440" marT="45720" marB="45720">
+                  <a:tcPr>
                     <a:lnL w="6350" cap="flat" cmpd="sng" algn="ctr">
                       <a:solidFill>
                         <a:srgbClr val="D0E0D8"/>
@@ -4522,7 +4327,7 @@
                     <a:bodyPr/>
                     <a:lstStyle/>
                     <a:p>
-                      <a:pPr indent="0" marL="0">
+                      <a:pPr marL="0" indent="0">
                         <a:buNone/>
                       </a:pPr>
                       <a:r>
@@ -4536,7 +4341,7 @@
                       <a:endParaRPr lang="en-US" sz="950" dirty="0"/>
                     </a:p>
                   </a:txBody>
-                  <a:tcPr marL="91440" marR="91440" marT="45720" marB="45720">
+                  <a:tcPr>
                     <a:lnL w="6350" cap="flat" cmpd="sng" algn="ctr">
                       <a:solidFill>
                         <a:srgbClr val="D0E0D8"/>
@@ -4578,6 +4383,11 @@
                     </a:solidFill>
                   </a:tcPr>
                 </a:tc>
+                <a:extLst>
+                  <a:ext uri="{0D108BD9-81ED-4DB2-BD59-A6C34878D82A}">
+                    <a16:rowId xmlns:a16="http://schemas.microsoft.com/office/drawing/2014/main" val="10002"/>
+                  </a:ext>
+                </a:extLst>
               </a:tr>
               <a:tr h="420624">
                 <a:tc>
@@ -4585,7 +4395,7 @@
                     <a:bodyPr/>
                     <a:lstStyle/>
                     <a:p>
-                      <a:pPr indent="0" marL="0">
+                      <a:pPr marL="0" indent="0">
                         <a:buNone/>
                       </a:pPr>
                       <a:r>
@@ -4599,7 +4409,7 @@
                       <a:endParaRPr lang="en-US" sz="950" dirty="0"/>
                     </a:p>
                   </a:txBody>
-                  <a:tcPr marL="91440" marR="91440" marT="45720" marB="45720">
+                  <a:tcPr>
                     <a:lnL w="6350" cap="flat" cmpd="sng" algn="ctr">
                       <a:solidFill>
                         <a:srgbClr val="D0E0D8"/>
@@ -4646,7 +4456,7 @@
                     <a:bodyPr/>
                     <a:lstStyle/>
                     <a:p>
-                      <a:pPr indent="0" marL="0">
+                      <a:pPr marL="0" indent="0">
                         <a:buNone/>
                       </a:pPr>
                       <a:r>
@@ -4660,7 +4470,7 @@
                       <a:endParaRPr lang="en-US" sz="950" dirty="0"/>
                     </a:p>
                   </a:txBody>
-                  <a:tcPr marL="91440" marR="91440" marT="45720" marB="45720">
+                  <a:tcPr>
                     <a:lnL w="6350" cap="flat" cmpd="sng" algn="ctr">
                       <a:solidFill>
                         <a:srgbClr val="D0E0D8"/>
@@ -4707,7 +4517,7 @@
                     <a:bodyPr/>
                     <a:lstStyle/>
                     <a:p>
-                      <a:pPr indent="0" marL="0">
+                      <a:pPr marL="0" indent="0">
                         <a:buNone/>
                       </a:pPr>
                       <a:r>
@@ -4721,7 +4531,7 @@
                       <a:endParaRPr lang="en-US" sz="950" dirty="0"/>
                     </a:p>
                   </a:txBody>
-                  <a:tcPr marL="91440" marR="91440" marT="45720" marB="45720">
+                  <a:tcPr>
                     <a:lnL w="6350" cap="flat" cmpd="sng" algn="ctr">
                       <a:solidFill>
                         <a:srgbClr val="D0E0D8"/>
@@ -4768,7 +4578,7 @@
                     <a:bodyPr/>
                     <a:lstStyle/>
                     <a:p>
-                      <a:pPr indent="0" marL="0">
+                      <a:pPr marL="0" indent="0">
                         <a:buNone/>
                       </a:pPr>
                       <a:r>
@@ -4782,7 +4592,7 @@
                       <a:endParaRPr lang="en-US" sz="950" dirty="0"/>
                     </a:p>
                   </a:txBody>
-                  <a:tcPr marL="91440" marR="91440" marT="45720" marB="45720">
+                  <a:tcPr>
                     <a:lnL w="6350" cap="flat" cmpd="sng" algn="ctr">
                       <a:solidFill>
                         <a:srgbClr val="D0E0D8"/>
@@ -4829,7 +4639,7 @@
                     <a:bodyPr/>
                     <a:lstStyle/>
                     <a:p>
-                      <a:pPr indent="0" marL="0">
+                      <a:pPr marL="0" indent="0">
                         <a:buNone/>
                       </a:pPr>
                       <a:r>
@@ -4843,7 +4653,7 @@
                       <a:endParaRPr lang="en-US" sz="950" dirty="0"/>
                     </a:p>
                   </a:txBody>
-                  <a:tcPr marL="91440" marR="91440" marT="45720" marB="45720">
+                  <a:tcPr>
                     <a:lnL w="6350" cap="flat" cmpd="sng" algn="ctr">
                       <a:solidFill>
                         <a:srgbClr val="D0E0D8"/>
@@ -4885,6 +4695,11 @@
                     </a:solidFill>
                   </a:tcPr>
                 </a:tc>
+                <a:extLst>
+                  <a:ext uri="{0D108BD9-81ED-4DB2-BD59-A6C34878D82A}">
+                    <a16:rowId xmlns:a16="http://schemas.microsoft.com/office/drawing/2014/main" val="10003"/>
+                  </a:ext>
+                </a:extLst>
               </a:tr>
               <a:tr h="420624">
                 <a:tc>
@@ -4892,7 +4707,7 @@
                     <a:bodyPr/>
                     <a:lstStyle/>
                     <a:p>
-                      <a:pPr indent="0" marL="0">
+                      <a:pPr marL="0" indent="0">
                         <a:buNone/>
                       </a:pPr>
                       <a:r>
@@ -4906,7 +4721,7 @@
                       <a:endParaRPr lang="en-US" sz="950" dirty="0"/>
                     </a:p>
                   </a:txBody>
-                  <a:tcPr marL="91440" marR="91440" marT="45720" marB="45720">
+                  <a:tcPr>
                     <a:lnL w="6350" cap="flat" cmpd="sng" algn="ctr">
                       <a:solidFill>
                         <a:srgbClr val="D0E0D8"/>
@@ -4953,7 +4768,7 @@
                     <a:bodyPr/>
                     <a:lstStyle/>
                     <a:p>
-                      <a:pPr indent="0" marL="0">
+                      <a:pPr marL="0" indent="0">
                         <a:buNone/>
                       </a:pPr>
                       <a:r>
@@ -4967,7 +4782,7 @@
                       <a:endParaRPr lang="en-US" sz="950" dirty="0"/>
                     </a:p>
                   </a:txBody>
-                  <a:tcPr marL="91440" marR="91440" marT="45720" marB="45720">
+                  <a:tcPr>
                     <a:lnL w="6350" cap="flat" cmpd="sng" algn="ctr">
                       <a:solidFill>
                         <a:srgbClr val="D0E0D8"/>
@@ -5014,7 +4829,7 @@
                     <a:bodyPr/>
                     <a:lstStyle/>
                     <a:p>
-                      <a:pPr indent="0" marL="0">
+                      <a:pPr marL="0" indent="0">
                         <a:buNone/>
                       </a:pPr>
                       <a:r>
@@ -5028,7 +4843,7 @@
                       <a:endParaRPr lang="en-US" sz="950" dirty="0"/>
                     </a:p>
                   </a:txBody>
-                  <a:tcPr marL="91440" marR="91440" marT="45720" marB="45720">
+                  <a:tcPr>
                     <a:lnL w="6350" cap="flat" cmpd="sng" algn="ctr">
                       <a:solidFill>
                         <a:srgbClr val="D0E0D8"/>
@@ -5075,7 +4890,7 @@
                     <a:bodyPr/>
                     <a:lstStyle/>
                     <a:p>
-                      <a:pPr indent="0" marL="0">
+                      <a:pPr marL="0" indent="0">
                         <a:buNone/>
                       </a:pPr>
                       <a:r>
@@ -5089,7 +4904,7 @@
                       <a:endParaRPr lang="en-US" sz="950" dirty="0"/>
                     </a:p>
                   </a:txBody>
-                  <a:tcPr marL="91440" marR="91440" marT="45720" marB="45720">
+                  <a:tcPr>
                     <a:lnL w="6350" cap="flat" cmpd="sng" algn="ctr">
                       <a:solidFill>
                         <a:srgbClr val="D0E0D8"/>
@@ -5136,7 +4951,7 @@
                     <a:bodyPr/>
                     <a:lstStyle/>
                     <a:p>
-                      <a:pPr indent="0" marL="0">
+                      <a:pPr marL="0" indent="0">
                         <a:buNone/>
                       </a:pPr>
                       <a:r>
@@ -5150,7 +4965,7 @@
                       <a:endParaRPr lang="en-US" sz="950" dirty="0"/>
                     </a:p>
                   </a:txBody>
-                  <a:tcPr marL="91440" marR="91440" marT="45720" marB="45720">
+                  <a:tcPr>
                     <a:lnL w="6350" cap="flat" cmpd="sng" algn="ctr">
                       <a:solidFill>
                         <a:srgbClr val="D0E0D8"/>
@@ -5192,6 +5007,11 @@
                     </a:solidFill>
                   </a:tcPr>
                 </a:tc>
+                <a:extLst>
+                  <a:ext uri="{0D108BD9-81ED-4DB2-BD59-A6C34878D82A}">
+                    <a16:rowId xmlns:a16="http://schemas.microsoft.com/office/drawing/2014/main" val="10004"/>
+                  </a:ext>
+                </a:extLst>
               </a:tr>
               <a:tr h="420624">
                 <a:tc>
@@ -5199,7 +5019,7 @@
                     <a:bodyPr/>
                     <a:lstStyle/>
                     <a:p>
-                      <a:pPr indent="0" marL="0">
+                      <a:pPr marL="0" indent="0">
                         <a:buNone/>
                       </a:pPr>
                       <a:r>
@@ -5213,7 +5033,7 @@
                       <a:endParaRPr lang="en-US" sz="950" dirty="0"/>
                     </a:p>
                   </a:txBody>
-                  <a:tcPr marL="91440" marR="91440" marT="45720" marB="45720">
+                  <a:tcPr>
                     <a:lnL w="6350" cap="flat" cmpd="sng" algn="ctr">
                       <a:solidFill>
                         <a:srgbClr val="D0E0D8"/>
@@ -5260,7 +5080,7 @@
                     <a:bodyPr/>
                     <a:lstStyle/>
                     <a:p>
-                      <a:pPr indent="0" marL="0">
+                      <a:pPr marL="0" indent="0">
                         <a:buNone/>
                       </a:pPr>
                       <a:r>
@@ -5274,7 +5094,7 @@
                       <a:endParaRPr lang="en-US" sz="950" dirty="0"/>
                     </a:p>
                   </a:txBody>
-                  <a:tcPr marL="91440" marR="91440" marT="45720" marB="45720">
+                  <a:tcPr>
                     <a:lnL w="6350" cap="flat" cmpd="sng" algn="ctr">
                       <a:solidFill>
                         <a:srgbClr val="D0E0D8"/>
@@ -5321,7 +5141,7 @@
                     <a:bodyPr/>
                     <a:lstStyle/>
                     <a:p>
-                      <a:pPr indent="0" marL="0">
+                      <a:pPr marL="0" indent="0">
                         <a:buNone/>
                       </a:pPr>
                       <a:r>
@@ -5335,7 +5155,7 @@
                       <a:endParaRPr lang="en-US" sz="950" dirty="0"/>
                     </a:p>
                   </a:txBody>
-                  <a:tcPr marL="91440" marR="91440" marT="45720" marB="45720">
+                  <a:tcPr>
                     <a:lnL w="6350" cap="flat" cmpd="sng" algn="ctr">
                       <a:solidFill>
                         <a:srgbClr val="D0E0D8"/>
@@ -5382,7 +5202,7 @@
                     <a:bodyPr/>
                     <a:lstStyle/>
                     <a:p>
-                      <a:pPr indent="0" marL="0">
+                      <a:pPr marL="0" indent="0">
                         <a:buNone/>
                       </a:pPr>
                       <a:r>
@@ -5396,7 +5216,7 @@
                       <a:endParaRPr lang="en-US" sz="950" dirty="0"/>
                     </a:p>
                   </a:txBody>
-                  <a:tcPr marL="91440" marR="91440" marT="45720" marB="45720">
+                  <a:tcPr>
                     <a:lnL w="6350" cap="flat" cmpd="sng" algn="ctr">
                       <a:solidFill>
                         <a:srgbClr val="D0E0D8"/>
@@ -5443,7 +5263,7 @@
                     <a:bodyPr/>
                     <a:lstStyle/>
                     <a:p>
-                      <a:pPr indent="0" marL="0">
+                      <a:pPr marL="0" indent="0">
                         <a:buNone/>
                       </a:pPr>
                       <a:r>
@@ -5457,7 +5277,7 @@
                       <a:endParaRPr lang="en-US" sz="950" dirty="0"/>
                     </a:p>
                   </a:txBody>
-                  <a:tcPr marL="91440" marR="91440" marT="45720" marB="45720">
+                  <a:tcPr>
                     <a:lnL w="6350" cap="flat" cmpd="sng" algn="ctr">
                       <a:solidFill>
                         <a:srgbClr val="D0E0D8"/>
@@ -5499,6 +5319,11 @@
                     </a:solidFill>
                   </a:tcPr>
                 </a:tc>
+                <a:extLst>
+                  <a:ext uri="{0D108BD9-81ED-4DB2-BD59-A6C34878D82A}">
+                    <a16:rowId xmlns:a16="http://schemas.microsoft.com/office/drawing/2014/main" val="10005"/>
+                  </a:ext>
+                </a:extLst>
               </a:tr>
               <a:tr h="420624">
                 <a:tc>
@@ -5506,7 +5331,7 @@
                     <a:bodyPr/>
                     <a:lstStyle/>
                     <a:p>
-                      <a:pPr indent="0" marL="0">
+                      <a:pPr marL="0" indent="0">
                         <a:buNone/>
                       </a:pPr>
                       <a:r>
@@ -5520,7 +5345,7 @@
                       <a:endParaRPr lang="en-US" sz="950" dirty="0"/>
                     </a:p>
                   </a:txBody>
-                  <a:tcPr marL="91440" marR="91440" marT="45720" marB="45720">
+                  <a:tcPr>
                     <a:lnL w="6350" cap="flat" cmpd="sng" algn="ctr">
                       <a:solidFill>
                         <a:srgbClr val="D0E0D8"/>
@@ -5567,7 +5392,7 @@
                     <a:bodyPr/>
                     <a:lstStyle/>
                     <a:p>
-                      <a:pPr indent="0" marL="0">
+                      <a:pPr marL="0" indent="0">
                         <a:buNone/>
                       </a:pPr>
                       <a:r>
@@ -5581,7 +5406,7 @@
                       <a:endParaRPr lang="en-US" sz="950" dirty="0"/>
                     </a:p>
                   </a:txBody>
-                  <a:tcPr marL="91440" marR="91440" marT="45720" marB="45720">
+                  <a:tcPr>
                     <a:lnL w="6350" cap="flat" cmpd="sng" algn="ctr">
                       <a:solidFill>
                         <a:srgbClr val="D0E0D8"/>
@@ -5628,7 +5453,7 @@
                     <a:bodyPr/>
                     <a:lstStyle/>
                     <a:p>
-                      <a:pPr indent="0" marL="0">
+                      <a:pPr marL="0" indent="0">
                         <a:buNone/>
                       </a:pPr>
                       <a:r>
@@ -5642,7 +5467,7 @@
                       <a:endParaRPr lang="en-US" sz="950" dirty="0"/>
                     </a:p>
                   </a:txBody>
-                  <a:tcPr marL="91440" marR="91440" marT="45720" marB="45720">
+                  <a:tcPr>
                     <a:lnL w="6350" cap="flat" cmpd="sng" algn="ctr">
                       <a:solidFill>
                         <a:srgbClr val="D0E0D8"/>
@@ -5689,7 +5514,7 @@
                     <a:bodyPr/>
                     <a:lstStyle/>
                     <a:p>
-                      <a:pPr indent="0" marL="0">
+                      <a:pPr marL="0" indent="0">
                         <a:buNone/>
                       </a:pPr>
                       <a:r>
@@ -5703,7 +5528,7 @@
                       <a:endParaRPr lang="en-US" sz="950" dirty="0"/>
                     </a:p>
                   </a:txBody>
-                  <a:tcPr marL="91440" marR="91440" marT="45720" marB="45720">
+                  <a:tcPr>
                     <a:lnL w="6350" cap="flat" cmpd="sng" algn="ctr">
                       <a:solidFill>
                         <a:srgbClr val="D0E0D8"/>
@@ -5750,7 +5575,7 @@
                     <a:bodyPr/>
                     <a:lstStyle/>
                     <a:p>
-                      <a:pPr indent="0" marL="0">
+                      <a:pPr marL="0" indent="0">
                         <a:buNone/>
                       </a:pPr>
                       <a:r>
@@ -5764,7 +5589,7 @@
                       <a:endParaRPr lang="en-US" sz="950" dirty="0"/>
                     </a:p>
                   </a:txBody>
-                  <a:tcPr marL="91440" marR="91440" marT="45720" marB="45720">
+                  <a:tcPr>
                     <a:lnL w="6350" cap="flat" cmpd="sng" algn="ctr">
                       <a:solidFill>
                         <a:srgbClr val="D0E0D8"/>
@@ -5806,6 +5631,11 @@
                     </a:solidFill>
                   </a:tcPr>
                 </a:tc>
+                <a:extLst>
+                  <a:ext uri="{0D108BD9-81ED-4DB2-BD59-A6C34878D82A}">
+                    <a16:rowId xmlns:a16="http://schemas.microsoft.com/office/drawing/2014/main" val="10006"/>
+                  </a:ext>
+                </a:extLst>
               </a:tr>
               <a:tr h="420624">
                 <a:tc>
@@ -5813,7 +5643,7 @@
                     <a:bodyPr/>
                     <a:lstStyle/>
                     <a:p>
-                      <a:pPr indent="0" marL="0">
+                      <a:pPr marL="0" indent="0">
                         <a:buNone/>
                       </a:pPr>
                       <a:r>
@@ -5827,7 +5657,7 @@
                       <a:endParaRPr lang="en-US" sz="950" dirty="0"/>
                     </a:p>
                   </a:txBody>
-                  <a:tcPr marL="91440" marR="91440" marT="45720" marB="45720">
+                  <a:tcPr>
                     <a:lnL w="6350" cap="flat" cmpd="sng" algn="ctr">
                       <a:solidFill>
                         <a:srgbClr val="D0E0D8"/>
@@ -5874,7 +5704,7 @@
                     <a:bodyPr/>
                     <a:lstStyle/>
                     <a:p>
-                      <a:pPr indent="0" marL="0">
+                      <a:pPr marL="0" indent="0">
                         <a:buNone/>
                       </a:pPr>
                       <a:r>
@@ -5888,7 +5718,7 @@
                       <a:endParaRPr lang="en-US" sz="950" dirty="0"/>
                     </a:p>
                   </a:txBody>
-                  <a:tcPr marL="91440" marR="91440" marT="45720" marB="45720">
+                  <a:tcPr>
                     <a:lnL w="6350" cap="flat" cmpd="sng" algn="ctr">
                       <a:solidFill>
                         <a:srgbClr val="D0E0D8"/>
@@ -5935,7 +5765,7 @@
                     <a:bodyPr/>
                     <a:lstStyle/>
                     <a:p>
-                      <a:pPr indent="0" marL="0">
+                      <a:pPr marL="0" indent="0">
                         <a:buNone/>
                       </a:pPr>
                       <a:r>
@@ -5949,7 +5779,7 @@
                       <a:endParaRPr lang="en-US" sz="950" dirty="0"/>
                     </a:p>
                   </a:txBody>
-                  <a:tcPr marL="91440" marR="91440" marT="45720" marB="45720">
+                  <a:tcPr>
                     <a:lnL w="6350" cap="flat" cmpd="sng" algn="ctr">
                       <a:solidFill>
                         <a:srgbClr val="D0E0D8"/>
@@ -5996,7 +5826,7 @@
                     <a:bodyPr/>
                     <a:lstStyle/>
                     <a:p>
-                      <a:pPr indent="0" marL="0">
+                      <a:pPr marL="0" indent="0">
                         <a:buNone/>
                       </a:pPr>
                       <a:r>
@@ -6010,7 +5840,7 @@
                       <a:endParaRPr lang="en-US" sz="950" dirty="0"/>
                     </a:p>
                   </a:txBody>
-                  <a:tcPr marL="91440" marR="91440" marT="45720" marB="45720">
+                  <a:tcPr>
                     <a:lnL w="6350" cap="flat" cmpd="sng" algn="ctr">
                       <a:solidFill>
                         <a:srgbClr val="D0E0D8"/>
@@ -6057,7 +5887,7 @@
                     <a:bodyPr/>
                     <a:lstStyle/>
                     <a:p>
-                      <a:pPr indent="0" marL="0">
+                      <a:pPr marL="0" indent="0">
                         <a:buNone/>
                       </a:pPr>
                       <a:r>
@@ -6071,7 +5901,7 @@
                       <a:endParaRPr lang="en-US" sz="950" dirty="0"/>
                     </a:p>
                   </a:txBody>
-                  <a:tcPr marL="91440" marR="91440" marT="45720" marB="45720">
+                  <a:tcPr>
                     <a:lnL w="6350" cap="flat" cmpd="sng" algn="ctr">
                       <a:solidFill>
                         <a:srgbClr val="D0E0D8"/>
@@ -6113,6 +5943,11 @@
                     </a:solidFill>
                   </a:tcPr>
                 </a:tc>
+                <a:extLst>
+                  <a:ext uri="{0D108BD9-81ED-4DB2-BD59-A6C34878D82A}">
+                    <a16:rowId xmlns:a16="http://schemas.microsoft.com/office/drawing/2014/main" val="10007"/>
+                  </a:ext>
+                </a:extLst>
               </a:tr>
               <a:tr h="420624">
                 <a:tc>
@@ -6120,7 +5955,7 @@
                     <a:bodyPr/>
                     <a:lstStyle/>
                     <a:p>
-                      <a:pPr indent="0" marL="0">
+                      <a:pPr marL="0" indent="0">
                         <a:buNone/>
                       </a:pPr>
                       <a:r>
@@ -6134,7 +5969,7 @@
                       <a:endParaRPr lang="en-US" sz="950" dirty="0"/>
                     </a:p>
                   </a:txBody>
-                  <a:tcPr marL="91440" marR="91440" marT="45720" marB="45720">
+                  <a:tcPr>
                     <a:lnL w="6350" cap="flat" cmpd="sng" algn="ctr">
                       <a:solidFill>
                         <a:srgbClr val="D0E0D8"/>
@@ -6181,7 +6016,7 @@
                     <a:bodyPr/>
                     <a:lstStyle/>
                     <a:p>
-                      <a:pPr indent="0" marL="0">
+                      <a:pPr marL="0" indent="0">
                         <a:buNone/>
                       </a:pPr>
                       <a:r>
@@ -6195,7 +6030,7 @@
                       <a:endParaRPr lang="en-US" sz="950" dirty="0"/>
                     </a:p>
                   </a:txBody>
-                  <a:tcPr marL="91440" marR="91440" marT="45720" marB="45720">
+                  <a:tcPr>
                     <a:lnL w="6350" cap="flat" cmpd="sng" algn="ctr">
                       <a:solidFill>
                         <a:srgbClr val="D0E0D8"/>
@@ -6242,7 +6077,7 @@
                     <a:bodyPr/>
                     <a:lstStyle/>
                     <a:p>
-                      <a:pPr indent="0" marL="0">
+                      <a:pPr marL="0" indent="0">
                         <a:buNone/>
                       </a:pPr>
                       <a:r>
@@ -6256,7 +6091,7 @@
                       <a:endParaRPr lang="en-US" sz="950" dirty="0"/>
                     </a:p>
                   </a:txBody>
-                  <a:tcPr marL="91440" marR="91440" marT="45720" marB="45720">
+                  <a:tcPr>
                     <a:lnL w="6350" cap="flat" cmpd="sng" algn="ctr">
                       <a:solidFill>
                         <a:srgbClr val="D0E0D8"/>
@@ -6303,7 +6138,7 @@
                     <a:bodyPr/>
                     <a:lstStyle/>
                     <a:p>
-                      <a:pPr indent="0" marL="0">
+                      <a:pPr marL="0" indent="0">
                         <a:buNone/>
                       </a:pPr>
                       <a:r>
@@ -6317,7 +6152,7 @@
                       <a:endParaRPr lang="en-US" sz="950" dirty="0"/>
                     </a:p>
                   </a:txBody>
-                  <a:tcPr marL="91440" marR="91440" marT="45720" marB="45720">
+                  <a:tcPr>
                     <a:lnL w="6350" cap="flat" cmpd="sng" algn="ctr">
                       <a:solidFill>
                         <a:srgbClr val="D0E0D8"/>
@@ -6364,7 +6199,7 @@
                     <a:bodyPr/>
                     <a:lstStyle/>
                     <a:p>
-                      <a:pPr indent="0" marL="0">
+                      <a:pPr marL="0" indent="0">
                         <a:buNone/>
                       </a:pPr>
                       <a:r>
@@ -6378,7 +6213,7 @@
                       <a:endParaRPr lang="en-US" sz="950" dirty="0"/>
                     </a:p>
                   </a:txBody>
-                  <a:tcPr marL="91440" marR="91440" marT="45720" marB="45720">
+                  <a:tcPr>
                     <a:lnL w="6350" cap="flat" cmpd="sng" algn="ctr">
                       <a:solidFill>
                         <a:srgbClr val="D0E0D8"/>
@@ -6420,6 +6255,11 @@
                     </a:solidFill>
                   </a:tcPr>
                 </a:tc>
+                <a:extLst>
+                  <a:ext uri="{0D108BD9-81ED-4DB2-BD59-A6C34878D82A}">
+                    <a16:rowId xmlns:a16="http://schemas.microsoft.com/office/drawing/2014/main" val="10008"/>
+                  </a:ext>
+                </a:extLst>
               </a:tr>
               <a:tr h="420624">
                 <a:tc>
@@ -6427,7 +6267,7 @@
                     <a:bodyPr/>
                     <a:lstStyle/>
                     <a:p>
-                      <a:pPr indent="0" marL="0">
+                      <a:pPr marL="0" indent="0">
                         <a:buNone/>
                       </a:pPr>
                       <a:r>
@@ -6441,7 +6281,7 @@
                       <a:endParaRPr lang="en-US" sz="950" dirty="0"/>
                     </a:p>
                   </a:txBody>
-                  <a:tcPr marL="91440" marR="91440" marT="45720" marB="45720">
+                  <a:tcPr>
                     <a:lnL w="6350" cap="flat" cmpd="sng" algn="ctr">
                       <a:solidFill>
                         <a:srgbClr val="D0E0D8"/>
@@ -6488,7 +6328,7 @@
                     <a:bodyPr/>
                     <a:lstStyle/>
                     <a:p>
-                      <a:pPr indent="0" marL="0">
+                      <a:pPr marL="0" indent="0">
                         <a:buNone/>
                       </a:pPr>
                       <a:r>
@@ -6502,7 +6342,7 @@
                       <a:endParaRPr lang="en-US" sz="950" dirty="0"/>
                     </a:p>
                   </a:txBody>
-                  <a:tcPr marL="91440" marR="91440" marT="45720" marB="45720">
+                  <a:tcPr>
                     <a:lnL w="6350" cap="flat" cmpd="sng" algn="ctr">
                       <a:solidFill>
                         <a:srgbClr val="D0E0D8"/>
@@ -6549,7 +6389,7 @@
                     <a:bodyPr/>
                     <a:lstStyle/>
                     <a:p>
-                      <a:pPr indent="0" marL="0">
+                      <a:pPr marL="0" indent="0">
                         <a:buNone/>
                       </a:pPr>
                       <a:r>
@@ -6563,7 +6403,7 @@
                       <a:endParaRPr lang="en-US" sz="950" dirty="0"/>
                     </a:p>
                   </a:txBody>
-                  <a:tcPr marL="91440" marR="91440" marT="45720" marB="45720">
+                  <a:tcPr>
                     <a:lnL w="6350" cap="flat" cmpd="sng" algn="ctr">
                       <a:solidFill>
                         <a:srgbClr val="D0E0D8"/>
@@ -6610,7 +6450,7 @@
                     <a:bodyPr/>
                     <a:lstStyle/>
                     <a:p>
-                      <a:pPr indent="0" marL="0">
+                      <a:pPr marL="0" indent="0">
                         <a:buNone/>
                       </a:pPr>
                       <a:r>
@@ -6624,7 +6464,7 @@
                       <a:endParaRPr lang="en-US" sz="950" dirty="0"/>
                     </a:p>
                   </a:txBody>
-                  <a:tcPr marL="91440" marR="91440" marT="45720" marB="45720">
+                  <a:tcPr>
                     <a:lnL w="6350" cap="flat" cmpd="sng" algn="ctr">
                       <a:solidFill>
                         <a:srgbClr val="D0E0D8"/>
@@ -6671,7 +6511,7 @@
                     <a:bodyPr/>
                     <a:lstStyle/>
                     <a:p>
-                      <a:pPr indent="0" marL="0">
+                      <a:pPr marL="0" indent="0">
                         <a:buNone/>
                       </a:pPr>
                       <a:r>
@@ -6685,7 +6525,7 @@
                       <a:endParaRPr lang="en-US" sz="950" dirty="0"/>
                     </a:p>
                   </a:txBody>
-                  <a:tcPr marL="91440" marR="91440" marT="45720" marB="45720">
+                  <a:tcPr>
                     <a:lnL w="6350" cap="flat" cmpd="sng" algn="ctr">
                       <a:solidFill>
                         <a:srgbClr val="D0E0D8"/>
@@ -6727,6 +6567,11 @@
                     </a:solidFill>
                   </a:tcPr>
                 </a:tc>
+                <a:extLst>
+                  <a:ext uri="{0D108BD9-81ED-4DB2-BD59-A6C34878D82A}">
+                    <a16:rowId xmlns:a16="http://schemas.microsoft.com/office/drawing/2014/main" val="10009"/>
+                  </a:ext>
+                </a:extLst>
               </a:tr>
             </a:tbl>
           </a:graphicData>
@@ -6748,6 +6593,7 @@
         <a:solidFill>
           <a:srgbClr val="1B4332"/>
         </a:solidFill>
+        <a:effectLst/>
       </p:bgPr>
     </p:bg>
     <p:spTree>
@@ -6825,7 +6671,7 @@
           <a:bodyPr wrap="square" lIns="0" tIns="0" rIns="0" bIns="0" rtlCol="0" anchor="ctr"/>
           <a:lstStyle/>
           <a:p>
-            <a:pPr indent="0" marL="0">
+            <a:pPr marL="0" indent="0">
               <a:buNone/>
             </a:pPr>
             <a:r>
@@ -6859,7 +6705,7 @@
           </a:solidFill>
           <a:ln/>
           <a:effectLst>
-            <a:outerShdw sx="100000" sy="100000" kx="0" ky="0" algn="bl" rotWithShape="0" blurRad="101600" dist="38100" dir="8100000">
+            <a:outerShdw blurRad="101600" dist="38100" dir="8100000" algn="bl" rotWithShape="0">
               <a:srgbClr val="000000">
                 <a:alpha val="12000"/>
               </a:srgbClr>
@@ -6888,7 +6734,7 @@
           <a:bodyPr wrap="square" lIns="0" tIns="0" rIns="0" bIns="0" rtlCol="0" anchor="ctr"/>
           <a:lstStyle/>
           <a:p>
-            <a:pPr indent="0" marL="0">
+            <a:pPr marL="0" indent="0">
               <a:buNone/>
             </a:pPr>
             <a:r>
@@ -6924,7 +6770,7 @@
           <a:bodyPr wrap="square" lIns="0" tIns="0" rIns="0" bIns="0" rtlCol="0" anchor="ctr"/>
           <a:lstStyle/>
           <a:p>
-            <a:pPr indent="0" marL="0">
+            <a:pPr marL="0" indent="0">
               <a:buNone/>
             </a:pPr>
             <a:r>
@@ -6958,7 +6804,7 @@
           </a:solidFill>
           <a:ln/>
           <a:effectLst>
-            <a:outerShdw sx="100000" sy="100000" kx="0" ky="0" algn="bl" rotWithShape="0" blurRad="101600" dist="38100" dir="8100000">
+            <a:outerShdw blurRad="101600" dist="38100" dir="8100000" algn="bl" rotWithShape="0">
               <a:srgbClr val="000000">
                 <a:alpha val="12000"/>
               </a:srgbClr>
@@ -6987,7 +6833,7 @@
           <a:bodyPr wrap="square" lIns="0" tIns="0" rIns="0" bIns="0" rtlCol="0" anchor="ctr"/>
           <a:lstStyle/>
           <a:p>
-            <a:pPr indent="0" marL="0">
+            <a:pPr marL="0" indent="0">
               <a:buNone/>
             </a:pPr>
             <a:r>
@@ -7023,7 +6869,7 @@
           <a:bodyPr wrap="square" lIns="0" tIns="0" rIns="0" bIns="0" rtlCol="0" anchor="ctr"/>
           <a:lstStyle/>
           <a:p>
-            <a:pPr indent="0" marL="0">
+            <a:pPr marL="0" indent="0">
               <a:buNone/>
             </a:pPr>
             <a:r>
@@ -7057,7 +6903,7 @@
           </a:solidFill>
           <a:ln/>
           <a:effectLst>
-            <a:outerShdw sx="100000" sy="100000" kx="0" ky="0" algn="bl" rotWithShape="0" blurRad="101600" dist="38100" dir="8100000">
+            <a:outerShdw blurRad="101600" dist="38100" dir="8100000" algn="bl" rotWithShape="0">
               <a:srgbClr val="000000">
                 <a:alpha val="12000"/>
               </a:srgbClr>
@@ -7086,7 +6932,7 @@
           <a:bodyPr wrap="square" lIns="0" tIns="0" rIns="0" bIns="0" rtlCol="0" anchor="ctr"/>
           <a:lstStyle/>
           <a:p>
-            <a:pPr indent="0" marL="0">
+            <a:pPr marL="0" indent="0">
               <a:buNone/>
             </a:pPr>
             <a:r>
@@ -7122,7 +6968,7 @@
           <a:bodyPr wrap="square" lIns="0" tIns="0" rIns="0" bIns="0" rtlCol="0" anchor="ctr"/>
           <a:lstStyle/>
           <a:p>
-            <a:pPr indent="0" marL="0">
+            <a:pPr marL="0" indent="0">
               <a:buNone/>
             </a:pPr>
             <a:r>
@@ -7156,7 +7002,7 @@
           </a:solidFill>
           <a:ln/>
           <a:effectLst>
-            <a:outerShdw sx="100000" sy="100000" kx="0" ky="0" algn="bl" rotWithShape="0" blurRad="101600" dist="38100" dir="8100000">
+            <a:outerShdw blurRad="101600" dist="38100" dir="8100000" algn="bl" rotWithShape="0">
               <a:srgbClr val="000000">
                 <a:alpha val="12000"/>
               </a:srgbClr>
@@ -7185,7 +7031,7 @@
           <a:bodyPr wrap="square" lIns="0" tIns="0" rIns="0" bIns="0" rtlCol="0" anchor="ctr"/>
           <a:lstStyle/>
           <a:p>
-            <a:pPr indent="0" marL="0">
+            <a:pPr marL="0" indent="0">
               <a:buNone/>
             </a:pPr>
             <a:r>
@@ -7221,7 +7067,7 @@
           <a:bodyPr wrap="square" lIns="0" tIns="0" rIns="0" bIns="0" rtlCol="0" anchor="ctr"/>
           <a:lstStyle/>
           <a:p>
-            <a:pPr indent="0" marL="0">
+            <a:pPr marL="0" indent="0">
               <a:buNone/>
             </a:pPr>
             <a:r>
@@ -7255,7 +7101,7 @@
           </a:solidFill>
           <a:ln/>
           <a:effectLst>
-            <a:outerShdw sx="100000" sy="100000" kx="0" ky="0" algn="bl" rotWithShape="0" blurRad="101600" dist="38100" dir="8100000">
+            <a:outerShdw blurRad="101600" dist="38100" dir="8100000" algn="bl" rotWithShape="0">
               <a:srgbClr val="000000">
                 <a:alpha val="12000"/>
               </a:srgbClr>
@@ -7284,7 +7130,7 @@
           <a:bodyPr wrap="square" lIns="0" tIns="0" rIns="0" bIns="0" rtlCol="0" anchor="ctr"/>
           <a:lstStyle/>
           <a:p>
-            <a:pPr indent="0" marL="0">
+            <a:pPr marL="0" indent="0">
               <a:buNone/>
             </a:pPr>
             <a:r>
@@ -7320,7 +7166,7 @@
           <a:bodyPr wrap="square" lIns="0" tIns="0" rIns="0" bIns="0" rtlCol="0" anchor="ctr"/>
           <a:lstStyle/>
           <a:p>
-            <a:pPr indent="0" marL="0">
+            <a:pPr marL="0" indent="0">
               <a:buNone/>
             </a:pPr>
             <a:r>
@@ -7354,7 +7200,7 @@
           </a:solidFill>
           <a:ln/>
           <a:effectLst>
-            <a:outerShdw sx="100000" sy="100000" kx="0" ky="0" algn="bl" rotWithShape="0" blurRad="101600" dist="38100" dir="8100000">
+            <a:outerShdw blurRad="101600" dist="38100" dir="8100000" algn="bl" rotWithShape="0">
               <a:srgbClr val="000000">
                 <a:alpha val="12000"/>
               </a:srgbClr>
@@ -7383,7 +7229,7 @@
           <a:bodyPr wrap="square" lIns="0" tIns="0" rIns="0" bIns="0" rtlCol="0" anchor="ctr"/>
           <a:lstStyle/>
           <a:p>
-            <a:pPr indent="0" marL="0">
+            <a:pPr marL="0" indent="0">
               <a:buNone/>
             </a:pPr>
             <a:r>
@@ -7419,7 +7265,7 @@
           <a:bodyPr wrap="square" lIns="0" tIns="0" rIns="0" bIns="0" rtlCol="0" anchor="ctr"/>
           <a:lstStyle/>
           <a:p>
-            <a:pPr indent="0" marL="0">
+            <a:pPr marL="0" indent="0">
               <a:buNone/>
             </a:pPr>
             <a:r>
@@ -7475,7 +7321,7 @@
           <a:bodyPr wrap="square" lIns="0" tIns="0" rIns="0" bIns="0" rtlCol="0" anchor="ctr"/>
           <a:lstStyle/>
           <a:p>
-            <a:pPr algn="ctr" indent="0" marL="0">
+            <a:pPr marL="0" indent="0" algn="ctr">
               <a:buNone/>
             </a:pPr>
             <a:r>
@@ -7506,6 +7352,7 @@
         <a:solidFill>
           <a:srgbClr val="F8F9FA"/>
         </a:solidFill>
+        <a:effectLst/>
       </p:bgPr>
     </p:bg>
     <p:spTree>
@@ -7563,7 +7410,7 @@
           <a:bodyPr wrap="square" lIns="0" tIns="0" rIns="0" bIns="0" rtlCol="0" anchor="ctr"/>
           <a:lstStyle/>
           <a:p>
-            <a:pPr indent="0" marL="0">
+            <a:pPr marL="0" indent="0">
               <a:buNone/>
             </a:pPr>
             <a:r>
@@ -7597,7 +7444,7 @@
           </a:solidFill>
           <a:ln/>
           <a:effectLst>
-            <a:outerShdw sx="100000" sy="100000" kx="0" ky="0" algn="bl" rotWithShape="0" blurRad="101600" dist="38100" dir="8100000">
+            <a:outerShdw blurRad="101600" dist="38100" dir="8100000" algn="bl" rotWithShape="0">
               <a:srgbClr val="000000">
                 <a:alpha val="12000"/>
               </a:srgbClr>
@@ -7646,7 +7493,7 @@
           <a:bodyPr wrap="square" lIns="0" tIns="0" rIns="0" bIns="0" rtlCol="0" anchor="ctr"/>
           <a:lstStyle/>
           <a:p>
-            <a:pPr algn="ctr" indent="0" marL="0">
+            <a:pPr marL="0" indent="0" algn="ctr">
               <a:buNone/>
             </a:pPr>
             <a:r>
@@ -7682,7 +7529,7 @@
           <a:bodyPr wrap="square" lIns="0" tIns="0" rIns="0" bIns="0" rtlCol="0" anchor="ctr"/>
           <a:lstStyle/>
           <a:p>
-            <a:pPr indent="0" marL="0">
+            <a:pPr marL="0" indent="0">
               <a:buNone/>
             </a:pPr>
             <a:r>
@@ -7716,7 +7563,7 @@
           </a:solidFill>
           <a:ln/>
           <a:effectLst>
-            <a:outerShdw sx="100000" sy="100000" kx="0" ky="0" algn="bl" rotWithShape="0" blurRad="101600" dist="38100" dir="8100000">
+            <a:outerShdw blurRad="101600" dist="38100" dir="8100000" algn="bl" rotWithShape="0">
               <a:srgbClr val="000000">
                 <a:alpha val="12000"/>
               </a:srgbClr>
@@ -7765,7 +7612,7 @@
           <a:bodyPr wrap="square" lIns="0" tIns="0" rIns="0" bIns="0" rtlCol="0" anchor="ctr"/>
           <a:lstStyle/>
           <a:p>
-            <a:pPr algn="ctr" indent="0" marL="0">
+            <a:pPr marL="0" indent="0" algn="ctr">
               <a:buNone/>
             </a:pPr>
             <a:r>
@@ -7801,7 +7648,7 @@
           <a:bodyPr wrap="square" lIns="0" tIns="0" rIns="0" bIns="0" rtlCol="0" anchor="ctr"/>
           <a:lstStyle/>
           <a:p>
-            <a:pPr indent="0" marL="0">
+            <a:pPr marL="0" indent="0">
               <a:buNone/>
             </a:pPr>
             <a:r>
@@ -7835,7 +7682,7 @@
           </a:solidFill>
           <a:ln/>
           <a:effectLst>
-            <a:outerShdw sx="100000" sy="100000" kx="0" ky="0" algn="bl" rotWithShape="0" blurRad="101600" dist="38100" dir="8100000">
+            <a:outerShdw blurRad="101600" dist="38100" dir="8100000" algn="bl" rotWithShape="0">
               <a:srgbClr val="000000">
                 <a:alpha val="12000"/>
               </a:srgbClr>
@@ -7884,7 +7731,7 @@
           <a:bodyPr wrap="square" lIns="0" tIns="0" rIns="0" bIns="0" rtlCol="0" anchor="ctr"/>
           <a:lstStyle/>
           <a:p>
-            <a:pPr algn="ctr" indent="0" marL="0">
+            <a:pPr marL="0" indent="0" algn="ctr">
               <a:buNone/>
             </a:pPr>
             <a:r>
@@ -7920,7 +7767,7 @@
           <a:bodyPr wrap="square" lIns="0" tIns="0" rIns="0" bIns="0" rtlCol="0" anchor="ctr"/>
           <a:lstStyle/>
           <a:p>
-            <a:pPr indent="0" marL="0">
+            <a:pPr marL="0" indent="0">
               <a:buNone/>
             </a:pPr>
             <a:r>
@@ -7954,7 +7801,7 @@
           </a:solidFill>
           <a:ln/>
           <a:effectLst>
-            <a:outerShdw sx="100000" sy="100000" kx="0" ky="0" algn="bl" rotWithShape="0" blurRad="101600" dist="38100" dir="8100000">
+            <a:outerShdw blurRad="101600" dist="38100" dir="8100000" algn="bl" rotWithShape="0">
               <a:srgbClr val="000000">
                 <a:alpha val="12000"/>
               </a:srgbClr>
@@ -8003,7 +7850,7 @@
           <a:bodyPr wrap="square" lIns="0" tIns="0" rIns="0" bIns="0" rtlCol="0" anchor="ctr"/>
           <a:lstStyle/>
           <a:p>
-            <a:pPr algn="ctr" indent="0" marL="0">
+            <a:pPr marL="0" indent="0" algn="ctr">
               <a:buNone/>
             </a:pPr>
             <a:r>
@@ -8039,7 +7886,7 @@
           <a:bodyPr wrap="square" lIns="0" tIns="0" rIns="0" bIns="0" rtlCol="0" anchor="ctr"/>
           <a:lstStyle/>
           <a:p>
-            <a:pPr indent="0" marL="0">
+            <a:pPr marL="0" indent="0">
               <a:buNone/>
             </a:pPr>
             <a:r>
@@ -8073,7 +7920,7 @@
           </a:solidFill>
           <a:ln/>
           <a:effectLst>
-            <a:outerShdw sx="100000" sy="100000" kx="0" ky="0" algn="bl" rotWithShape="0" blurRad="101600" dist="38100" dir="8100000">
+            <a:outerShdw blurRad="101600" dist="38100" dir="8100000" algn="bl" rotWithShape="0">
               <a:srgbClr val="000000">
                 <a:alpha val="12000"/>
               </a:srgbClr>
@@ -8122,7 +7969,7 @@
           <a:bodyPr wrap="square" lIns="0" tIns="0" rIns="0" bIns="0" rtlCol="0" anchor="ctr"/>
           <a:lstStyle/>
           <a:p>
-            <a:pPr algn="ctr" indent="0" marL="0">
+            <a:pPr marL="0" indent="0" algn="ctr">
               <a:buNone/>
             </a:pPr>
             <a:r>
@@ -8158,7 +8005,7 @@
           <a:bodyPr wrap="square" lIns="0" tIns="0" rIns="0" bIns="0" rtlCol="0" anchor="ctr"/>
           <a:lstStyle/>
           <a:p>
-            <a:pPr indent="0" marL="0">
+            <a:pPr marL="0" indent="0">
               <a:buNone/>
             </a:pPr>
             <a:r>
@@ -8192,7 +8039,7 @@
           </a:solidFill>
           <a:ln/>
           <a:effectLst>
-            <a:outerShdw sx="100000" sy="100000" kx="0" ky="0" algn="bl" rotWithShape="0" blurRad="101600" dist="38100" dir="8100000">
+            <a:outerShdw blurRad="101600" dist="38100" dir="8100000" algn="bl" rotWithShape="0">
               <a:srgbClr val="000000">
                 <a:alpha val="12000"/>
               </a:srgbClr>
@@ -8241,7 +8088,7 @@
           <a:bodyPr wrap="square" lIns="0" tIns="0" rIns="0" bIns="0" rtlCol="0" anchor="ctr"/>
           <a:lstStyle/>
           <a:p>
-            <a:pPr algn="ctr" indent="0" marL="0">
+            <a:pPr marL="0" indent="0" algn="ctr">
               <a:buNone/>
             </a:pPr>
             <a:r>
@@ -8277,7 +8124,7 @@
           <a:bodyPr wrap="square" lIns="0" tIns="0" rIns="0" bIns="0" rtlCol="0" anchor="ctr"/>
           <a:lstStyle/>
           <a:p>
-            <a:pPr indent="0" marL="0">
+            <a:pPr marL="0" indent="0">
               <a:buNone/>
             </a:pPr>
             <a:r>
@@ -8311,7 +8158,7 @@
           </a:solidFill>
           <a:ln/>
           <a:effectLst>
-            <a:outerShdw sx="100000" sy="100000" kx="0" ky="0" algn="bl" rotWithShape="0" blurRad="101600" dist="38100" dir="8100000">
+            <a:outerShdw blurRad="101600" dist="38100" dir="8100000" algn="bl" rotWithShape="0">
               <a:srgbClr val="000000">
                 <a:alpha val="12000"/>
               </a:srgbClr>
@@ -8360,7 +8207,7 @@
           <a:bodyPr wrap="square" lIns="0" tIns="0" rIns="0" bIns="0" rtlCol="0" anchor="ctr"/>
           <a:lstStyle/>
           <a:p>
-            <a:pPr algn="ctr" indent="0" marL="0">
+            <a:pPr marL="0" indent="0" algn="ctr">
               <a:buNone/>
             </a:pPr>
             <a:r>
@@ -8396,7 +8243,7 @@
           <a:bodyPr wrap="square" lIns="0" tIns="0" rIns="0" bIns="0" rtlCol="0" anchor="ctr"/>
           <a:lstStyle/>
           <a:p>
-            <a:pPr indent="0" marL="0">
+            <a:pPr marL="0" indent="0">
               <a:buNone/>
             </a:pPr>
             <a:r>
@@ -8430,7 +8277,7 @@
           </a:solidFill>
           <a:ln/>
           <a:effectLst>
-            <a:outerShdw sx="100000" sy="100000" kx="0" ky="0" algn="bl" rotWithShape="0" blurRad="101600" dist="38100" dir="8100000">
+            <a:outerShdw blurRad="101600" dist="38100" dir="8100000" algn="bl" rotWithShape="0">
               <a:srgbClr val="000000">
                 <a:alpha val="12000"/>
               </a:srgbClr>
@@ -8479,7 +8326,7 @@
           <a:bodyPr wrap="square" lIns="0" tIns="0" rIns="0" bIns="0" rtlCol="0" anchor="ctr"/>
           <a:lstStyle/>
           <a:p>
-            <a:pPr algn="ctr" indent="0" marL="0">
+            <a:pPr marL="0" indent="0" algn="ctr">
               <a:buNone/>
             </a:pPr>
             <a:r>
@@ -8515,7 +8362,7 @@
           <a:bodyPr wrap="square" lIns="0" tIns="0" rIns="0" bIns="0" rtlCol="0" anchor="ctr"/>
           <a:lstStyle/>
           <a:p>
-            <a:pPr indent="0" marL="0">
+            <a:pPr marL="0" indent="0">
               <a:buNone/>
             </a:pPr>
             <a:r>
@@ -8546,6 +8393,7 @@
         <a:solidFill>
           <a:srgbClr val="FFFFFF"/>
         </a:solidFill>
+        <a:effectLst/>
       </p:bgPr>
     </p:bg>
     <p:spTree>
@@ -8603,7 +8451,7 @@
           <a:bodyPr wrap="square" lIns="0" tIns="0" rIns="0" bIns="0" rtlCol="0" anchor="ctr"/>
           <a:lstStyle/>
           <a:p>
-            <a:pPr indent="0" marL="0">
+            <a:pPr marL="0" indent="0">
               <a:buNone/>
             </a:pPr>
             <a:r>
@@ -8637,7 +8485,7 @@
           </a:solidFill>
           <a:ln/>
           <a:effectLst>
-            <a:outerShdw sx="100000" sy="100000" kx="0" ky="0" algn="bl" rotWithShape="0" blurRad="101600" dist="38100" dir="8100000">
+            <a:outerShdw blurRad="101600" dist="38100" dir="8100000" algn="bl" rotWithShape="0">
               <a:srgbClr val="000000">
                 <a:alpha val="12000"/>
               </a:srgbClr>
@@ -8666,7 +8514,7 @@
           <a:bodyPr wrap="square" lIns="3175" tIns="3175" rIns="3175" bIns="3175" rtlCol="0" anchor="ctr"/>
           <a:lstStyle/>
           <a:p>
-            <a:pPr indent="0" marL="0">
+            <a:pPr marL="0" indent="0">
               <a:buNone/>
             </a:pPr>
             <a:r>
@@ -8677,9 +8525,6 @@
               </a:rPr>
               <a:t>Définition : </a:t>
             </a:r>
-            <a:pPr indent="0" marL="0">
-              <a:buNone/>
-            </a:pPr>
             <a:r>
               <a:rPr lang="en-US" sz="1200" dirty="0">
                 <a:solidFill>
@@ -8711,7 +8556,7 @@
           </a:solidFill>
           <a:ln/>
           <a:effectLst>
-            <a:outerShdw sx="100000" sy="100000" kx="0" ky="0" algn="bl" rotWithShape="0" blurRad="101600" dist="38100" dir="8100000">
+            <a:outerShdw blurRad="101600" dist="38100" dir="8100000" algn="bl" rotWithShape="0">
               <a:srgbClr val="000000">
                 <a:alpha val="12000"/>
               </a:srgbClr>
@@ -8740,7 +8585,7 @@
           <a:bodyPr wrap="square" lIns="0" tIns="0" rIns="0" bIns="0" rtlCol="0" anchor="ctr"/>
           <a:lstStyle/>
           <a:p>
-            <a:pPr indent="0" marL="0">
+            <a:pPr marL="0" indent="0">
               <a:buNone/>
             </a:pPr>
             <a:r>
@@ -8796,7 +8641,7 @@
           <a:bodyPr wrap="square" lIns="0" tIns="0" rIns="0" bIns="0" rtlCol="0" anchor="t"/>
           <a:lstStyle/>
           <a:p>
-            <a:pPr indent="0" marL="0">
+            <a:pPr marL="0" indent="0">
               <a:buNone/>
             </a:pPr>
             <a:r>
@@ -8810,7 +8655,7 @@
             <a:endParaRPr lang="en-US" sz="1050" dirty="0"/>
           </a:p>
           <a:p>
-            <a:pPr indent="0" marL="0">
+            <a:pPr marL="0" indent="0">
               <a:buNone/>
             </a:pPr>
             <a:r>
@@ -8824,7 +8669,7 @@
             <a:endParaRPr lang="en-US" sz="1050" dirty="0"/>
           </a:p>
           <a:p>
-            <a:pPr indent="0" marL="0">
+            <a:pPr marL="0" indent="0">
               <a:buNone/>
             </a:pPr>
             <a:r>
@@ -8838,7 +8683,7 @@
             <a:endParaRPr lang="en-US" sz="1050" dirty="0"/>
           </a:p>
           <a:p>
-            <a:pPr indent="0" marL="0">
+            <a:pPr marL="0" indent="0">
               <a:buNone/>
             </a:pPr>
             <a:r>
@@ -8872,7 +8717,7 @@
           </a:solidFill>
           <a:ln/>
           <a:effectLst>
-            <a:outerShdw sx="100000" sy="100000" kx="0" ky="0" algn="bl" rotWithShape="0" blurRad="101600" dist="38100" dir="8100000">
+            <a:outerShdw blurRad="101600" dist="38100" dir="8100000" algn="bl" rotWithShape="0">
               <a:srgbClr val="000000">
                 <a:alpha val="12000"/>
               </a:srgbClr>
@@ -8901,7 +8746,7 @@
           <a:bodyPr wrap="square" lIns="0" tIns="0" rIns="0" bIns="0" rtlCol="0" anchor="ctr"/>
           <a:lstStyle/>
           <a:p>
-            <a:pPr indent="0" marL="0">
+            <a:pPr marL="0" indent="0">
               <a:buNone/>
             </a:pPr>
             <a:r>
@@ -8957,7 +8802,7 @@
           <a:bodyPr wrap="square" lIns="0" tIns="0" rIns="0" bIns="0" rtlCol="0" anchor="t"/>
           <a:lstStyle/>
           <a:p>
-            <a:pPr indent="0" marL="0">
+            <a:pPr marL="0" indent="0">
               <a:buNone/>
             </a:pPr>
             <a:r>
@@ -8971,7 +8816,7 @@
             <a:endParaRPr lang="en-US" sz="1050" dirty="0"/>
           </a:p>
           <a:p>
-            <a:pPr indent="0" marL="0">
+            <a:pPr marL="0" indent="0">
               <a:buNone/>
             </a:pPr>
             <a:r>
@@ -8985,7 +8830,7 @@
             <a:endParaRPr lang="en-US" sz="1050" dirty="0"/>
           </a:p>
           <a:p>
-            <a:pPr indent="0" marL="0">
+            <a:pPr marL="0" indent="0">
               <a:buNone/>
             </a:pPr>
             <a:r>
@@ -8999,7 +8844,7 @@
             <a:endParaRPr lang="en-US" sz="1050" dirty="0"/>
           </a:p>
           <a:p>
-            <a:pPr indent="0" marL="0">
+            <a:pPr marL="0" indent="0">
               <a:buNone/>
             </a:pPr>
             <a:r>
@@ -9033,7 +8878,7 @@
           </a:solidFill>
           <a:ln/>
           <a:effectLst>
-            <a:outerShdw sx="100000" sy="100000" kx="0" ky="0" algn="bl" rotWithShape="0" blurRad="101600" dist="38100" dir="8100000">
+            <a:outerShdw blurRad="101600" dist="38100" dir="8100000" algn="bl" rotWithShape="0">
               <a:srgbClr val="000000">
                 <a:alpha val="12000"/>
               </a:srgbClr>
@@ -9062,7 +8907,7 @@
           <a:bodyPr wrap="square" lIns="0" tIns="0" rIns="0" bIns="0" rtlCol="0" anchor="ctr"/>
           <a:lstStyle/>
           <a:p>
-            <a:pPr indent="0" marL="0">
+            <a:pPr marL="0" indent="0">
               <a:buNone/>
             </a:pPr>
             <a:r>
@@ -9118,7 +8963,7 @@
           <a:bodyPr wrap="square" lIns="0" tIns="0" rIns="0" bIns="0" rtlCol="0" anchor="t"/>
           <a:lstStyle/>
           <a:p>
-            <a:pPr indent="0" marL="0">
+            <a:pPr marL="0" indent="0">
               <a:buNone/>
             </a:pPr>
             <a:r>
@@ -9132,7 +8977,7 @@
             <a:endParaRPr lang="en-US" sz="1050" dirty="0"/>
           </a:p>
           <a:p>
-            <a:pPr indent="0" marL="0">
+            <a:pPr marL="0" indent="0">
               <a:buNone/>
             </a:pPr>
             <a:r>
@@ -9146,7 +8991,7 @@
             <a:endParaRPr lang="en-US" sz="1050" dirty="0"/>
           </a:p>
           <a:p>
-            <a:pPr indent="0" marL="0">
+            <a:pPr marL="0" indent="0">
               <a:buNone/>
             </a:pPr>
             <a:r>
@@ -9160,7 +9005,7 @@
             <a:endParaRPr lang="en-US" sz="1050" dirty="0"/>
           </a:p>
           <a:p>
-            <a:pPr indent="0" marL="0">
+            <a:pPr marL="0" indent="0">
               <a:buNone/>
             </a:pPr>
             <a:r>
@@ -9196,7 +9041,7 @@
           <a:bodyPr wrap="square" lIns="0" tIns="0" rIns="0" bIns="0" rtlCol="0" anchor="ctr"/>
           <a:lstStyle/>
           <a:p>
-            <a:pPr algn="ctr" indent="0" marL="0">
+            <a:pPr marL="0" indent="0" algn="ctr">
               <a:buNone/>
             </a:pPr>
             <a:r>
@@ -9227,6 +9072,7 @@
         <a:solidFill>
           <a:srgbClr val="FFFFFF"/>
         </a:solidFill>
+        <a:effectLst/>
       </p:bgPr>
     </p:bg>
     <p:spTree>
@@ -9284,7 +9130,7 @@
           <a:bodyPr wrap="square" lIns="0" tIns="0" rIns="0" bIns="0" rtlCol="0" anchor="ctr"/>
           <a:lstStyle/>
           <a:p>
-            <a:pPr indent="0" marL="0">
+            <a:pPr marL="0" indent="0">
               <a:buNone/>
             </a:pPr>
             <a:r>
@@ -9318,7 +9164,7 @@
           </a:solidFill>
           <a:ln/>
           <a:effectLst>
-            <a:outerShdw sx="100000" sy="100000" kx="0" ky="0" algn="bl" rotWithShape="0" blurRad="101600" dist="38100" dir="8100000">
+            <a:outerShdw blurRad="101600" dist="38100" dir="8100000" algn="bl" rotWithShape="0">
               <a:srgbClr val="000000">
                 <a:alpha val="12000"/>
               </a:srgbClr>
@@ -9367,7 +9213,7 @@
           <a:bodyPr wrap="square" lIns="0" tIns="0" rIns="0" bIns="0" rtlCol="0" anchor="ctr"/>
           <a:lstStyle/>
           <a:p>
-            <a:pPr algn="ctr" indent="0" marL="0">
+            <a:pPr marL="0" indent="0" algn="ctr">
               <a:buNone/>
             </a:pPr>
             <a:r>
@@ -9403,7 +9249,7 @@
           <a:bodyPr wrap="square" lIns="0" tIns="0" rIns="0" bIns="0" rtlCol="0" anchor="t"/>
           <a:lstStyle/>
           <a:p>
-            <a:pPr indent="0" marL="0">
+            <a:pPr marL="0" indent="0">
               <a:buNone/>
             </a:pPr>
             <a:r>
@@ -9414,9 +9260,6 @@
               </a:rPr>
               <a:t>Objectif : </a:t>
             </a:r>
-            <a:pPr indent="0" marL="0">
-              <a:buNone/>
-            </a:pPr>
             <a:r>
               <a:rPr lang="en-US" sz="1050" dirty="0">
                 <a:solidFill>
@@ -9426,9 +9269,6 @@
               <a:t>Comparer ≥ 2 moyennes de groupes
 </a:t>
             </a:r>
-            <a:pPr indent="0" marL="0">
-              <a:buNone/>
-            </a:pPr>
             <a:r>
               <a:rPr lang="en-US" sz="1050" b="1" dirty="0">
                 <a:solidFill>
@@ -9438,9 +9278,6 @@
               <a:t>Conditions d'application :
 </a:t>
             </a:r>
-            <a:pPr indent="0" marL="0">
-              <a:buNone/>
-            </a:pPr>
             <a:r>
               <a:rPr lang="en-US" sz="1050" dirty="0">
                 <a:solidFill>
@@ -9452,9 +9289,6 @@
 ✔ Indépendance des observations
 </a:t>
             </a:r>
-            <a:pPr indent="0" marL="0">
-              <a:buNone/>
-            </a:pPr>
             <a:r>
               <a:rPr lang="en-US" sz="1050" b="1" dirty="0">
                 <a:solidFill>
@@ -9464,9 +9298,6 @@
               <a:t>Types :
 </a:t>
             </a:r>
-            <a:pPr indent="0" marL="0">
-              <a:buNone/>
-            </a:pPr>
             <a:r>
               <a:rPr lang="en-US" sz="1050" dirty="0">
                 <a:solidFill>
@@ -9479,9 +9310,6 @@
 • ANCOVA (covariable continue)
 </a:t>
             </a:r>
-            <a:pPr indent="0" marL="0">
-              <a:buNone/>
-            </a:pPr>
             <a:r>
               <a:rPr lang="en-US" sz="1050" b="1" dirty="0">
                 <a:solidFill>
@@ -9490,9 +9318,6 @@
               </a:rPr>
               <a:t>Post-hoc : </a:t>
             </a:r>
-            <a:pPr indent="0" marL="0">
-              <a:buNone/>
-            </a:pPr>
             <a:r>
               <a:rPr lang="en-US" sz="1050" dirty="0">
                 <a:solidFill>
@@ -9524,7 +9349,7 @@
           </a:solidFill>
           <a:ln/>
           <a:effectLst>
-            <a:outerShdw sx="100000" sy="100000" kx="0" ky="0" algn="bl" rotWithShape="0" blurRad="101600" dist="38100" dir="8100000">
+            <a:outerShdw blurRad="101600" dist="38100" dir="8100000" algn="bl" rotWithShape="0">
               <a:srgbClr val="000000">
                 <a:alpha val="12000"/>
               </a:srgbClr>
@@ -9573,7 +9398,7 @@
           <a:bodyPr wrap="square" lIns="0" tIns="0" rIns="0" bIns="0" rtlCol="0" anchor="ctr"/>
           <a:lstStyle/>
           <a:p>
-            <a:pPr algn="ctr" indent="0" marL="0">
+            <a:pPr marL="0" indent="0" algn="ctr">
               <a:buNone/>
             </a:pPr>
             <a:r>
@@ -9609,7 +9434,7 @@
           <a:bodyPr wrap="square" lIns="0" tIns="0" rIns="0" bIns="0" rtlCol="0" anchor="t"/>
           <a:lstStyle/>
           <a:p>
-            <a:pPr indent="0" marL="0">
+            <a:pPr marL="0" indent="0">
               <a:buNone/>
             </a:pPr>
             <a:r>
@@ -9624,9 +9449,6 @@
               <a:t># Chargement des données
 </a:t>
             </a:r>
-            <a:pPr indent="0" marL="0">
-              <a:buNone/>
-            </a:pPr>
             <a:r>
               <a:rPr lang="en-US" sz="950" dirty="0">
                 <a:solidFill>
@@ -9638,9 +9460,6 @@
               </a:rPr>
               <a:t>data</a:t>
             </a:r>
-            <a:pPr indent="0" marL="0">
-              <a:buNone/>
-            </a:pPr>
             <a:r>
               <a:rPr lang="en-US" sz="950" dirty="0">
                 <a:solidFill>
@@ -9653,9 +9472,6 @@
               <a:t> &lt;- read.csv('rendement.csv')
 </a:t>
             </a:r>
-            <a:pPr indent="0" marL="0">
-              <a:buNone/>
-            </a:pPr>
             <a:r>
               <a:rPr lang="en-US" sz="950" dirty="0">
                 <a:solidFill>
@@ -9668,9 +9484,6 @@
               <a:t># Vérification normalité
 </a:t>
             </a:r>
-            <a:pPr indent="0" marL="0">
-              <a:buNone/>
-            </a:pPr>
             <a:r>
               <a:rPr lang="en-US" sz="950" dirty="0">
                 <a:solidFill>
@@ -9682,9 +9495,6 @@
               </a:rPr>
               <a:t>shapiro.test</a:t>
             </a:r>
-            <a:pPr indent="0" marL="0">
-              <a:buNone/>
-            </a:pPr>
             <a:r>
               <a:rPr lang="en-US" sz="950" dirty="0">
                 <a:solidFill>
@@ -9697,9 +9507,6 @@
               <a:t>(data$rendement)
 </a:t>
             </a:r>
-            <a:pPr indent="0" marL="0">
-              <a:buNone/>
-            </a:pPr>
             <a:r>
               <a:rPr lang="en-US" sz="950" dirty="0">
                 <a:solidFill>
@@ -9712,9 +9519,6 @@
               <a:t># Homogénéité des variances
 </a:t>
             </a:r>
-            <a:pPr indent="0" marL="0">
-              <a:buNone/>
-            </a:pPr>
             <a:r>
               <a:rPr lang="en-US" sz="950" dirty="0">
                 <a:solidFill>
@@ -9726,9 +9530,6 @@
               </a:rPr>
               <a:t>bartlett.test</a:t>
             </a:r>
-            <a:pPr indent="0" marL="0">
-              <a:buNone/>
-            </a:pPr>
             <a:r>
               <a:rPr lang="en-US" sz="950" dirty="0">
                 <a:solidFill>
@@ -9741,9 +9542,6 @@
               <a:t>(rendement ~ traitement, data)
 </a:t>
             </a:r>
-            <a:pPr indent="0" marL="0">
-              <a:buNone/>
-            </a:pPr>
             <a:r>
               <a:rPr lang="en-US" sz="950" dirty="0">
                 <a:solidFill>
@@ -9756,9 +9554,6 @@
               <a:t># Modèle ANOVA à 1 facteur
 </a:t>
             </a:r>
-            <a:pPr indent="0" marL="0">
-              <a:buNone/>
-            </a:pPr>
             <a:r>
               <a:rPr lang="en-US" sz="950" dirty="0">
                 <a:solidFill>
@@ -9770,9 +9565,6 @@
               </a:rPr>
               <a:t>modele </a:t>
             </a:r>
-            <a:pPr indent="0" marL="0">
-              <a:buNone/>
-            </a:pPr>
             <a:r>
               <a:rPr lang="en-US" sz="950" dirty="0">
                 <a:solidFill>
@@ -9784,9 +9576,6 @@
               </a:rPr>
               <a:t>&lt;- </a:t>
             </a:r>
-            <a:pPr indent="0" marL="0">
-              <a:buNone/>
-            </a:pPr>
             <a:r>
               <a:rPr lang="en-US" sz="950" dirty="0">
                 <a:solidFill>
@@ -9798,9 +9587,6 @@
               </a:rPr>
               <a:t>aov</a:t>
             </a:r>
-            <a:pPr indent="0" marL="0">
-              <a:buNone/>
-            </a:pPr>
             <a:r>
               <a:rPr lang="en-US" sz="950" dirty="0">
                 <a:solidFill>
@@ -9813,9 +9599,6 @@
               <a:t>(rendement ~ traitement, data)
 </a:t>
             </a:r>
-            <a:pPr indent="0" marL="0">
-              <a:buNone/>
-            </a:pPr>
             <a:r>
               <a:rPr lang="en-US" sz="950" dirty="0">
                 <a:solidFill>
@@ -9827,9 +9610,6 @@
               </a:rPr>
               <a:t>summary</a:t>
             </a:r>
-            <a:pPr indent="0" marL="0">
-              <a:buNone/>
-            </a:pPr>
             <a:r>
               <a:rPr lang="en-US" sz="950" dirty="0">
                 <a:solidFill>
@@ -9842,9 +9622,6 @@
               <a:t>(modele)
 </a:t>
             </a:r>
-            <a:pPr indent="0" marL="0">
-              <a:buNone/>
-            </a:pPr>
             <a:r>
               <a:rPr lang="en-US" sz="950" dirty="0">
                 <a:solidFill>
@@ -9857,9 +9634,6 @@
               <a:t># Test post-hoc Tukey
 </a:t>
             </a:r>
-            <a:pPr indent="0" marL="0">
-              <a:buNone/>
-            </a:pPr>
             <a:r>
               <a:rPr lang="en-US" sz="950" dirty="0">
                 <a:solidFill>
@@ -9871,9 +9645,6 @@
               </a:rPr>
               <a:t>TukeyHSD</a:t>
             </a:r>
-            <a:pPr indent="0" marL="0">
-              <a:buNone/>
-            </a:pPr>
             <a:r>
               <a:rPr lang="en-US" sz="950" dirty="0">
                 <a:solidFill>
@@ -9886,9 +9657,6 @@
               <a:t>(modele)
 </a:t>
             </a:r>
-            <a:pPr indent="0" marL="0">
-              <a:buNone/>
-            </a:pPr>
             <a:r>
               <a:rPr lang="en-US" sz="950" dirty="0">
                 <a:solidFill>
@@ -9901,9 +9669,6 @@
               <a:t># ANOVA à 2 facteurs
 </a:t>
             </a:r>
-            <a:pPr indent="0" marL="0">
-              <a:buNone/>
-            </a:pPr>
             <a:r>
               <a:rPr lang="en-US" sz="950" dirty="0">
                 <a:solidFill>
@@ -9915,9 +9680,6 @@
               </a:rPr>
               <a:t>aov</a:t>
             </a:r>
-            <a:pPr indent="0" marL="0">
-              <a:buNone/>
-            </a:pPr>
             <a:r>
               <a:rPr lang="en-US" sz="950" dirty="0">
                 <a:solidFill>
@@ -9930,9 +9692,6 @@
               <a:t>(rendement ~ variete * irrigation, data)
 </a:t>
             </a:r>
-            <a:pPr indent="0" marL="0">
-              <a:buNone/>
-            </a:pPr>
             <a:r>
               <a:rPr lang="en-US" sz="950" dirty="0">
                 <a:solidFill>
@@ -9943,36 +9702,8 @@
                 <a:cs typeface="Courier New" pitchFamily="34" charset="-120"/>
               </a:rPr>
               <a:t># Exemple application
-</a:t>
-            </a:r>
-            <a:pPr indent="0" marL="0">
-              <a:buNone/>
-            </a:pPr>
-            <a:r>
-              <a:rPr lang="en-US" sz="950" dirty="0">
-                <a:solidFill>
-                  <a:srgbClr val="6A9955"/>
-                </a:solidFill>
-                <a:latin typeface="Courier New" pitchFamily="34" charset="0"/>
-                <a:ea typeface="Courier New" pitchFamily="34" charset="-122"/>
-                <a:cs typeface="Courier New" pitchFamily="34" charset="-120"/>
-              </a:rPr>
-              <a:t># Production végétale : effet de 4 doses
-</a:t>
-            </a:r>
-            <a:pPr indent="0" marL="0">
-              <a:buNone/>
-            </a:pPr>
-            <a:r>
-              <a:rPr lang="en-US" sz="950" dirty="0">
-                <a:solidFill>
-                  <a:srgbClr val="6A9955"/>
-                </a:solidFill>
-                <a:latin typeface="Courier New" pitchFamily="34" charset="0"/>
-                <a:ea typeface="Courier New" pitchFamily="34" charset="-122"/>
-                <a:cs typeface="Courier New" pitchFamily="34" charset="-120"/>
-              </a:rPr>
-              <a:t># d'azote sur le rendement du blé dur
+# Production végétale : effet de 4 doses
+# d'azote sur le rendement du blé dur
 </a:t>
             </a:r>
             <a:endParaRPr lang="en-US" sz="950" dirty="0"/>
@@ -9995,6 +9726,7 @@
         <a:solidFill>
           <a:srgbClr val="FFFFFF"/>
         </a:solidFill>
+        <a:effectLst/>
       </p:bgPr>
     </p:bg>
     <p:spTree>
@@ -10052,7 +9784,7 @@
           <a:bodyPr wrap="square" lIns="0" tIns="0" rIns="0" bIns="0" rtlCol="0" anchor="ctr"/>
           <a:lstStyle/>
           <a:p>
-            <a:pPr indent="0" marL="0">
+            <a:pPr marL="0" indent="0">
               <a:buNone/>
             </a:pPr>
             <a:r>
@@ -10086,7 +9818,7 @@
           </a:solidFill>
           <a:ln/>
           <a:effectLst>
-            <a:outerShdw sx="100000" sy="100000" kx="0" ky="0" algn="bl" rotWithShape="0" blurRad="101600" dist="38100" dir="8100000">
+            <a:outerShdw blurRad="101600" dist="38100" dir="8100000" algn="bl" rotWithShape="0">
               <a:srgbClr val="000000">
                 <a:alpha val="12000"/>
               </a:srgbClr>
@@ -10135,7 +9867,7 @@
           <a:bodyPr wrap="square" lIns="0" tIns="0" rIns="0" bIns="0" rtlCol="0" anchor="ctr"/>
           <a:lstStyle/>
           <a:p>
-            <a:pPr algn="ctr" indent="0" marL="0">
+            <a:pPr marL="0" indent="0" algn="ctr">
               <a:buNone/>
             </a:pPr>
             <a:r>
@@ -10171,7 +9903,7 @@
           <a:bodyPr wrap="square" lIns="0" tIns="0" rIns="0" bIns="0" rtlCol="0" anchor="t"/>
           <a:lstStyle/>
           <a:p>
-            <a:pPr indent="0" marL="0">
+            <a:pPr marL="0" indent="0">
               <a:buNone/>
             </a:pPr>
             <a:r>
@@ -10182,9 +9914,6 @@
               </a:rPr>
               <a:t>Objectif : </a:t>
             </a:r>
-            <a:pPr indent="0" marL="0">
-              <a:buNone/>
-            </a:pPr>
             <a:r>
               <a:rPr lang="en-US" sz="1050" dirty="0">
                 <a:solidFill>
@@ -10194,9 +9923,6 @@
               <a:t>Modéliser la relation entre Y (continue) et X(s)
 </a:t>
             </a:r>
-            <a:pPr indent="0" marL="0">
-              <a:buNone/>
-            </a:pPr>
             <a:r>
               <a:rPr lang="en-US" sz="1050" b="1" dirty="0">
                 <a:solidFill>
@@ -10205,9 +9931,6 @@
               </a:rPr>
               <a:t>Modèle : </a:t>
             </a:r>
-            <a:pPr indent="0" marL="0">
-              <a:buNone/>
-            </a:pPr>
             <a:r>
               <a:rPr lang="en-US" sz="1050" i="1" dirty="0">
                 <a:solidFill>
@@ -10217,9 +9940,6 @@
               <a:t>Y = β₀ + β₁X₁ + … + βₙXₙ + ε
 </a:t>
             </a:r>
-            <a:pPr indent="0" marL="0">
-              <a:buNone/>
-            </a:pPr>
             <a:r>
               <a:rPr lang="en-US" sz="1050" b="1" dirty="0">
                 <a:solidFill>
@@ -10229,9 +9949,6 @@
               <a:t>Conditions (LINE) :
 </a:t>
             </a:r>
-            <a:pPr indent="0" marL="0">
-              <a:buNone/>
-            </a:pPr>
             <a:r>
               <a:rPr lang="en-US" sz="1050" dirty="0">
                 <a:solidFill>
@@ -10244,9 +9961,6 @@
 ✔ Égalité des variances (homoscédasticité)
 </a:t>
             </a:r>
-            <a:pPr indent="0" marL="0">
-              <a:buNone/>
-            </a:pPr>
             <a:r>
               <a:rPr lang="en-US" sz="1050" b="1" dirty="0">
                 <a:solidFill>
@@ -10256,9 +9970,6 @@
               <a:t>Applications agronomiques :
 </a:t>
             </a:r>
-            <a:pPr indent="0" marL="0">
-              <a:buNone/>
-            </a:pPr>
             <a:r>
               <a:rPr lang="en-US" sz="1050" dirty="0">
                 <a:solidFill>
@@ -10271,9 +9982,6 @@
 • Index de qualité environnementale
 </a:t>
             </a:r>
-            <a:pPr indent="0" marL="0">
-              <a:buNone/>
-            </a:pPr>
             <a:r>
               <a:rPr lang="en-US" sz="1050" b="1" dirty="0">
                 <a:solidFill>
@@ -10282,9 +9990,6 @@
               </a:rPr>
               <a:t>Métriques : </a:t>
             </a:r>
-            <a:pPr indent="0" marL="0">
-              <a:buNone/>
-            </a:pPr>
             <a:r>
               <a:rPr lang="en-US" sz="1050" dirty="0">
                 <a:solidFill>
@@ -10316,7 +10021,7 @@
           </a:solidFill>
           <a:ln/>
           <a:effectLst>
-            <a:outerShdw sx="100000" sy="100000" kx="0" ky="0" algn="bl" rotWithShape="0" blurRad="101600" dist="38100" dir="8100000">
+            <a:outerShdw blurRad="101600" dist="38100" dir="8100000" algn="bl" rotWithShape="0">
               <a:srgbClr val="000000">
                 <a:alpha val="12000"/>
               </a:srgbClr>
@@ -10365,7 +10070,7 @@
           <a:bodyPr wrap="square" lIns="0" tIns="0" rIns="0" bIns="0" rtlCol="0" anchor="ctr"/>
           <a:lstStyle/>
           <a:p>
-            <a:pPr algn="ctr" indent="0" marL="0">
+            <a:pPr marL="0" indent="0" algn="ctr">
               <a:buNone/>
             </a:pPr>
             <a:r>
@@ -10401,7 +10106,7 @@
           <a:bodyPr wrap="square" lIns="0" tIns="0" rIns="0" bIns="0" rtlCol="0" anchor="t"/>
           <a:lstStyle/>
           <a:p>
-            <a:pPr indent="0" marL="0">
+            <a:pPr marL="0" indent="0">
               <a:buNone/>
             </a:pPr>
             <a:r>
@@ -10416,9 +10121,6 @@
               <a:t># Exemple : rendement maïs ~ facteurs
 </a:t>
             </a:r>
-            <a:pPr indent="0" marL="0">
-              <a:buNone/>
-            </a:pPr>
             <a:r>
               <a:rPr lang="en-US" sz="900" dirty="0">
                 <a:solidFill>
@@ -10430,9 +10132,6 @@
               </a:rPr>
               <a:t>data </a:t>
             </a:r>
-            <a:pPr indent="0" marL="0">
-              <a:buNone/>
-            </a:pPr>
             <a:r>
               <a:rPr lang="en-US" sz="900" dirty="0">
                 <a:solidFill>
@@ -10444,9 +10143,6 @@
               </a:rPr>
               <a:t>&lt;- </a:t>
             </a:r>
-            <a:pPr indent="0" marL="0">
-              <a:buNone/>
-            </a:pPr>
             <a:r>
               <a:rPr lang="en-US" sz="900" dirty="0">
                 <a:solidFill>
@@ -10458,9 +10154,6 @@
               </a:rPr>
               <a:t>read.csv</a:t>
             </a:r>
-            <a:pPr indent="0" marL="0">
-              <a:buNone/>
-            </a:pPr>
             <a:r>
               <a:rPr lang="en-US" sz="900" dirty="0">
                 <a:solidFill>
@@ -10473,9 +10166,6 @@
               <a:t>('mais_data.csv')
 </a:t>
             </a:r>
-            <a:pPr indent="0" marL="0">
-              <a:buNone/>
-            </a:pPr>
             <a:r>
               <a:rPr lang="en-US" sz="900" dirty="0">
                 <a:solidFill>
@@ -10488,9 +10178,6 @@
               <a:t># Régression simple
 </a:t>
             </a:r>
-            <a:pPr indent="0" marL="0">
-              <a:buNone/>
-            </a:pPr>
             <a:r>
               <a:rPr lang="en-US" sz="900" dirty="0">
                 <a:solidFill>
@@ -10500,84 +10187,67 @@
                 <a:ea typeface="Courier New" pitchFamily="34" charset="-122"/>
                 <a:cs typeface="Courier New" pitchFamily="34" charset="-120"/>
               </a:rPr>
-              <a:t>lm1 &lt;- lm</a:t>
-            </a:r>
-            <a:pPr indent="0" marL="0">
-              <a:buNone/>
-            </a:pPr>
+              <a:t>lm1 &lt;- lm(rendement ~ dose_N, data)
+</a:t>
+            </a:r>
             <a:r>
               <a:rPr lang="en-US" sz="900" dirty="0">
                 <a:solidFill>
-                  <a:srgbClr val="9CDCFE"/>
+                  <a:srgbClr val="DCDCAA"/>
                 </a:solidFill>
                 <a:latin typeface="Courier New" pitchFamily="34" charset="0"/>
                 <a:ea typeface="Courier New" pitchFamily="34" charset="-122"/>
                 <a:cs typeface="Courier New" pitchFamily="34" charset="-120"/>
               </a:rPr>
-              <a:t>(rendement ~ dose_N, data)
-</a:t>
-            </a:r>
-            <a:pPr indent="0" marL="0">
-              <a:buNone/>
-            </a:pPr>
+              <a:t>summary</a:t>
+            </a:r>
             <a:r>
               <a:rPr lang="en-US" sz="900" dirty="0">
                 <a:solidFill>
-                  <a:srgbClr val="DCDCAA"/>
+                  <a:srgbClr val="9CDCFE"/>
                 </a:solidFill>
                 <a:latin typeface="Courier New" pitchFamily="34" charset="0"/>
                 <a:ea typeface="Courier New" pitchFamily="34" charset="-122"/>
                 <a:cs typeface="Courier New" pitchFamily="34" charset="-120"/>
               </a:rPr>
-              <a:t>summary</a:t>
-            </a:r>
-            <a:pPr indent="0" marL="0">
-              <a:buNone/>
-            </a:pPr>
+              <a:t>(lm1)
+</a:t>
+            </a:r>
             <a:r>
               <a:rPr lang="en-US" sz="900" dirty="0">
                 <a:solidFill>
-                  <a:srgbClr val="9CDCFE"/>
+                  <a:srgbClr val="6A9955"/>
                 </a:solidFill>
                 <a:latin typeface="Courier New" pitchFamily="34" charset="0"/>
                 <a:ea typeface="Courier New" pitchFamily="34" charset="-122"/>
                 <a:cs typeface="Courier New" pitchFamily="34" charset="-120"/>
               </a:rPr>
-              <a:t>(lm1)
+              <a:t># Régression multiple
 </a:t>
             </a:r>
-            <a:pPr indent="0" marL="0">
-              <a:buNone/>
-            </a:pPr>
             <a:r>
               <a:rPr lang="en-US" sz="900" dirty="0">
                 <a:solidFill>
-                  <a:srgbClr val="6A9955"/>
+                  <a:srgbClr val="9CDCFE"/>
                 </a:solidFill>
                 <a:latin typeface="Courier New" pitchFamily="34" charset="0"/>
                 <a:ea typeface="Courier New" pitchFamily="34" charset="-122"/>
                 <a:cs typeface="Courier New" pitchFamily="34" charset="-120"/>
               </a:rPr>
-              <a:t># Régression multiple
+              <a:t>lm2 &lt;- lm(rendement ~ dose_N + pluie + temp, data)
 </a:t>
             </a:r>
-            <a:pPr indent="0" marL="0">
-              <a:buNone/>
-            </a:pPr>
             <a:r>
               <a:rPr lang="en-US" sz="900" dirty="0">
                 <a:solidFill>
-                  <a:srgbClr val="9CDCFE"/>
+                  <a:srgbClr val="DCDCAA"/>
                 </a:solidFill>
                 <a:latin typeface="Courier New" pitchFamily="34" charset="0"/>
                 <a:ea typeface="Courier New" pitchFamily="34" charset="-122"/>
                 <a:cs typeface="Courier New" pitchFamily="34" charset="-120"/>
               </a:rPr>
-              <a:t>lm2 &lt;- lm</a:t>
-            </a:r>
-            <a:pPr indent="0" marL="0">
-              <a:buNone/>
-            </a:pPr>
+              <a:t>summary</a:t>
+            </a:r>
             <a:r>
               <a:rPr lang="en-US" sz="900" dirty="0">
                 <a:solidFill>
@@ -10587,12 +10257,8 @@
                 <a:ea typeface="Courier New" pitchFamily="34" charset="-122"/>
                 <a:cs typeface="Courier New" pitchFamily="34" charset="-120"/>
               </a:rPr>
-              <a:t>(rendement ~ dose_N + pluie + temp, data)
-</a:t>
-            </a:r>
-            <a:pPr indent="0" marL="0">
-              <a:buNone/>
-            </a:pPr>
+              <a:t>(lm2) ; </a:t>
+            </a:r>
             <a:r>
               <a:rPr lang="en-US" sz="900" dirty="0">
                 <a:solidFill>
@@ -10602,11 +10268,8 @@
                 <a:ea typeface="Courier New" pitchFamily="34" charset="-122"/>
                 <a:cs typeface="Courier New" pitchFamily="34" charset="-120"/>
               </a:rPr>
-              <a:t>summary</a:t>
-            </a:r>
-            <a:pPr indent="0" marL="0">
-              <a:buNone/>
-            </a:pPr>
+              <a:t>AIC</a:t>
+            </a:r>
             <a:r>
               <a:rPr lang="en-US" sz="900" dirty="0">
                 <a:solidFill>
@@ -10616,55 +10279,43 @@
                 <a:ea typeface="Courier New" pitchFamily="34" charset="-122"/>
                 <a:cs typeface="Courier New" pitchFamily="34" charset="-120"/>
               </a:rPr>
-              <a:t>(lm2) ; </a:t>
-            </a:r>
-            <a:pPr indent="0" marL="0">
-              <a:buNone/>
-            </a:pPr>
+              <a:t>(lm2)
+</a:t>
+            </a:r>
             <a:r>
               <a:rPr lang="en-US" sz="900" dirty="0">
                 <a:solidFill>
-                  <a:srgbClr val="DCDCAA"/>
+                  <a:srgbClr val="6A9955"/>
                 </a:solidFill>
                 <a:latin typeface="Courier New" pitchFamily="34" charset="0"/>
                 <a:ea typeface="Courier New" pitchFamily="34" charset="-122"/>
                 <a:cs typeface="Courier New" pitchFamily="34" charset="-120"/>
               </a:rPr>
-              <a:t>AIC</a:t>
-            </a:r>
-            <a:pPr indent="0" marL="0">
-              <a:buNone/>
-            </a:pPr>
+              <a:t># Diagnostic graphique
+</a:t>
+            </a:r>
             <a:r>
               <a:rPr lang="en-US" sz="900" dirty="0">
                 <a:solidFill>
-                  <a:srgbClr val="9CDCFE"/>
+                  <a:srgbClr val="DCDCAA"/>
                 </a:solidFill>
                 <a:latin typeface="Courier New" pitchFamily="34" charset="0"/>
                 <a:ea typeface="Courier New" pitchFamily="34" charset="-122"/>
                 <a:cs typeface="Courier New" pitchFamily="34" charset="-120"/>
               </a:rPr>
-              <a:t>(lm2)
-</a:t>
-            </a:r>
-            <a:pPr indent="0" marL="0">
-              <a:buNone/>
-            </a:pPr>
+              <a:t>par</a:t>
+            </a:r>
             <a:r>
               <a:rPr lang="en-US" sz="900" dirty="0">
                 <a:solidFill>
-                  <a:srgbClr val="6A9955"/>
+                  <a:srgbClr val="9CDCFE"/>
                 </a:solidFill>
                 <a:latin typeface="Courier New" pitchFamily="34" charset="0"/>
                 <a:ea typeface="Courier New" pitchFamily="34" charset="-122"/>
                 <a:cs typeface="Courier New" pitchFamily="34" charset="-120"/>
               </a:rPr>
-              <a:t># Diagnostic graphique
-</a:t>
-            </a:r>
-            <a:pPr indent="0" marL="0">
-              <a:buNone/>
-            </a:pPr>
+              <a:t>(mfrow=c(2,2)) ; </a:t>
+            </a:r>
             <a:r>
               <a:rPr lang="en-US" sz="900" dirty="0">
                 <a:solidFill>
@@ -10674,11 +10325,8 @@
                 <a:ea typeface="Courier New" pitchFamily="34" charset="-122"/>
                 <a:cs typeface="Courier New" pitchFamily="34" charset="-120"/>
               </a:rPr>
-              <a:t>par</a:t>
-            </a:r>
-            <a:pPr indent="0" marL="0">
-              <a:buNone/>
-            </a:pPr>
+              <a:t>plot</a:t>
+            </a:r>
             <a:r>
               <a:rPr lang="en-US" sz="900" dirty="0">
                 <a:solidFill>
@@ -10688,55 +10336,43 @@
                 <a:ea typeface="Courier New" pitchFamily="34" charset="-122"/>
                 <a:cs typeface="Courier New" pitchFamily="34" charset="-120"/>
               </a:rPr>
-              <a:t>(mfrow=c(2,2)) ; </a:t>
-            </a:r>
-            <a:pPr indent="0" marL="0">
-              <a:buNone/>
-            </a:pPr>
+              <a:t>(lm2)
+</a:t>
+            </a:r>
             <a:r>
               <a:rPr lang="en-US" sz="900" dirty="0">
                 <a:solidFill>
-                  <a:srgbClr val="DCDCAA"/>
+                  <a:srgbClr val="6A9955"/>
                 </a:solidFill>
                 <a:latin typeface="Courier New" pitchFamily="34" charset="0"/>
                 <a:ea typeface="Courier New" pitchFamily="34" charset="-122"/>
                 <a:cs typeface="Courier New" pitchFamily="34" charset="-120"/>
               </a:rPr>
-              <a:t>plot</a:t>
-            </a:r>
-            <a:pPr indent="0" marL="0">
-              <a:buNone/>
-            </a:pPr>
+              <a:t># Test de multicolinéarité
+</a:t>
+            </a:r>
             <a:r>
               <a:rPr lang="en-US" sz="900" dirty="0">
                 <a:solidFill>
-                  <a:srgbClr val="9CDCFE"/>
+                  <a:srgbClr val="DCDCAA"/>
                 </a:solidFill>
                 <a:latin typeface="Courier New" pitchFamily="34" charset="0"/>
                 <a:ea typeface="Courier New" pitchFamily="34" charset="-122"/>
                 <a:cs typeface="Courier New" pitchFamily="34" charset="-120"/>
               </a:rPr>
-              <a:t>(lm2)
-</a:t>
-            </a:r>
-            <a:pPr indent="0" marL="0">
-              <a:buNone/>
-            </a:pPr>
+              <a:t>library</a:t>
+            </a:r>
             <a:r>
               <a:rPr lang="en-US" sz="900" dirty="0">
                 <a:solidFill>
-                  <a:srgbClr val="6A9955"/>
+                  <a:srgbClr val="9CDCFE"/>
                 </a:solidFill>
                 <a:latin typeface="Courier New" pitchFamily="34" charset="0"/>
                 <a:ea typeface="Courier New" pitchFamily="34" charset="-122"/>
                 <a:cs typeface="Courier New" pitchFamily="34" charset="-120"/>
               </a:rPr>
-              <a:t># Test de multicolinéarité
-</a:t>
-            </a:r>
-            <a:pPr indent="0" marL="0">
-              <a:buNone/>
-            </a:pPr>
+              <a:t>(car) ; </a:t>
+            </a:r>
             <a:r>
               <a:rPr lang="en-US" sz="900" dirty="0">
                 <a:solidFill>
@@ -10746,11 +10382,8 @@
                 <a:ea typeface="Courier New" pitchFamily="34" charset="-122"/>
                 <a:cs typeface="Courier New" pitchFamily="34" charset="-120"/>
               </a:rPr>
-              <a:t>library</a:t>
-            </a:r>
-            <a:pPr indent="0" marL="0">
-              <a:buNone/>
-            </a:pPr>
+              <a:t>vif</a:t>
+            </a:r>
             <a:r>
               <a:rPr lang="en-US" sz="900" dirty="0">
                 <a:solidFill>
@@ -10760,85 +10393,45 @@
                 <a:ea typeface="Courier New" pitchFamily="34" charset="-122"/>
                 <a:cs typeface="Courier New" pitchFamily="34" charset="-120"/>
               </a:rPr>
-              <a:t>(car) ; </a:t>
-            </a:r>
-            <a:pPr indent="0" marL="0">
-              <a:buNone/>
-            </a:pPr>
+              <a:t>(lm2)  # VIF &lt; 5
+</a:t>
+            </a:r>
             <a:r>
               <a:rPr lang="en-US" sz="900" dirty="0">
                 <a:solidFill>
-                  <a:srgbClr val="DCDCAA"/>
+                  <a:srgbClr val="6A9955"/>
                 </a:solidFill>
                 <a:latin typeface="Courier New" pitchFamily="34" charset="0"/>
                 <a:ea typeface="Courier New" pitchFamily="34" charset="-122"/>
                 <a:cs typeface="Courier New" pitchFamily="34" charset="-120"/>
               </a:rPr>
-              <a:t>vif</a:t>
-            </a:r>
-            <a:pPr indent="0" marL="0">
-              <a:buNone/>
-            </a:pPr>
+              <a:t># Python – sklearn
+</a:t>
+            </a:r>
             <a:r>
               <a:rPr lang="en-US" sz="900" dirty="0">
                 <a:solidFill>
-                  <a:srgbClr val="9CDCFE"/>
+                  <a:srgbClr val="CE9178"/>
                 </a:solidFill>
                 <a:latin typeface="Courier New" pitchFamily="34" charset="0"/>
                 <a:ea typeface="Courier New" pitchFamily="34" charset="-122"/>
                 <a:cs typeface="Courier New" pitchFamily="34" charset="-120"/>
               </a:rPr>
-              <a:t>(lm2)  # VIF &lt; 5
+              <a:t>from sklearn.linear_model import LinearRegression
 </a:t>
             </a:r>
-            <a:pPr indent="0" marL="0">
-              <a:buNone/>
-            </a:pPr>
             <a:r>
               <a:rPr lang="en-US" sz="900" dirty="0">
                 <a:solidFill>
-                  <a:srgbClr val="6A9955"/>
+                  <a:srgbClr val="DCDCAA"/>
                 </a:solidFill>
                 <a:latin typeface="Courier New" pitchFamily="34" charset="0"/>
                 <a:ea typeface="Courier New" pitchFamily="34" charset="-122"/>
                 <a:cs typeface="Courier New" pitchFamily="34" charset="-120"/>
               </a:rPr>
-              <a:t># Python – sklearn
-</a:t>
-            </a:r>
-            <a:pPr indent="0" marL="0">
-              <a:buNone/>
-            </a:pPr>
-            <a:r>
-              <a:rPr lang="en-US" sz="900" dirty="0">
-                <a:solidFill>
-                  <a:srgbClr val="CE9178"/>
-                </a:solidFill>
-                <a:latin typeface="Courier New" pitchFamily="34" charset="0"/>
-                <a:ea typeface="Courier New" pitchFamily="34" charset="-122"/>
-                <a:cs typeface="Courier New" pitchFamily="34" charset="-120"/>
-              </a:rPr>
-              <a:t>from sklearn.linear_model import LinearRegression
-</a:t>
-            </a:r>
-            <a:pPr indent="0" marL="0">
-              <a:buNone/>
-            </a:pPr>
-            <a:r>
-              <a:rPr lang="en-US" sz="900" dirty="0">
-                <a:solidFill>
-                  <a:srgbClr val="DCDCAA"/>
-                </a:solidFill>
-                <a:latin typeface="Courier New" pitchFamily="34" charset="0"/>
-                <a:ea typeface="Courier New" pitchFamily="34" charset="-122"/>
-                <a:cs typeface="Courier New" pitchFamily="34" charset="-120"/>
-              </a:rPr>
               <a:t>model = LinearRegression().fit(X_train, y)
 </a:t>
             </a:r>
-            <a:pPr indent="0" marL="0">
-              <a:buNone/>
-            </a:pPr>
             <a:r>
               <a:rPr lang="en-US" sz="900" dirty="0">
                 <a:solidFill>
@@ -10871,6 +10464,7 @@
         <a:solidFill>
           <a:srgbClr val="FFFFFF"/>
         </a:solidFill>
+        <a:effectLst/>
       </p:bgPr>
     </p:bg>
     <p:spTree>
@@ -10928,7 +10522,7 @@
           <a:bodyPr wrap="square" lIns="0" tIns="0" rIns="0" bIns="0" rtlCol="0" anchor="ctr"/>
           <a:lstStyle/>
           <a:p>
-            <a:pPr indent="0" marL="0">
+            <a:pPr marL="0" indent="0">
               <a:buNone/>
             </a:pPr>
             <a:r>
@@ -10962,7 +10556,7 @@
           </a:solidFill>
           <a:ln/>
           <a:effectLst>
-            <a:outerShdw sx="100000" sy="100000" kx="0" ky="0" algn="bl" rotWithShape="0" blurRad="101600" dist="38100" dir="8100000">
+            <a:outerShdw blurRad="101600" dist="38100" dir="8100000" algn="bl" rotWithShape="0">
               <a:srgbClr val="000000">
                 <a:alpha val="12000"/>
               </a:srgbClr>
@@ -11011,7 +10605,7 @@
           <a:bodyPr wrap="square" lIns="0" tIns="0" rIns="0" bIns="0" rtlCol="0" anchor="ctr"/>
           <a:lstStyle/>
           <a:p>
-            <a:pPr algn="ctr" indent="0" marL="0">
+            <a:pPr marL="0" indent="0" algn="ctr">
               <a:buNone/>
             </a:pPr>
             <a:r>
@@ -11047,7 +10641,7 @@
           <a:bodyPr wrap="square" lIns="0" tIns="0" rIns="0" bIns="0" rtlCol="0" anchor="t"/>
           <a:lstStyle/>
           <a:p>
-            <a:pPr indent="0" marL="0">
+            <a:pPr marL="0" indent="0">
               <a:buNone/>
             </a:pPr>
             <a:r>
@@ -11059,9 +10653,6 @@
               <a:t>Quand utiliser un GLM ?
 </a:t>
             </a:r>
-            <a:pPr indent="0" marL="0">
-              <a:buNone/>
-            </a:pPr>
             <a:r>
               <a:rPr lang="en-US" sz="1050" dirty="0">
                 <a:solidFill>
@@ -11071,9 +10662,6 @@
               <a:t>Quand Y n'est pas normale (binaire, comptage, proportion)
 </a:t>
             </a:r>
-            <a:pPr indent="0" marL="0">
-              <a:buNone/>
-            </a:pPr>
             <a:r>
               <a:rPr lang="en-US" sz="1050" b="1" dirty="0">
                 <a:solidFill>
@@ -11083,9 +10671,6 @@
               <a:t>Familles de distribution :
 </a:t>
             </a:r>
-            <a:pPr indent="0" marL="0">
-              <a:buNone/>
-            </a:pPr>
             <a:r>
               <a:rPr lang="en-US" sz="1050" dirty="0">
                 <a:solidFill>
@@ -11099,9 +10684,6 @@
 • Quasi-Poisson → données overdispersées
 </a:t>
             </a:r>
-            <a:pPr indent="0" marL="0">
-              <a:buNone/>
-            </a:pPr>
             <a:r>
               <a:rPr lang="en-US" sz="1050" b="1" dirty="0">
                 <a:solidFill>
@@ -11111,9 +10693,6 @@
               <a:t>Conditions :
 </a:t>
             </a:r>
-            <a:pPr indent="0" marL="0">
-              <a:buNone/>
-            </a:pPr>
             <a:r>
               <a:rPr lang="en-US" sz="1050" dirty="0">
                 <a:solidFill>
@@ -11126,47 +10705,41 @@
 ✔ Absence d'excès de zéros (→ ZIP/ZINB)
 </a:t>
             </a:r>
-            <a:pPr indent="0" marL="0">
+            <a:r>
+              <a:rPr lang="en-US" sz="1050" b="1" dirty="0">
+                <a:solidFill>
+                  <a:srgbClr val="E76F51"/>
+                </a:solidFill>
+              </a:rPr>
+              <a:t>Exemples :
+</a:t>
+            </a:r>
+            <a:r>
+              <a:rPr lang="en-US" sz="1050" dirty="0">
+                <a:solidFill>
+                  <a:srgbClr val="2D3436"/>
+                </a:solidFill>
+              </a:rPr>
+              <a:t>→ Incidence maladie animale (logistique)</a:t>
+            </a:r>
+            <a:endParaRPr lang="en-US" sz="1050" dirty="0"/>
+          </a:p>
+          <a:p>
+            <a:pPr marL="0" indent="0">
               <a:buNone/>
             </a:pPr>
             <a:r>
-              <a:rPr lang="en-US" sz="1050" b="1" dirty="0">
-                <a:solidFill>
-                  <a:srgbClr val="E76F51"/>
-                </a:solidFill>
-              </a:rPr>
-              <a:t>Exemples :
-</a:t>
-            </a:r>
-            <a:pPr indent="0" marL="0">
-              <a:buNone/>
-            </a:pPr>
-            <a:r>
               <a:rPr lang="en-US" sz="1050" dirty="0">
                 <a:solidFill>
                   <a:srgbClr val="2D3436"/>
                 </a:solidFill>
               </a:rPr>
-              <a:t>→ Incidence maladie animale (logistique)</a:t>
+              <a:t>→ Comptage d'insectes dans une parcelle (Poisson)</a:t>
             </a:r>
             <a:endParaRPr lang="en-US" sz="1050" dirty="0"/>
           </a:p>
           <a:p>
-            <a:pPr indent="0" marL="0">
-              <a:buNone/>
-            </a:pPr>
-            <a:r>
-              <a:rPr lang="en-US" sz="1050" dirty="0">
-                <a:solidFill>
-                  <a:srgbClr val="2D3436"/>
-                </a:solidFill>
-              </a:rPr>
-              <a:t>→ Comptage d'insectes dans une parcelle (Poisson)</a:t>
-            </a:r>
-            <a:endParaRPr lang="en-US" sz="1050" dirty="0"/>
-          </a:p>
-          <a:p>
-            <a:pPr indent="0" marL="0">
+            <a:pPr marL="0" indent="0">
               <a:buNone/>
             </a:pPr>
             <a:r>
@@ -11200,7 +10773,7 @@
           </a:solidFill>
           <a:ln/>
           <a:effectLst>
-            <a:outerShdw sx="100000" sy="100000" kx="0" ky="0" algn="bl" rotWithShape="0" blurRad="101600" dist="38100" dir="8100000">
+            <a:outerShdw blurRad="101600" dist="38100" dir="8100000" algn="bl" rotWithShape="0">
               <a:srgbClr val="000000">
                 <a:alpha val="12000"/>
               </a:srgbClr>
@@ -11249,7 +10822,7 @@
           <a:bodyPr wrap="square" lIns="0" tIns="0" rIns="0" bIns="0" rtlCol="0" anchor="ctr"/>
           <a:lstStyle/>
           <a:p>
-            <a:pPr algn="ctr" indent="0" marL="0">
+            <a:pPr marL="0" indent="0" algn="ctr">
               <a:buNone/>
             </a:pPr>
             <a:r>
@@ -11285,7 +10858,7 @@
           <a:bodyPr wrap="square" lIns="0" tIns="0" rIns="0" bIns="0" rtlCol="0" anchor="t"/>
           <a:lstStyle/>
           <a:p>
-            <a:pPr indent="0" marL="0">
+            <a:pPr marL="0" indent="0">
               <a:buNone/>
             </a:pPr>
             <a:r>
@@ -11298,40 +10871,33 @@
                 <a:cs typeface="Courier New" pitchFamily="34" charset="-120"/>
               </a:rPr>
               <a:t># GLM Logistique : maladie animale
+# Y = 0/1 (sain/malade)
 </a:t>
             </a:r>
-            <a:pPr indent="0" marL="0">
-              <a:buNone/>
-            </a:pPr>
             <a:r>
               <a:rPr lang="en-US" sz="920" dirty="0">
                 <a:solidFill>
-                  <a:srgbClr val="6A9955"/>
+                  <a:srgbClr val="9CDCFE"/>
                 </a:solidFill>
                 <a:latin typeface="Courier New" pitchFamily="34" charset="0"/>
                 <a:ea typeface="Courier New" pitchFamily="34" charset="-122"/>
                 <a:cs typeface="Courier New" pitchFamily="34" charset="-120"/>
               </a:rPr>
-              <a:t># Y = 0/1 (sain/malade)
+              <a:t>mod_log &lt;- glm(malade ~ poids + age + race,
+          family=binomial(link='logit'), data)
 </a:t>
             </a:r>
-            <a:pPr indent="0" marL="0">
-              <a:buNone/>
-            </a:pPr>
             <a:r>
               <a:rPr lang="en-US" sz="920" dirty="0">
                 <a:solidFill>
-                  <a:srgbClr val="9CDCFE"/>
+                  <a:srgbClr val="DCDCAA"/>
                 </a:solidFill>
                 <a:latin typeface="Courier New" pitchFamily="34" charset="0"/>
                 <a:ea typeface="Courier New" pitchFamily="34" charset="-122"/>
                 <a:cs typeface="Courier New" pitchFamily="34" charset="-120"/>
               </a:rPr>
-              <a:t>mod_log &lt;- glm</a:t>
-            </a:r>
-            <a:pPr indent="0" marL="0">
-              <a:buNone/>
-            </a:pPr>
+              <a:t>summary</a:t>
+            </a:r>
             <a:r>
               <a:rPr lang="en-US" sz="920" dirty="0">
                 <a:solidFill>
@@ -11341,129 +10907,104 @@
                 <a:ea typeface="Courier New" pitchFamily="34" charset="-122"/>
                 <a:cs typeface="Courier New" pitchFamily="34" charset="-120"/>
               </a:rPr>
-              <a:t>(malade ~ poids + age + race,
+              <a:t>(mod_log)
 </a:t>
             </a:r>
-            <a:pPr indent="0" marL="0">
-              <a:buNone/>
-            </a:pPr>
             <a:r>
               <a:rPr lang="en-US" sz="920" dirty="0">
                 <a:solidFill>
-                  <a:srgbClr val="9CDCFE"/>
+                  <a:srgbClr val="DCDCAA"/>
                 </a:solidFill>
                 <a:latin typeface="Courier New" pitchFamily="34" charset="0"/>
                 <a:ea typeface="Courier New" pitchFamily="34" charset="-122"/>
                 <a:cs typeface="Courier New" pitchFamily="34" charset="-120"/>
               </a:rPr>
-              <a:t>          family=binomial(link='logit'), data)
-</a:t>
-            </a:r>
-            <a:pPr indent="0" marL="0">
-              <a:buNone/>
-            </a:pPr>
+              <a:t>exp</a:t>
+            </a:r>
             <a:r>
               <a:rPr lang="en-US" sz="920" dirty="0">
                 <a:solidFill>
-                  <a:srgbClr val="DCDCAA"/>
+                  <a:srgbClr val="9CDCFE"/>
                 </a:solidFill>
                 <a:latin typeface="Courier New" pitchFamily="34" charset="0"/>
                 <a:ea typeface="Courier New" pitchFamily="34" charset="-122"/>
                 <a:cs typeface="Courier New" pitchFamily="34" charset="-120"/>
               </a:rPr>
-              <a:t>summary</a:t>
-            </a:r>
-            <a:pPr indent="0" marL="0">
-              <a:buNone/>
-            </a:pPr>
+              <a:t>(coef(mod_log))  # Odds Ratios
+</a:t>
+            </a:r>
             <a:r>
               <a:rPr lang="en-US" sz="920" dirty="0">
                 <a:solidFill>
-                  <a:srgbClr val="9CDCFE"/>
+                  <a:srgbClr val="6A9955"/>
                 </a:solidFill>
                 <a:latin typeface="Courier New" pitchFamily="34" charset="0"/>
                 <a:ea typeface="Courier New" pitchFamily="34" charset="-122"/>
                 <a:cs typeface="Courier New" pitchFamily="34" charset="-120"/>
               </a:rPr>
-              <a:t>(mod_log)
+              <a:t># GLM Poisson : comptage ravageurs
 </a:t>
             </a:r>
-            <a:pPr indent="0" marL="0">
-              <a:buNone/>
-            </a:pPr>
             <a:r>
               <a:rPr lang="en-US" sz="920" dirty="0">
                 <a:solidFill>
-                  <a:srgbClr val="DCDCAA"/>
+                  <a:srgbClr val="9CDCFE"/>
                 </a:solidFill>
                 <a:latin typeface="Courier New" pitchFamily="34" charset="0"/>
                 <a:ea typeface="Courier New" pitchFamily="34" charset="-122"/>
                 <a:cs typeface="Courier New" pitchFamily="34" charset="-120"/>
               </a:rPr>
-              <a:t>exp</a:t>
-            </a:r>
-            <a:pPr indent="0" marL="0">
-              <a:buNone/>
-            </a:pPr>
+              <a:t>mod_pois &lt;- glm(nb_insectes ~ traitement + culture,
+         family=poisson(link='log'), data)
+</a:t>
+            </a:r>
             <a:r>
               <a:rPr lang="en-US" sz="920" dirty="0">
                 <a:solidFill>
-                  <a:srgbClr val="9CDCFE"/>
+                  <a:srgbClr val="6A9955"/>
                 </a:solidFill>
                 <a:latin typeface="Courier New" pitchFamily="34" charset="0"/>
                 <a:ea typeface="Courier New" pitchFamily="34" charset="-122"/>
                 <a:cs typeface="Courier New" pitchFamily="34" charset="-120"/>
               </a:rPr>
-              <a:t>(coef(mod_log))  # Odds Ratios
+              <a:t># Vérification surdispersion
 </a:t>
             </a:r>
-            <a:pPr indent="0" marL="0">
-              <a:buNone/>
-            </a:pPr>
             <a:r>
               <a:rPr lang="en-US" sz="920" dirty="0">
                 <a:solidFill>
-                  <a:srgbClr val="6A9955"/>
+                  <a:srgbClr val="9CDCFE"/>
                 </a:solidFill>
                 <a:latin typeface="Courier New" pitchFamily="34" charset="0"/>
                 <a:ea typeface="Courier New" pitchFamily="34" charset="-122"/>
                 <a:cs typeface="Courier New" pitchFamily="34" charset="-120"/>
               </a:rPr>
-              <a:t># GLM Poisson : comptage ravageurs
+              <a:t>mod_pois$deviance / mod_pois$df.residual
 </a:t>
             </a:r>
-            <a:pPr indent="0" marL="0">
-              <a:buNone/>
-            </a:pPr>
             <a:r>
               <a:rPr lang="en-US" sz="920" dirty="0">
                 <a:solidFill>
-                  <a:srgbClr val="9CDCFE"/>
+                  <a:srgbClr val="6A9955"/>
                 </a:solidFill>
                 <a:latin typeface="Courier New" pitchFamily="34" charset="0"/>
                 <a:ea typeface="Courier New" pitchFamily="34" charset="-122"/>
                 <a:cs typeface="Courier New" pitchFamily="34" charset="-120"/>
               </a:rPr>
-              <a:t>mod_pois &lt;- glm</a:t>
-            </a:r>
-            <a:pPr indent="0" marL="0">
-              <a:buNone/>
-            </a:pPr>
+              <a:t># Si surdispersion : Binomiale Négative
+</a:t>
+            </a:r>
             <a:r>
               <a:rPr lang="en-US" sz="920" dirty="0">
                 <a:solidFill>
-                  <a:srgbClr val="9CDCFE"/>
+                  <a:srgbClr val="DCDCAA"/>
                 </a:solidFill>
                 <a:latin typeface="Courier New" pitchFamily="34" charset="0"/>
                 <a:ea typeface="Courier New" pitchFamily="34" charset="-122"/>
                 <a:cs typeface="Courier New" pitchFamily="34" charset="-120"/>
               </a:rPr>
-              <a:t>(nb_insectes ~ traitement + culture,
-</a:t>
-            </a:r>
-            <a:pPr indent="0" marL="0">
-              <a:buNone/>
-            </a:pPr>
+              <a:t>library</a:t>
+            </a:r>
             <a:r>
               <a:rPr lang="en-US" sz="920" dirty="0">
                 <a:solidFill>
@@ -11473,27 +11014,20 @@
                 <a:ea typeface="Courier New" pitchFamily="34" charset="-122"/>
                 <a:cs typeface="Courier New" pitchFamily="34" charset="-120"/>
               </a:rPr>
-              <a:t>         family=poisson(link='log'), data)
+              <a:t>(MASS)
 </a:t>
             </a:r>
-            <a:pPr indent="0" marL="0">
-              <a:buNone/>
-            </a:pPr>
             <a:r>
               <a:rPr lang="en-US" sz="920" dirty="0">
                 <a:solidFill>
-                  <a:srgbClr val="6A9955"/>
+                  <a:srgbClr val="DCDCAA"/>
                 </a:solidFill>
                 <a:latin typeface="Courier New" pitchFamily="34" charset="0"/>
                 <a:ea typeface="Courier New" pitchFamily="34" charset="-122"/>
                 <a:cs typeface="Courier New" pitchFamily="34" charset="-120"/>
               </a:rPr>
-              <a:t># Vérification surdispersion
-</a:t>
-            </a:r>
-            <a:pPr indent="0" marL="0">
-              <a:buNone/>
-            </a:pPr>
+              <a:t>glm.nb</a:t>
+            </a:r>
             <a:r>
               <a:rPr lang="en-US" sz="920" dirty="0">
                 <a:solidFill>
@@ -11503,12 +11037,9 @@
                 <a:ea typeface="Courier New" pitchFamily="34" charset="-122"/>
                 <a:cs typeface="Courier New" pitchFamily="34" charset="-120"/>
               </a:rPr>
-              <a:t>mod_pois$deviance / mod_pois$df.residual
+              <a:t>(nb_insectes ~ traitement, data)
 </a:t>
             </a:r>
-            <a:pPr indent="0" marL="0">
-              <a:buNone/>
-            </a:pPr>
             <a:r>
               <a:rPr lang="en-US" sz="920" dirty="0">
                 <a:solidFill>
@@ -11518,12 +11049,9 @@
                 <a:ea typeface="Courier New" pitchFamily="34" charset="-122"/>
                 <a:cs typeface="Courier New" pitchFamily="34" charset="-120"/>
               </a:rPr>
-              <a:t># Si surdispersion : Binomiale Négative
+              <a:t># Comparaison modèles
 </a:t>
             </a:r>
-            <a:pPr indent="0" marL="0">
-              <a:buNone/>
-            </a:pPr>
             <a:r>
               <a:rPr lang="en-US" sz="920" dirty="0">
                 <a:solidFill>
@@ -11533,84 +11061,8 @@
                 <a:ea typeface="Courier New" pitchFamily="34" charset="-122"/>
                 <a:cs typeface="Courier New" pitchFamily="34" charset="-120"/>
               </a:rPr>
-              <a:t>library</a:t>
-            </a:r>
-            <a:pPr indent="0" marL="0">
-              <a:buNone/>
-            </a:pPr>
-            <a:r>
-              <a:rPr lang="en-US" sz="920" dirty="0">
-                <a:solidFill>
-                  <a:srgbClr val="9CDCFE"/>
-                </a:solidFill>
-                <a:latin typeface="Courier New" pitchFamily="34" charset="0"/>
-                <a:ea typeface="Courier New" pitchFamily="34" charset="-122"/>
-                <a:cs typeface="Courier New" pitchFamily="34" charset="-120"/>
-              </a:rPr>
-              <a:t>(MASS)
-</a:t>
-            </a:r>
-            <a:pPr indent="0" marL="0">
-              <a:buNone/>
-            </a:pPr>
-            <a:r>
-              <a:rPr lang="en-US" sz="920" dirty="0">
-                <a:solidFill>
-                  <a:srgbClr val="DCDCAA"/>
-                </a:solidFill>
-                <a:latin typeface="Courier New" pitchFamily="34" charset="0"/>
-                <a:ea typeface="Courier New" pitchFamily="34" charset="-122"/>
-                <a:cs typeface="Courier New" pitchFamily="34" charset="-120"/>
-              </a:rPr>
-              <a:t>glm.nb</a:t>
-            </a:r>
-            <a:pPr indent="0" marL="0">
-              <a:buNone/>
-            </a:pPr>
-            <a:r>
-              <a:rPr lang="en-US" sz="920" dirty="0">
-                <a:solidFill>
-                  <a:srgbClr val="9CDCFE"/>
-                </a:solidFill>
-                <a:latin typeface="Courier New" pitchFamily="34" charset="0"/>
-                <a:ea typeface="Courier New" pitchFamily="34" charset="-122"/>
-                <a:cs typeface="Courier New" pitchFamily="34" charset="-120"/>
-              </a:rPr>
-              <a:t>(nb_insectes ~ traitement, data)
-</a:t>
-            </a:r>
-            <a:pPr indent="0" marL="0">
-              <a:buNone/>
-            </a:pPr>
-            <a:r>
-              <a:rPr lang="en-US" sz="920" dirty="0">
-                <a:solidFill>
-                  <a:srgbClr val="6A9955"/>
-                </a:solidFill>
-                <a:latin typeface="Courier New" pitchFamily="34" charset="0"/>
-                <a:ea typeface="Courier New" pitchFamily="34" charset="-122"/>
-                <a:cs typeface="Courier New" pitchFamily="34" charset="-120"/>
-              </a:rPr>
-              <a:t># Comparaison modèles
-</a:t>
-            </a:r>
-            <a:pPr indent="0" marL="0">
-              <a:buNone/>
-            </a:pPr>
-            <a:r>
-              <a:rPr lang="en-US" sz="920" dirty="0">
-                <a:solidFill>
-                  <a:srgbClr val="DCDCAA"/>
-                </a:solidFill>
-                <a:latin typeface="Courier New" pitchFamily="34" charset="0"/>
-                <a:ea typeface="Courier New" pitchFamily="34" charset="-122"/>
-                <a:cs typeface="Courier New" pitchFamily="34" charset="-120"/>
-              </a:rPr>
               <a:t>AIC</a:t>
             </a:r>
-            <a:pPr indent="0" marL="0">
-              <a:buNone/>
-            </a:pPr>
             <a:r>
               <a:rPr lang="en-US" sz="920" dirty="0">
                 <a:solidFill>
@@ -11643,6 +11095,7 @@
         <a:solidFill>
           <a:srgbClr val="FFFFFF"/>
         </a:solidFill>
+        <a:effectLst/>
       </p:bgPr>
     </p:bg>
     <p:spTree>
@@ -11700,7 +11153,7 @@
           <a:bodyPr wrap="square" lIns="0" tIns="0" rIns="0" bIns="0" rtlCol="0" anchor="ctr"/>
           <a:lstStyle/>
           <a:p>
-            <a:pPr indent="0" marL="0">
+            <a:pPr marL="0" indent="0">
               <a:buNone/>
             </a:pPr>
             <a:r>
@@ -11734,7 +11187,7 @@
           </a:solidFill>
           <a:ln/>
           <a:effectLst>
-            <a:outerShdw sx="100000" sy="100000" kx="0" ky="0" algn="bl" rotWithShape="0" blurRad="101600" dist="38100" dir="8100000">
+            <a:outerShdw blurRad="101600" dist="38100" dir="8100000" algn="bl" rotWithShape="0">
               <a:srgbClr val="000000">
                 <a:alpha val="12000"/>
               </a:srgbClr>
@@ -11783,7 +11236,7 @@
           <a:bodyPr wrap="square" lIns="0" tIns="0" rIns="0" bIns="0" rtlCol="0" anchor="ctr"/>
           <a:lstStyle/>
           <a:p>
-            <a:pPr algn="ctr" indent="0" marL="0">
+            <a:pPr marL="0" indent="0" algn="ctr">
               <a:buNone/>
             </a:pPr>
             <a:r>
@@ -11819,7 +11272,7 @@
           <a:bodyPr wrap="square" lIns="0" tIns="0" rIns="0" bIns="0" rtlCol="0" anchor="t"/>
           <a:lstStyle/>
           <a:p>
-            <a:pPr indent="0" marL="0">
+            <a:pPr marL="0" indent="0">
               <a:buNone/>
             </a:pPr>
             <a:r>
@@ -11831,9 +11284,6 @@
               <a:t>Définition :
 </a:t>
             </a:r>
-            <a:pPr indent="0" marL="0">
-              <a:buNone/>
-            </a:pPr>
             <a:r>
               <a:rPr lang="en-US" sz="1050" dirty="0">
                 <a:solidFill>
@@ -11843,9 +11293,6 @@
               <a:t>Combinent effets fixes (facteurs contrôlés) + effets aléatoires (variabilité non contrôlée : ferme, bloc, sujet)
 </a:t>
             </a:r>
-            <a:pPr indent="0" marL="0">
-              <a:buNone/>
-            </a:pPr>
             <a:r>
               <a:rPr lang="en-US" sz="1050" b="1" dirty="0">
                 <a:solidFill>
@@ -11854,9 +11301,6 @@
               </a:rPr>
               <a:t>Modèle : </a:t>
             </a:r>
-            <a:pPr indent="0" marL="0">
-              <a:buNone/>
-            </a:pPr>
             <a:r>
               <a:rPr lang="en-US" sz="1050" i="1" dirty="0">
                 <a:solidFill>
@@ -11866,9 +11310,6 @@
               <a:t>Y = Xβ + Zu + ε
 </a:t>
             </a:r>
-            <a:pPr indent="0" marL="0">
-              <a:buNone/>
-            </a:pPr>
             <a:r>
               <a:rPr lang="en-US" sz="1050" b="1" dirty="0">
                 <a:solidFill>
@@ -11878,9 +11319,6 @@
               <a:t>Indications :
 </a:t>
             </a:r>
-            <a:pPr indent="0" marL="0">
-              <a:buNone/>
-            </a:pPr>
             <a:r>
               <a:rPr lang="en-US" sz="1050" dirty="0">
                 <a:solidFill>
@@ -11893,9 +11331,6 @@
 ✔ Essais multi-sites agronomiques
 </a:t>
             </a:r>
-            <a:pPr indent="0" marL="0">
-              <a:buNone/>
-            </a:pPr>
             <a:r>
               <a:rPr lang="en-US" sz="1050" b="1" dirty="0">
                 <a:solidFill>
@@ -11905,9 +11340,6 @@
               <a:t>Exemples :
 </a:t>
             </a:r>
-            <a:pPr indent="0" marL="0">
-              <a:buNone/>
-            </a:pPr>
             <a:r>
               <a:rPr lang="en-US" sz="1050" dirty="0">
                 <a:solidFill>
@@ -11920,9 +11352,6 @@
 → pH du sol par blocs géographiques
 </a:t>
             </a:r>
-            <a:pPr indent="0" marL="0">
-              <a:buNone/>
-            </a:pPr>
             <a:r>
               <a:rPr lang="en-US" sz="1050" b="1" dirty="0">
                 <a:solidFill>
@@ -11931,9 +11360,6 @@
               </a:rPr>
               <a:t>Packages R : </a:t>
             </a:r>
-            <a:pPr indent="0" marL="0">
-              <a:buNone/>
-            </a:pPr>
             <a:r>
               <a:rPr lang="en-US" sz="1050" dirty="0">
                 <a:solidFill>
@@ -11965,7 +11391,7 @@
           </a:solidFill>
           <a:ln/>
           <a:effectLst>
-            <a:outerShdw sx="100000" sy="100000" kx="0" ky="0" algn="bl" rotWithShape="0" blurRad="101600" dist="38100" dir="8100000">
+            <a:outerShdw blurRad="101600" dist="38100" dir="8100000" algn="bl" rotWithShape="0">
               <a:srgbClr val="000000">
                 <a:alpha val="12000"/>
               </a:srgbClr>
@@ -12014,7 +11440,7 @@
           <a:bodyPr wrap="square" lIns="0" tIns="0" rIns="0" bIns="0" rtlCol="0" anchor="ctr"/>
           <a:lstStyle/>
           <a:p>
-            <a:pPr algn="ctr" indent="0" marL="0">
+            <a:pPr marL="0" indent="0" algn="ctr">
               <a:buNone/>
             </a:pPr>
             <a:r>
@@ -12050,7 +11476,7 @@
           <a:bodyPr wrap="square" lIns="0" tIns="0" rIns="0" bIns="0" rtlCol="0" anchor="t"/>
           <a:lstStyle/>
           <a:p>
-            <a:pPr indent="0" marL="0">
+            <a:pPr marL="0" indent="0">
               <a:buNone/>
             </a:pPr>
             <a:r>
@@ -12064,9 +11490,6 @@
               </a:rPr>
               <a:t>library</a:t>
             </a:r>
-            <a:pPr indent="0" marL="0">
-              <a:buNone/>
-            </a:pPr>
             <a:r>
               <a:rPr lang="en-US" sz="920" dirty="0">
                 <a:solidFill>
@@ -12078,9 +11501,6 @@
               </a:rPr>
               <a:t>(lme4) ; </a:t>
             </a:r>
-            <a:pPr indent="0" marL="0">
-              <a:buNone/>
-            </a:pPr>
             <a:r>
               <a:rPr lang="en-US" sz="920" dirty="0">
                 <a:solidFill>
@@ -12092,9 +11512,6 @@
               </a:rPr>
               <a:t>library</a:t>
             </a:r>
-            <a:pPr indent="0" marL="0">
-              <a:buNone/>
-            </a:pPr>
             <a:r>
               <a:rPr lang="en-US" sz="920" dirty="0">
                 <a:solidFill>
@@ -12107,9 +11524,6 @@
               <a:t>(lmerTest)
 </a:t>
             </a:r>
-            <a:pPr indent="0" marL="0">
-              <a:buNone/>
-            </a:pPr>
             <a:r>
               <a:rPr lang="en-US" sz="920" dirty="0">
                 <a:solidFill>
@@ -12120,41 +11534,34 @@
                 <a:cs typeface="Courier New" pitchFamily="34" charset="-120"/>
               </a:rPr>
               <a:t># LMM : rendement multi-sites
+# Effets fixes : variete, dose_N
+# Effet aléatoire : site
 </a:t>
             </a:r>
-            <a:pPr indent="0" marL="0">
-              <a:buNone/>
-            </a:pPr>
             <a:r>
               <a:rPr lang="en-US" sz="920" dirty="0">
                 <a:solidFill>
-                  <a:srgbClr val="6A9955"/>
+                  <a:srgbClr val="9CDCFE"/>
                 </a:solidFill>
                 <a:latin typeface="Courier New" pitchFamily="34" charset="0"/>
                 <a:ea typeface="Courier New" pitchFamily="34" charset="-122"/>
                 <a:cs typeface="Courier New" pitchFamily="34" charset="-120"/>
               </a:rPr>
-              <a:t># Effets fixes : variete, dose_N
+              <a:t>lmm1 &lt;- lmer(rendement ~
+  variete + dose_N + (1|site), data)
 </a:t>
             </a:r>
-            <a:pPr indent="0" marL="0">
-              <a:buNone/>
-            </a:pPr>
             <a:r>
               <a:rPr lang="en-US" sz="920" dirty="0">
                 <a:solidFill>
-                  <a:srgbClr val="6A9955"/>
+                  <a:srgbClr val="DCDCAA"/>
                 </a:solidFill>
                 <a:latin typeface="Courier New" pitchFamily="34" charset="0"/>
                 <a:ea typeface="Courier New" pitchFamily="34" charset="-122"/>
                 <a:cs typeface="Courier New" pitchFamily="34" charset="-120"/>
               </a:rPr>
-              <a:t># Effet aléatoire : site
-</a:t>
-            </a:r>
-            <a:pPr indent="0" marL="0">
-              <a:buNone/>
-            </a:pPr>
+              <a:t>summary</a:t>
+            </a:r>
             <a:r>
               <a:rPr lang="en-US" sz="920" dirty="0">
                 <a:solidFill>
@@ -12164,26 +11571,20 @@
                 <a:ea typeface="Courier New" pitchFamily="34" charset="-122"/>
                 <a:cs typeface="Courier New" pitchFamily="34" charset="-120"/>
               </a:rPr>
-              <a:t>lmm1 &lt;- lmer</a:t>
-            </a:r>
-            <a:pPr indent="0" marL="0">
-              <a:buNone/>
-            </a:pPr>
+              <a:t>(lmm1)
+</a:t>
+            </a:r>
             <a:r>
               <a:rPr lang="en-US" sz="920" dirty="0">
                 <a:solidFill>
-                  <a:srgbClr val="9CDCFE"/>
+                  <a:srgbClr val="DCDCAA"/>
                 </a:solidFill>
                 <a:latin typeface="Courier New" pitchFamily="34" charset="0"/>
                 <a:ea typeface="Courier New" pitchFamily="34" charset="-122"/>
                 <a:cs typeface="Courier New" pitchFamily="34" charset="-120"/>
               </a:rPr>
-              <a:t>(rendement ~
-</a:t>
-            </a:r>
-            <a:pPr indent="0" marL="0">
-              <a:buNone/>
-            </a:pPr>
+              <a:t>anova</a:t>
+            </a:r>
             <a:r>
               <a:rPr lang="en-US" sz="920" dirty="0">
                 <a:solidFill>
@@ -12193,26 +11594,22 @@
                 <a:ea typeface="Courier New" pitchFamily="34" charset="-122"/>
                 <a:cs typeface="Courier New" pitchFamily="34" charset="-120"/>
               </a:rPr>
-              <a:t>  variete + dose_N + (1|site), data)
+              <a:t>(lmm1)  # Test effets fixes
 </a:t>
             </a:r>
-            <a:pPr indent="0" marL="0">
-              <a:buNone/>
-            </a:pPr>
             <a:r>
               <a:rPr lang="en-US" sz="920" dirty="0">
                 <a:solidFill>
-                  <a:srgbClr val="DCDCAA"/>
+                  <a:srgbClr val="6A9955"/>
                 </a:solidFill>
                 <a:latin typeface="Courier New" pitchFamily="34" charset="0"/>
                 <a:ea typeface="Courier New" pitchFamily="34" charset="-122"/>
                 <a:cs typeface="Courier New" pitchFamily="34" charset="-120"/>
               </a:rPr>
-              <a:t>summary</a:t>
-            </a:r>
-            <a:pPr indent="0" marL="0">
-              <a:buNone/>
-            </a:pPr>
+              <a:t># GLMM : incidence maladie (binomiale)
+# Effet aléatoire : ferme
+</a:t>
+            </a:r>
             <a:r>
               <a:rPr lang="en-US" sz="920" dirty="0">
                 <a:solidFill>
@@ -12222,71 +11619,57 @@
                 <a:ea typeface="Courier New" pitchFamily="34" charset="-122"/>
                 <a:cs typeface="Courier New" pitchFamily="34" charset="-120"/>
               </a:rPr>
-              <a:t>(lmm1)
+              <a:t>glmm1 &lt;- glmer(malade ~ race + age +
+  (1|ferme),
+  family=binomial, data)
 </a:t>
             </a:r>
-            <a:pPr indent="0" marL="0">
-              <a:buNone/>
-            </a:pPr>
             <a:r>
               <a:rPr lang="en-US" sz="920" dirty="0">
                 <a:solidFill>
-                  <a:srgbClr val="DCDCAA"/>
+                  <a:srgbClr val="6A9955"/>
                 </a:solidFill>
                 <a:latin typeface="Courier New" pitchFamily="34" charset="0"/>
                 <a:ea typeface="Courier New" pitchFamily="34" charset="-122"/>
                 <a:cs typeface="Courier New" pitchFamily="34" charset="-120"/>
               </a:rPr>
-              <a:t>anova</a:t>
-            </a:r>
-            <a:pPr indent="0" marL="0">
-              <a:buNone/>
-            </a:pPr>
+              <a:t># Diagnostics et ICC
+</a:t>
+            </a:r>
             <a:r>
               <a:rPr lang="en-US" sz="920" dirty="0">
                 <a:solidFill>
-                  <a:srgbClr val="9CDCFE"/>
+                  <a:srgbClr val="DCDCAA"/>
                 </a:solidFill>
                 <a:latin typeface="Courier New" pitchFamily="34" charset="0"/>
                 <a:ea typeface="Courier New" pitchFamily="34" charset="-122"/>
                 <a:cs typeface="Courier New" pitchFamily="34" charset="-120"/>
               </a:rPr>
-              <a:t>(lmm1)  # Test effets fixes
-</a:t>
-            </a:r>
-            <a:pPr indent="0" marL="0">
-              <a:buNone/>
-            </a:pPr>
+              <a:t>library</a:t>
+            </a:r>
             <a:r>
               <a:rPr lang="en-US" sz="920" dirty="0">
                 <a:solidFill>
-                  <a:srgbClr val="6A9955"/>
+                  <a:srgbClr val="9CDCFE"/>
                 </a:solidFill>
                 <a:latin typeface="Courier New" pitchFamily="34" charset="0"/>
                 <a:ea typeface="Courier New" pitchFamily="34" charset="-122"/>
                 <a:cs typeface="Courier New" pitchFamily="34" charset="-120"/>
               </a:rPr>
-              <a:t># GLMM : incidence maladie (binomiale)
+              <a:t>(performance)
 </a:t>
             </a:r>
-            <a:pPr indent="0" marL="0">
-              <a:buNone/>
-            </a:pPr>
             <a:r>
               <a:rPr lang="en-US" sz="920" dirty="0">
                 <a:solidFill>
-                  <a:srgbClr val="6A9955"/>
+                  <a:srgbClr val="DCDCAA"/>
                 </a:solidFill>
                 <a:latin typeface="Courier New" pitchFamily="34" charset="0"/>
                 <a:ea typeface="Courier New" pitchFamily="34" charset="-122"/>
                 <a:cs typeface="Courier New" pitchFamily="34" charset="-120"/>
               </a:rPr>
-              <a:t># Effet aléatoire : ferme
-</a:t>
-            </a:r>
-            <a:pPr indent="0" marL="0">
-              <a:buNone/>
-            </a:pPr>
+              <a:t>icc</a:t>
+            </a:r>
             <a:r>
               <a:rPr lang="en-US" sz="920" dirty="0">
                 <a:solidFill>
@@ -12296,143 +11679,20 @@
                 <a:ea typeface="Courier New" pitchFamily="34" charset="-122"/>
                 <a:cs typeface="Courier New" pitchFamily="34" charset="-120"/>
               </a:rPr>
-              <a:t>glmm1 &lt;- glmer</a:t>
-            </a:r>
-            <a:pPr indent="0" marL="0">
-              <a:buNone/>
-            </a:pPr>
+              <a:t>(lmm1)  # Corrélation intra-classe
+</a:t>
+            </a:r>
             <a:r>
               <a:rPr lang="en-US" sz="920" dirty="0">
                 <a:solidFill>
-                  <a:srgbClr val="9CDCFE"/>
+                  <a:srgbClr val="DCDCAA"/>
                 </a:solidFill>
                 <a:latin typeface="Courier New" pitchFamily="34" charset="0"/>
                 <a:ea typeface="Courier New" pitchFamily="34" charset="-122"/>
                 <a:cs typeface="Courier New" pitchFamily="34" charset="-120"/>
               </a:rPr>
-              <a:t>(malade ~ race + age +
-</a:t>
-            </a:r>
-            <a:pPr indent="0" marL="0">
-              <a:buNone/>
-            </a:pPr>
-            <a:r>
-              <a:rPr lang="en-US" sz="920" dirty="0">
-                <a:solidFill>
-                  <a:srgbClr val="9CDCFE"/>
-                </a:solidFill>
-                <a:latin typeface="Courier New" pitchFamily="34" charset="0"/>
-                <a:ea typeface="Courier New" pitchFamily="34" charset="-122"/>
-                <a:cs typeface="Courier New" pitchFamily="34" charset="-120"/>
-              </a:rPr>
-              <a:t>  (1|ferme),
-</a:t>
-            </a:r>
-            <a:pPr indent="0" marL="0">
-              <a:buNone/>
-            </a:pPr>
-            <a:r>
-              <a:rPr lang="en-US" sz="920" dirty="0">
-                <a:solidFill>
-                  <a:srgbClr val="9CDCFE"/>
-                </a:solidFill>
-                <a:latin typeface="Courier New" pitchFamily="34" charset="0"/>
-                <a:ea typeface="Courier New" pitchFamily="34" charset="-122"/>
-                <a:cs typeface="Courier New" pitchFamily="34" charset="-120"/>
-              </a:rPr>
-              <a:t>  family=binomial, data)
-</a:t>
-            </a:r>
-            <a:pPr indent="0" marL="0">
-              <a:buNone/>
-            </a:pPr>
-            <a:r>
-              <a:rPr lang="en-US" sz="920" dirty="0">
-                <a:solidFill>
-                  <a:srgbClr val="6A9955"/>
-                </a:solidFill>
-                <a:latin typeface="Courier New" pitchFamily="34" charset="0"/>
-                <a:ea typeface="Courier New" pitchFamily="34" charset="-122"/>
-                <a:cs typeface="Courier New" pitchFamily="34" charset="-120"/>
-              </a:rPr>
-              <a:t># Diagnostics et ICC
-</a:t>
-            </a:r>
-            <a:pPr indent="0" marL="0">
-              <a:buNone/>
-            </a:pPr>
-            <a:r>
-              <a:rPr lang="en-US" sz="920" dirty="0">
-                <a:solidFill>
-                  <a:srgbClr val="DCDCAA"/>
-                </a:solidFill>
-                <a:latin typeface="Courier New" pitchFamily="34" charset="0"/>
-                <a:ea typeface="Courier New" pitchFamily="34" charset="-122"/>
-                <a:cs typeface="Courier New" pitchFamily="34" charset="-120"/>
-              </a:rPr>
-              <a:t>library</a:t>
-            </a:r>
-            <a:pPr indent="0" marL="0">
-              <a:buNone/>
-            </a:pPr>
-            <a:r>
-              <a:rPr lang="en-US" sz="920" dirty="0">
-                <a:solidFill>
-                  <a:srgbClr val="9CDCFE"/>
-                </a:solidFill>
-                <a:latin typeface="Courier New" pitchFamily="34" charset="0"/>
-                <a:ea typeface="Courier New" pitchFamily="34" charset="-122"/>
-                <a:cs typeface="Courier New" pitchFamily="34" charset="-120"/>
-              </a:rPr>
-              <a:t>(performance)
-</a:t>
-            </a:r>
-            <a:pPr indent="0" marL="0">
-              <a:buNone/>
-            </a:pPr>
-            <a:r>
-              <a:rPr lang="en-US" sz="920" dirty="0">
-                <a:solidFill>
-                  <a:srgbClr val="DCDCAA"/>
-                </a:solidFill>
-                <a:latin typeface="Courier New" pitchFamily="34" charset="0"/>
-                <a:ea typeface="Courier New" pitchFamily="34" charset="-122"/>
-                <a:cs typeface="Courier New" pitchFamily="34" charset="-120"/>
-              </a:rPr>
-              <a:t>icc</a:t>
-            </a:r>
-            <a:pPr indent="0" marL="0">
-              <a:buNone/>
-            </a:pPr>
-            <a:r>
-              <a:rPr lang="en-US" sz="920" dirty="0">
-                <a:solidFill>
-                  <a:srgbClr val="9CDCFE"/>
-                </a:solidFill>
-                <a:latin typeface="Courier New" pitchFamily="34" charset="0"/>
-                <a:ea typeface="Courier New" pitchFamily="34" charset="-122"/>
-                <a:cs typeface="Courier New" pitchFamily="34" charset="-120"/>
-              </a:rPr>
-              <a:t>(lmm1)  # Corrélation intra-classe
-</a:t>
-            </a:r>
-            <a:pPr indent="0" marL="0">
-              <a:buNone/>
-            </a:pPr>
-            <a:r>
-              <a:rPr lang="en-US" sz="920" dirty="0">
-                <a:solidFill>
-                  <a:srgbClr val="DCDCAA"/>
-                </a:solidFill>
-                <a:latin typeface="Courier New" pitchFamily="34" charset="0"/>
-                <a:ea typeface="Courier New" pitchFamily="34" charset="-122"/>
-                <a:cs typeface="Courier New" pitchFamily="34" charset="-120"/>
-              </a:rPr>
               <a:t>check_model</a:t>
             </a:r>
-            <a:pPr indent="0" marL="0">
-              <a:buNone/>
-            </a:pPr>
             <a:r>
               <a:rPr lang="en-US" sz="920" dirty="0">
                 <a:solidFill>
@@ -12465,6 +11725,7 @@
         <a:solidFill>
           <a:srgbClr val="FFFFFF"/>
         </a:solidFill>
+        <a:effectLst/>
       </p:bgPr>
     </p:bg>
     <p:spTree>
@@ -12522,7 +11783,7 @@
           <a:bodyPr wrap="square" lIns="0" tIns="0" rIns="0" bIns="0" rtlCol="0" anchor="ctr"/>
           <a:lstStyle/>
           <a:p>
-            <a:pPr indent="0" marL="0">
+            <a:pPr marL="0" indent="0">
               <a:buNone/>
             </a:pPr>
             <a:r>
@@ -12556,7 +11817,7 @@
           </a:solidFill>
           <a:ln/>
           <a:effectLst>
-            <a:outerShdw sx="100000" sy="100000" kx="0" ky="0" algn="bl" rotWithShape="0" blurRad="101600" dist="38100" dir="8100000">
+            <a:outerShdw blurRad="101600" dist="38100" dir="8100000" algn="bl" rotWithShape="0">
               <a:srgbClr val="000000">
                 <a:alpha val="12000"/>
               </a:srgbClr>
@@ -12605,7 +11866,7 @@
           <a:bodyPr wrap="square" lIns="0" tIns="0" rIns="0" bIns="0" rtlCol="0" anchor="ctr"/>
           <a:lstStyle/>
           <a:p>
-            <a:pPr algn="ctr" indent="0" marL="0">
+            <a:pPr marL="0" indent="0" algn="ctr">
               <a:buNone/>
             </a:pPr>
             <a:r>
@@ -12641,7 +11902,7 @@
           <a:bodyPr wrap="square" lIns="0" tIns="0" rIns="0" bIns="0" rtlCol="0" anchor="t"/>
           <a:lstStyle/>
           <a:p>
-            <a:pPr indent="0" marL="0">
+            <a:pPr marL="0" indent="0">
               <a:buNone/>
             </a:pPr>
             <a:r>
@@ -12653,9 +11914,6 @@
               <a:t>Objectif :
 </a:t>
             </a:r>
-            <a:pPr indent="0" marL="0">
-              <a:buNone/>
-            </a:pPr>
             <a:r>
               <a:rPr lang="en-US" sz="1050" dirty="0">
                 <a:solidFill>
@@ -12665,9 +11923,6 @@
               <a:t>Réduire la dimensionnalité, identifier des groupes et structures latentes dans des données multivariées
 </a:t>
             </a:r>
-            <a:pPr indent="0" marL="0">
-              <a:buNone/>
-            </a:pPr>
             <a:r>
               <a:rPr lang="en-US" sz="1050" b="1" dirty="0">
                 <a:solidFill>
@@ -12677,9 +11932,6 @@
               <a:t>Conditions :
 </a:t>
             </a:r>
-            <a:pPr indent="0" marL="0">
-              <a:buNone/>
-            </a:pPr>
             <a:r>
               <a:rPr lang="en-US" sz="1050" dirty="0">
                 <a:solidFill>
@@ -12692,9 +11944,6 @@
 ✔ Standardisation recommandée (mean=0, sd=1)
 </a:t>
             </a:r>
-            <a:pPr indent="0" marL="0">
-              <a:buNone/>
-            </a:pPr>
             <a:r>
               <a:rPr lang="en-US" sz="1050" b="1" dirty="0">
                 <a:solidFill>
@@ -12704,9 +11953,6 @@
               <a:t>Compléments multivariés :
 </a:t>
             </a:r>
-            <a:pPr indent="0" marL="0">
-              <a:buNone/>
-            </a:pPr>
             <a:r>
               <a:rPr lang="en-US" sz="1050" dirty="0">
                 <a:solidFill>
@@ -12719,19 +11965,41 @@
 • AFD (analyse discriminante)
 </a:t>
             </a:r>
-            <a:pPr indent="0" marL="0">
+            <a:r>
+              <a:rPr lang="en-US" sz="1050" b="1" dirty="0">
+                <a:solidFill>
+                  <a:srgbClr val="5C4033"/>
+                </a:solidFill>
+              </a:rPr>
+              <a:t>Applications :
+</a:t>
+            </a:r>
+            <a:r>
+              <a:rPr lang="en-US" sz="1050" dirty="0">
+                <a:solidFill>
+                  <a:srgbClr val="2D3436"/>
+                </a:solidFill>
+              </a:rPr>
+              <a:t>→ Caractérisation des sols (matière org., pH, N, P…)</a:t>
+            </a:r>
+            <a:endParaRPr lang="en-US" sz="1050" dirty="0"/>
+          </a:p>
+          <a:p>
+            <a:pPr marL="0" indent="0">
               <a:buNone/>
             </a:pPr>
             <a:r>
-              <a:rPr lang="en-US" sz="1050" b="1" dirty="0">
-                <a:solidFill>
-                  <a:srgbClr val="5C4033"/>
-                </a:solidFill>
-              </a:rPr>
-              <a:t>Applications :
-</a:t>
-            </a:r>
-            <a:pPr indent="0" marL="0">
+              <a:rPr lang="en-US" sz="1050" dirty="0">
+                <a:solidFill>
+                  <a:srgbClr val="2D3436"/>
+                </a:solidFill>
+              </a:rPr>
+              <a:t>→ Profilage génotypique de variétés</a:t>
+            </a:r>
+            <a:endParaRPr lang="en-US" sz="1050" dirty="0"/>
+          </a:p>
+          <a:p>
+            <a:pPr marL="0" indent="0">
               <a:buNone/>
             </a:pPr>
             <a:r>
@@ -12740,40 +12008,12 @@
                   <a:srgbClr val="2D3436"/>
                 </a:solidFill>
               </a:rPr>
-              <a:t>→ Caractérisation des sols (matière org., pH, N, P…)</a:t>
+              <a:t>→ Analyse qualité lait (TB, TP, CCS…)</a:t>
             </a:r>
             <a:endParaRPr lang="en-US" sz="1050" dirty="0"/>
           </a:p>
           <a:p>
-            <a:pPr indent="0" marL="0">
-              <a:buNone/>
-            </a:pPr>
-            <a:r>
-              <a:rPr lang="en-US" sz="1050" dirty="0">
-                <a:solidFill>
-                  <a:srgbClr val="2D3436"/>
-                </a:solidFill>
-              </a:rPr>
-              <a:t>→ Profilage génotypique de variétés</a:t>
-            </a:r>
-            <a:endParaRPr lang="en-US" sz="1050" dirty="0"/>
-          </a:p>
-          <a:p>
-            <a:pPr indent="0" marL="0">
-              <a:buNone/>
-            </a:pPr>
-            <a:r>
-              <a:rPr lang="en-US" sz="1050" dirty="0">
-                <a:solidFill>
-                  <a:srgbClr val="2D3436"/>
-                </a:solidFill>
-              </a:rPr>
-              <a:t>→ Analyse qualité lait (TB, TP, CCS…)</a:t>
-            </a:r>
-            <a:endParaRPr lang="en-US" sz="1050" dirty="0"/>
-          </a:p>
-          <a:p>
-            <a:pPr indent="0" marL="0">
+            <a:pPr marL="0" indent="0">
               <a:buNone/>
             </a:pPr>
             <a:r>
@@ -12807,7 +12047,7 @@
           </a:solidFill>
           <a:ln/>
           <a:effectLst>
-            <a:outerShdw sx="100000" sy="100000" kx="0" ky="0" algn="bl" rotWithShape="0" blurRad="101600" dist="38100" dir="8100000">
+            <a:outerShdw blurRad="101600" dist="38100" dir="8100000" algn="bl" rotWithShape="0">
               <a:srgbClr val="000000">
                 <a:alpha val="12000"/>
               </a:srgbClr>
@@ -12856,7 +12096,7 @@
           <a:bodyPr wrap="square" lIns="0" tIns="0" rIns="0" bIns="0" rtlCol="0" anchor="ctr"/>
           <a:lstStyle/>
           <a:p>
-            <a:pPr algn="ctr" indent="0" marL="0">
+            <a:pPr marL="0" indent="0" algn="ctr">
               <a:buNone/>
             </a:pPr>
             <a:r>
@@ -12892,7 +12132,7 @@
           <a:bodyPr wrap="square" lIns="0" tIns="0" rIns="0" bIns="0" rtlCol="0" anchor="t"/>
           <a:lstStyle/>
           <a:p>
-            <a:pPr indent="0" marL="0">
+            <a:pPr marL="0" indent="0">
               <a:buNone/>
             </a:pPr>
             <a:r>
@@ -12906,9 +12146,6 @@
               </a:rPr>
               <a:t>library</a:t>
             </a:r>
-            <a:pPr indent="0" marL="0">
-              <a:buNone/>
-            </a:pPr>
             <a:r>
               <a:rPr lang="en-US" sz="920" dirty="0">
                 <a:solidFill>
@@ -12920,9 +12157,6 @@
               </a:rPr>
               <a:t>(FactoMineR) ; </a:t>
             </a:r>
-            <a:pPr indent="0" marL="0">
-              <a:buNone/>
-            </a:pPr>
             <a:r>
               <a:rPr lang="en-US" sz="920" dirty="0">
                 <a:solidFill>
@@ -12934,9 +12168,6 @@
               </a:rPr>
               <a:t>library</a:t>
             </a:r>
-            <a:pPr indent="0" marL="0">
-              <a:buNone/>
-            </a:pPr>
             <a:r>
               <a:rPr lang="en-US" sz="920" dirty="0">
                 <a:solidFill>
@@ -12949,9 +12180,6 @@
               <a:t>(factoextra)
 </a:t>
             </a:r>
-            <a:pPr indent="0" marL="0">
-              <a:buNone/>
-            </a:pPr>
             <a:r>
               <a:rPr lang="en-US" sz="920" dirty="0">
                 <a:solidFill>
@@ -12962,41 +12190,33 @@
                 <a:cs typeface="Courier New" pitchFamily="34" charset="-120"/>
               </a:rPr>
               <a:t># Données : propriétés du sol (N=50 parcelles)
+# Variables : pH, MO, N, P, K, CEC, argile
+# ACP standardisée
 </a:t>
             </a:r>
-            <a:pPr indent="0" marL="0">
-              <a:buNone/>
-            </a:pPr>
             <a:r>
               <a:rPr lang="en-US" sz="920" dirty="0">
                 <a:solidFill>
-                  <a:srgbClr val="6A9955"/>
+                  <a:srgbClr val="9CDCFE"/>
                 </a:solidFill>
                 <a:latin typeface="Courier New" pitchFamily="34" charset="0"/>
                 <a:ea typeface="Courier New" pitchFamily="34" charset="-122"/>
                 <a:cs typeface="Courier New" pitchFamily="34" charset="-120"/>
               </a:rPr>
-              <a:t># Variables : pH, MO, N, P, K, CEC, argile
+              <a:t>res.pca &lt;- PCA(sol_data, scale.unit=TRUE, graph=F)
 </a:t>
             </a:r>
-            <a:pPr indent="0" marL="0">
-              <a:buNone/>
-            </a:pPr>
             <a:r>
               <a:rPr lang="en-US" sz="920" dirty="0">
                 <a:solidFill>
-                  <a:srgbClr val="6A9955"/>
+                  <a:srgbClr val="DCDCAA"/>
                 </a:solidFill>
                 <a:latin typeface="Courier New" pitchFamily="34" charset="0"/>
                 <a:ea typeface="Courier New" pitchFamily="34" charset="-122"/>
                 <a:cs typeface="Courier New" pitchFamily="34" charset="-120"/>
               </a:rPr>
-              <a:t># ACP standardisée
-</a:t>
-            </a:r>
-            <a:pPr indent="0" marL="0">
-              <a:buNone/>
-            </a:pPr>
+              <a:t>summary</a:t>
+            </a:r>
             <a:r>
               <a:rPr lang="en-US" sz="920" dirty="0">
                 <a:solidFill>
@@ -13006,26 +12226,21 @@
                 <a:ea typeface="Courier New" pitchFamily="34" charset="-122"/>
                 <a:cs typeface="Courier New" pitchFamily="34" charset="-120"/>
               </a:rPr>
-              <a:t>res.pca &lt;- PCA</a:t>
-            </a:r>
-            <a:pPr indent="0" marL="0">
-              <a:buNone/>
-            </a:pPr>
+              <a:t>(res.pca)
+</a:t>
+            </a:r>
             <a:r>
               <a:rPr lang="en-US" sz="920" dirty="0">
                 <a:solidFill>
-                  <a:srgbClr val="9CDCFE"/>
+                  <a:srgbClr val="6A9955"/>
                 </a:solidFill>
                 <a:latin typeface="Courier New" pitchFamily="34" charset="0"/>
                 <a:ea typeface="Courier New" pitchFamily="34" charset="-122"/>
                 <a:cs typeface="Courier New" pitchFamily="34" charset="-120"/>
               </a:rPr>
-              <a:t>(sol_data, scale.unit=TRUE, graph=F)
+              <a:t># Valeurs propres (scree plot)
 </a:t>
             </a:r>
-            <a:pPr indent="0" marL="0">
-              <a:buNone/>
-            </a:pPr>
             <a:r>
               <a:rPr lang="en-US" sz="920" dirty="0">
                 <a:solidFill>
@@ -13035,11 +12250,8 @@
                 <a:ea typeface="Courier New" pitchFamily="34" charset="-122"/>
                 <a:cs typeface="Courier New" pitchFamily="34" charset="-120"/>
               </a:rPr>
-              <a:t>summary</a:t>
-            </a:r>
-            <a:pPr indent="0" marL="0">
-              <a:buNone/>
-            </a:pPr>
+              <a:t>fviz_eig</a:t>
+            </a:r>
             <a:r>
               <a:rPr lang="en-US" sz="920" dirty="0">
                 <a:solidFill>
@@ -13049,12 +12261,9 @@
                 <a:ea typeface="Courier New" pitchFamily="34" charset="-122"/>
                 <a:cs typeface="Courier New" pitchFamily="34" charset="-120"/>
               </a:rPr>
-              <a:t>(res.pca)
+              <a:t>(res.pca, addlabels=TRUE)
 </a:t>
             </a:r>
-            <a:pPr indent="0" marL="0">
-              <a:buNone/>
-            </a:pPr>
             <a:r>
               <a:rPr lang="en-US" sz="920" dirty="0">
                 <a:solidFill>
@@ -13064,12 +12273,9 @@
                 <a:ea typeface="Courier New" pitchFamily="34" charset="-122"/>
                 <a:cs typeface="Courier New" pitchFamily="34" charset="-120"/>
               </a:rPr>
-              <a:t># Valeurs propres (scree plot)
+              <a:t># Cercle des corrélations
 </a:t>
             </a:r>
-            <a:pPr indent="0" marL="0">
-              <a:buNone/>
-            </a:pPr>
             <a:r>
               <a:rPr lang="en-US" sz="920" dirty="0">
                 <a:solidFill>
@@ -13079,11 +12285,8 @@
                 <a:ea typeface="Courier New" pitchFamily="34" charset="-122"/>
                 <a:cs typeface="Courier New" pitchFamily="34" charset="-120"/>
               </a:rPr>
-              <a:t>fviz_eig</a:t>
-            </a:r>
-            <a:pPr indent="0" marL="0">
-              <a:buNone/>
-            </a:pPr>
+              <a:t>fviz_pca_var</a:t>
+            </a:r>
             <a:r>
               <a:rPr lang="en-US" sz="920" dirty="0">
                 <a:solidFill>
@@ -13093,12 +12296,10 @@
                 <a:ea typeface="Courier New" pitchFamily="34" charset="-122"/>
                 <a:cs typeface="Courier New" pitchFamily="34" charset="-120"/>
               </a:rPr>
-              <a:t>(res.pca, addlabels=TRUE)
+              <a:t>(res.pca, col.var='cos2',
+  gradient.cols=c('red','blue'))
 </a:t>
             </a:r>
-            <a:pPr indent="0" marL="0">
-              <a:buNone/>
-            </a:pPr>
             <a:r>
               <a:rPr lang="en-US" sz="920" dirty="0">
                 <a:solidFill>
@@ -13108,12 +12309,9 @@
                 <a:ea typeface="Courier New" pitchFamily="34" charset="-122"/>
                 <a:cs typeface="Courier New" pitchFamily="34" charset="-120"/>
               </a:rPr>
-              <a:t># Cercle des corrélations
+              <a:t># Biplot individus + variables
 </a:t>
             </a:r>
-            <a:pPr indent="0" marL="0">
-              <a:buNone/>
-            </a:pPr>
             <a:r>
               <a:rPr lang="en-US" sz="920" dirty="0">
                 <a:solidFill>
@@ -13123,11 +12321,8 @@
                 <a:ea typeface="Courier New" pitchFamily="34" charset="-122"/>
                 <a:cs typeface="Courier New" pitchFamily="34" charset="-120"/>
               </a:rPr>
-              <a:t>fviz_pca_var</a:t>
-            </a:r>
-            <a:pPr indent="0" marL="0">
-              <a:buNone/>
-            </a:pPr>
+              <a:t>fviz_pca_biplot</a:t>
+            </a:r>
             <a:r>
               <a:rPr lang="en-US" sz="920" dirty="0">
                 <a:solidFill>
@@ -13137,42 +12332,33 @@
                 <a:ea typeface="Courier New" pitchFamily="34" charset="-122"/>
                 <a:cs typeface="Courier New" pitchFamily="34" charset="-120"/>
               </a:rPr>
-              <a:t>(res.pca, col.var='cos2',
+              <a:t>(res.pca, habillage='type_sol')
 </a:t>
             </a:r>
-            <a:pPr indent="0" marL="0">
-              <a:buNone/>
-            </a:pPr>
             <a:r>
               <a:rPr lang="en-US" sz="920" dirty="0">
                 <a:solidFill>
-                  <a:srgbClr val="9CDCFE"/>
+                  <a:srgbClr val="6A9955"/>
                 </a:solidFill>
                 <a:latin typeface="Courier New" pitchFamily="34" charset="0"/>
                 <a:ea typeface="Courier New" pitchFamily="34" charset="-122"/>
                 <a:cs typeface="Courier New" pitchFamily="34" charset="-120"/>
               </a:rPr>
-              <a:t>  gradient.cols=c('red','blue'))
+              <a:t># Clustering sur composantes
 </a:t>
             </a:r>
-            <a:pPr indent="0" marL="0">
-              <a:buNone/>
-            </a:pPr>
             <a:r>
               <a:rPr lang="en-US" sz="920" dirty="0">
                 <a:solidFill>
-                  <a:srgbClr val="6A9955"/>
+                  <a:srgbClr val="9CDCFE"/>
                 </a:solidFill>
                 <a:latin typeface="Courier New" pitchFamily="34" charset="0"/>
                 <a:ea typeface="Courier New" pitchFamily="34" charset="-122"/>
                 <a:cs typeface="Courier New" pitchFamily="34" charset="-120"/>
               </a:rPr>
-              <a:t># Biplot individus + variables
+              <a:t>hcpc &lt;- HCPC(res.pca, nb.clust=3)
 </a:t>
             </a:r>
-            <a:pPr indent="0" marL="0">
-              <a:buNone/>
-            </a:pPr>
             <a:r>
               <a:rPr lang="en-US" sz="920" dirty="0">
                 <a:solidFill>
@@ -13182,84 +12368,8 @@
                 <a:ea typeface="Courier New" pitchFamily="34" charset="-122"/>
                 <a:cs typeface="Courier New" pitchFamily="34" charset="-120"/>
               </a:rPr>
-              <a:t>fviz_pca_biplot</a:t>
-            </a:r>
-            <a:pPr indent="0" marL="0">
-              <a:buNone/>
-            </a:pPr>
-            <a:r>
-              <a:rPr lang="en-US" sz="920" dirty="0">
-                <a:solidFill>
-                  <a:srgbClr val="9CDCFE"/>
-                </a:solidFill>
-                <a:latin typeface="Courier New" pitchFamily="34" charset="0"/>
-                <a:ea typeface="Courier New" pitchFamily="34" charset="-122"/>
-                <a:cs typeface="Courier New" pitchFamily="34" charset="-120"/>
-              </a:rPr>
-              <a:t>(res.pca, habillage='type_sol')
-</a:t>
-            </a:r>
-            <a:pPr indent="0" marL="0">
-              <a:buNone/>
-            </a:pPr>
-            <a:r>
-              <a:rPr lang="en-US" sz="920" dirty="0">
-                <a:solidFill>
-                  <a:srgbClr val="6A9955"/>
-                </a:solidFill>
-                <a:latin typeface="Courier New" pitchFamily="34" charset="0"/>
-                <a:ea typeface="Courier New" pitchFamily="34" charset="-122"/>
-                <a:cs typeface="Courier New" pitchFamily="34" charset="-120"/>
-              </a:rPr>
-              <a:t># Clustering sur composantes
-</a:t>
-            </a:r>
-            <a:pPr indent="0" marL="0">
-              <a:buNone/>
-            </a:pPr>
-            <a:r>
-              <a:rPr lang="en-US" sz="920" dirty="0">
-                <a:solidFill>
-                  <a:srgbClr val="9CDCFE"/>
-                </a:solidFill>
-                <a:latin typeface="Courier New" pitchFamily="34" charset="0"/>
-                <a:ea typeface="Courier New" pitchFamily="34" charset="-122"/>
-                <a:cs typeface="Courier New" pitchFamily="34" charset="-120"/>
-              </a:rPr>
-              <a:t>hcpc &lt;- HCPC</a:t>
-            </a:r>
-            <a:pPr indent="0" marL="0">
-              <a:buNone/>
-            </a:pPr>
-            <a:r>
-              <a:rPr lang="en-US" sz="920" dirty="0">
-                <a:solidFill>
-                  <a:srgbClr val="9CDCFE"/>
-                </a:solidFill>
-                <a:latin typeface="Courier New" pitchFamily="34" charset="0"/>
-                <a:ea typeface="Courier New" pitchFamily="34" charset="-122"/>
-                <a:cs typeface="Courier New" pitchFamily="34" charset="-120"/>
-              </a:rPr>
-              <a:t>(res.pca, nb.clust=3)
-</a:t>
-            </a:r>
-            <a:pPr indent="0" marL="0">
-              <a:buNone/>
-            </a:pPr>
-            <a:r>
-              <a:rPr lang="en-US" sz="920" dirty="0">
-                <a:solidFill>
-                  <a:srgbClr val="DCDCAA"/>
-                </a:solidFill>
-                <a:latin typeface="Courier New" pitchFamily="34" charset="0"/>
-                <a:ea typeface="Courier New" pitchFamily="34" charset="-122"/>
-                <a:cs typeface="Courier New" pitchFamily="34" charset="-120"/>
-              </a:rPr>
               <a:t>plot</a:t>
             </a:r>
-            <a:pPr indent="0" marL="0">
-              <a:buNone/>
-            </a:pPr>
             <a:r>
               <a:rPr lang="en-US" sz="920" dirty="0">
                 <a:solidFill>
@@ -13292,6 +12402,7 @@
         <a:solidFill>
           <a:srgbClr val="FFFFFF"/>
         </a:solidFill>
+        <a:effectLst/>
       </p:bgPr>
     </p:bg>
     <p:spTree>
@@ -13349,7 +12460,7 @@
           <a:bodyPr wrap="square" lIns="0" tIns="0" rIns="0" bIns="0" rtlCol="0" anchor="ctr"/>
           <a:lstStyle/>
           <a:p>
-            <a:pPr indent="0" marL="0">
+            <a:pPr marL="0" indent="0">
               <a:buNone/>
             </a:pPr>
             <a:r>
@@ -13383,7 +12494,7 @@
           </a:solidFill>
           <a:ln/>
           <a:effectLst>
-            <a:outerShdw sx="100000" sy="100000" kx="0" ky="0" algn="bl" rotWithShape="0" blurRad="101600" dist="38100" dir="8100000">
+            <a:outerShdw blurRad="101600" dist="38100" dir="8100000" algn="bl" rotWithShape="0">
               <a:srgbClr val="000000">
                 <a:alpha val="12000"/>
               </a:srgbClr>
@@ -13432,7 +12543,7 @@
           <a:bodyPr wrap="square" lIns="0" tIns="0" rIns="0" bIns="0" rtlCol="0" anchor="ctr"/>
           <a:lstStyle/>
           <a:p>
-            <a:pPr algn="ctr" indent="0" marL="0">
+            <a:pPr marL="0" indent="0" algn="ctr">
               <a:buNone/>
             </a:pPr>
             <a:r>
@@ -13468,7 +12579,7 @@
           <a:bodyPr wrap="square" lIns="0" tIns="0" rIns="0" bIns="0" rtlCol="0" anchor="t"/>
           <a:lstStyle/>
           <a:p>
-            <a:pPr indent="0" marL="0">
+            <a:pPr marL="0" indent="0">
               <a:buNone/>
             </a:pPr>
             <a:r>
@@ -13480,9 +12591,6 @@
               <a:t>Modèles :
 </a:t>
             </a:r>
-            <a:pPr indent="0" marL="0">
-              <a:buNone/>
-            </a:pPr>
             <a:r>
               <a:rPr lang="en-US" sz="1000" dirty="0">
                 <a:solidFill>
@@ -13495,9 +12603,6 @@
 • ARCH/GARCH : variance non constante
 </a:t>
             </a:r>
-            <a:pPr indent="0" marL="0">
-              <a:buNone/>
-            </a:pPr>
             <a:r>
               <a:rPr lang="en-US" sz="1000" b="1" dirty="0">
                 <a:solidFill>
@@ -13507,9 +12612,6 @@
               <a:t>Applications :
 </a:t>
             </a:r>
-            <a:pPr indent="0" marL="0">
-              <a:buNone/>
-            </a:pPr>
             <a:r>
               <a:rPr lang="en-US" sz="1000" dirty="0">
                 <a:solidFill>
@@ -13522,47 +12624,41 @@
 → Débit cours d'eau (hydrologie)
 </a:t>
             </a:r>
-            <a:pPr indent="0" marL="0">
+            <a:r>
+              <a:rPr lang="en-US" sz="1000" b="1" dirty="0">
+                <a:solidFill>
+                  <a:srgbClr val="1A535C"/>
+                </a:solidFill>
+              </a:rPr>
+              <a:t>Conditions :
+</a:t>
+            </a:r>
+            <a:r>
+              <a:rPr lang="en-US" sz="1000" dirty="0">
+                <a:solidFill>
+                  <a:srgbClr val="2D3436"/>
+                </a:solidFill>
+              </a:rPr>
+              <a:t>✔ Test de stationnarité (ADF, KPSS)</a:t>
+            </a:r>
+            <a:endParaRPr lang="en-US" sz="1000" dirty="0"/>
+          </a:p>
+          <a:p>
+            <a:pPr marL="0" indent="0">
               <a:buNone/>
             </a:pPr>
             <a:r>
-              <a:rPr lang="en-US" sz="1000" b="1" dirty="0">
-                <a:solidFill>
-                  <a:srgbClr val="1A535C"/>
-                </a:solidFill>
-              </a:rPr>
-              <a:t>Conditions :
-</a:t>
-            </a:r>
-            <a:pPr indent="0" marL="0">
-              <a:buNone/>
-            </a:pPr>
-            <a:r>
               <a:rPr lang="en-US" sz="1000" dirty="0">
                 <a:solidFill>
                   <a:srgbClr val="2D3436"/>
                 </a:solidFill>
               </a:rPr>
-              <a:t>✔ Test de stationnarité (ADF, KPSS)</a:t>
+              <a:t>✔ ACF / PACF pour choisir p, q</a:t>
             </a:r>
             <a:endParaRPr lang="en-US" sz="1000" dirty="0"/>
           </a:p>
           <a:p>
-            <a:pPr indent="0" marL="0">
-              <a:buNone/>
-            </a:pPr>
-            <a:r>
-              <a:rPr lang="en-US" sz="1000" dirty="0">
-                <a:solidFill>
-                  <a:srgbClr val="2D3436"/>
-                </a:solidFill>
-              </a:rPr>
-              <a:t>✔ ACF / PACF pour choisir p, q</a:t>
-            </a:r>
-            <a:endParaRPr lang="en-US" sz="1000" dirty="0"/>
-          </a:p>
-          <a:p>
-            <a:pPr indent="0" marL="0">
+            <a:pPr marL="0" indent="0">
               <a:buNone/>
             </a:pPr>
             <a:r>
@@ -13596,7 +12692,7 @@
           </a:solidFill>
           <a:ln/>
           <a:effectLst>
-            <a:outerShdw sx="100000" sy="100000" kx="0" ky="0" algn="bl" rotWithShape="0" blurRad="101600" dist="38100" dir="8100000">
+            <a:outerShdw blurRad="101600" dist="38100" dir="8100000" algn="bl" rotWithShape="0">
               <a:srgbClr val="000000">
                 <a:alpha val="12000"/>
               </a:srgbClr>
@@ -13645,7 +12741,7 @@
           <a:bodyPr wrap="square" lIns="0" tIns="0" rIns="0" bIns="0" rtlCol="0" anchor="ctr"/>
           <a:lstStyle/>
           <a:p>
-            <a:pPr algn="ctr" indent="0" marL="0">
+            <a:pPr marL="0" indent="0" algn="ctr">
               <a:buNone/>
             </a:pPr>
             <a:r>
@@ -13681,7 +12777,7 @@
           <a:bodyPr wrap="square" lIns="0" tIns="0" rIns="0" bIns="0" rtlCol="0" anchor="t"/>
           <a:lstStyle/>
           <a:p>
-            <a:pPr indent="0" marL="0">
+            <a:pPr marL="0" indent="0">
               <a:buNone/>
             </a:pPr>
             <a:r>
@@ -13693,9 +12789,6 @@
               <a:t>Approches :
 </a:t>
             </a:r>
-            <a:pPr indent="0" marL="0">
-              <a:buNone/>
-            </a:pPr>
             <a:r>
               <a:rPr lang="en-US" sz="1000" dirty="0">
                 <a:solidFill>
@@ -13708,9 +12801,6 @@
 • Random Forest spatial
 </a:t>
             </a:r>
-            <a:pPr indent="0" marL="0">
-              <a:buNone/>
-            </a:pPr>
             <a:r>
               <a:rPr lang="en-US" sz="1000" b="1" dirty="0">
                 <a:solidFill>
@@ -13720,9 +12810,6 @@
               <a:t>Applications :
 </a:t>
             </a:r>
-            <a:pPr indent="0" marL="0">
-              <a:buNone/>
-            </a:pPr>
             <a:r>
               <a:rPr lang="en-US" sz="1000" dirty="0">
                 <a:solidFill>
@@ -13735,47 +12822,41 @@
 → Interpolation données climatiques
 </a:t>
             </a:r>
-            <a:pPr indent="0" marL="0">
+            <a:r>
+              <a:rPr lang="en-US" sz="1000" b="1" dirty="0">
+                <a:solidFill>
+                  <a:srgbClr val="2D6A4F"/>
+                </a:solidFill>
+              </a:rPr>
+              <a:t>Conditions :
+</a:t>
+            </a:r>
+            <a:r>
+              <a:rPr lang="en-US" sz="1000" dirty="0">
+                <a:solidFill>
+                  <a:srgbClr val="2D3436"/>
+                </a:solidFill>
+              </a:rPr>
+              <a:t>✔ Test autocorrélation spatiale (Moran I)</a:t>
+            </a:r>
+            <a:endParaRPr lang="en-US" sz="1000" dirty="0"/>
+          </a:p>
+          <a:p>
+            <a:pPr marL="0" indent="0">
               <a:buNone/>
             </a:pPr>
             <a:r>
-              <a:rPr lang="en-US" sz="1000" b="1" dirty="0">
-                <a:solidFill>
-                  <a:srgbClr val="2D6A4F"/>
-                </a:solidFill>
-              </a:rPr>
-              <a:t>Conditions :
-</a:t>
-            </a:r>
-            <a:pPr indent="0" marL="0">
-              <a:buNone/>
-            </a:pPr>
-            <a:r>
               <a:rPr lang="en-US" sz="1000" dirty="0">
                 <a:solidFill>
                   <a:srgbClr val="2D3436"/>
                 </a:solidFill>
               </a:rPr>
-              <a:t>✔ Test autocorrélation spatiale (Moran I)</a:t>
+              <a:t>✔ Variogramme pour krigeage</a:t>
             </a:r>
             <a:endParaRPr lang="en-US" sz="1000" dirty="0"/>
           </a:p>
           <a:p>
-            <a:pPr indent="0" marL="0">
-              <a:buNone/>
-            </a:pPr>
-            <a:r>
-              <a:rPr lang="en-US" sz="1000" dirty="0">
-                <a:solidFill>
-                  <a:srgbClr val="2D3436"/>
-                </a:solidFill>
-              </a:rPr>
-              <a:t>✔ Variogramme pour krigeage</a:t>
-            </a:r>
-            <a:endParaRPr lang="en-US" sz="1000" dirty="0"/>
-          </a:p>
-          <a:p>
-            <a:pPr indent="0" marL="0">
+            <a:pPr marL="0" indent="0">
               <a:buNone/>
             </a:pPr>
             <a:r>
@@ -13809,7 +12890,7 @@
           </a:solidFill>
           <a:ln/>
           <a:effectLst>
-            <a:outerShdw sx="100000" sy="100000" kx="0" ky="0" algn="bl" rotWithShape="0" blurRad="101600" dist="38100" dir="8100000">
+            <a:outerShdw blurRad="101600" dist="38100" dir="8100000" algn="bl" rotWithShape="0">
               <a:srgbClr val="000000">
                 <a:alpha val="12000"/>
               </a:srgbClr>
@@ -13858,7 +12939,7 @@
           <a:bodyPr wrap="square" lIns="0" tIns="0" rIns="0" bIns="0" rtlCol="0" anchor="ctr"/>
           <a:lstStyle/>
           <a:p>
-            <a:pPr algn="ctr" indent="0" marL="0">
+            <a:pPr marL="0" indent="0" algn="ctr">
               <a:buNone/>
             </a:pPr>
             <a:r>
@@ -13894,7 +12975,7 @@
           <a:bodyPr wrap="square" lIns="0" tIns="0" rIns="0" bIns="0" rtlCol="0" anchor="t"/>
           <a:lstStyle/>
           <a:p>
-            <a:pPr indent="0" marL="0">
+            <a:pPr marL="0" indent="0">
               <a:buNone/>
             </a:pPr>
             <a:r>
@@ -13908,9 +12989,6 @@
               </a:rPr>
               <a:t>library</a:t>
             </a:r>
-            <a:pPr indent="0" marL="0">
-              <a:buNone/>
-            </a:pPr>
             <a:r>
               <a:rPr lang="en-US" sz="920" dirty="0">
                 <a:solidFill>
@@ -13921,25 +12999,19 @@
                 <a:cs typeface="Courier New" pitchFamily="34" charset="-120"/>
               </a:rPr>
               <a:t>(forecast)  # ARIMA auto
-</a:t>
-            </a:r>
-            <a:pPr indent="0" marL="0">
-              <a:buNone/>
-            </a:pPr>
+mod_arima &lt;- auto.arima(ts(rendement, freq=1)) ; </a:t>
+            </a:r>
             <a:r>
               <a:rPr lang="en-US" sz="920" dirty="0">
                 <a:solidFill>
-                  <a:srgbClr val="9CDCFE"/>
+                  <a:srgbClr val="DCDCAA"/>
                 </a:solidFill>
                 <a:latin typeface="Courier New" pitchFamily="34" charset="0"/>
                 <a:ea typeface="Courier New" pitchFamily="34" charset="-122"/>
                 <a:cs typeface="Courier New" pitchFamily="34" charset="-120"/>
               </a:rPr>
-              <a:t>mod_arima &lt;- auto.arima</a:t>
-            </a:r>
-            <a:pPr indent="0" marL="0">
-              <a:buNone/>
-            </a:pPr>
+              <a:t>forecast</a:t>
+            </a:r>
             <a:r>
               <a:rPr lang="en-US" sz="920" dirty="0">
                 <a:solidFill>
@@ -13949,68 +13021,31 @@
                 <a:ea typeface="Courier New" pitchFamily="34" charset="-122"/>
                 <a:cs typeface="Courier New" pitchFamily="34" charset="-120"/>
               </a:rPr>
-              <a:t>(ts(rendement, freq=1)) ; </a:t>
-            </a:r>
-            <a:pPr indent="0" marL="0">
-              <a:buNone/>
-            </a:pPr>
+              <a:t>(mod_arima, h=5)        </a:t>
+            </a:r>
             <a:r>
               <a:rPr lang="en-US" sz="920" dirty="0">
                 <a:solidFill>
-                  <a:srgbClr val="DCDCAA"/>
+                  <a:srgbClr val="6A9955"/>
                 </a:solidFill>
                 <a:latin typeface="Courier New" pitchFamily="34" charset="0"/>
                 <a:ea typeface="Courier New" pitchFamily="34" charset="-122"/>
                 <a:cs typeface="Courier New" pitchFamily="34" charset="-120"/>
               </a:rPr>
-              <a:t>forecast</a:t>
-            </a:r>
-            <a:pPr indent="0" marL="0">
-              <a:buNone/>
-            </a:pPr>
+              <a:t># Krigeage (geoR/gstat)
+</a:t>
+            </a:r>
             <a:r>
               <a:rPr lang="en-US" sz="920" dirty="0">
                 <a:solidFill>
-                  <a:srgbClr val="9CDCFE"/>
+                  <a:srgbClr val="DCDCAA"/>
                 </a:solidFill>
                 <a:latin typeface="Courier New" pitchFamily="34" charset="0"/>
                 <a:ea typeface="Courier New" pitchFamily="34" charset="-122"/>
                 <a:cs typeface="Courier New" pitchFamily="34" charset="-120"/>
               </a:rPr>
-              <a:t>(mod_arima, h=5)        </a:t>
-            </a:r>
-            <a:pPr indent="0" marL="0">
-              <a:buNone/>
-            </a:pPr>
-            <a:r>
-              <a:rPr lang="en-US" sz="920" dirty="0">
-                <a:solidFill>
-                  <a:srgbClr val="6A9955"/>
-                </a:solidFill>
-                <a:latin typeface="Courier New" pitchFamily="34" charset="0"/>
-                <a:ea typeface="Courier New" pitchFamily="34" charset="-122"/>
-                <a:cs typeface="Courier New" pitchFamily="34" charset="-120"/>
-              </a:rPr>
-              <a:t># Krigeage (geoR/gstat)
-</a:t>
-            </a:r>
-            <a:pPr indent="0" marL="0">
-              <a:buNone/>
-            </a:pPr>
-            <a:r>
-              <a:rPr lang="en-US" sz="920" dirty="0">
-                <a:solidFill>
-                  <a:srgbClr val="DCDCAA"/>
-                </a:solidFill>
-                <a:latin typeface="Courier New" pitchFamily="34" charset="0"/>
-                <a:ea typeface="Courier New" pitchFamily="34" charset="-122"/>
-                <a:cs typeface="Courier New" pitchFamily="34" charset="-120"/>
-              </a:rPr>
               <a:t>library</a:t>
             </a:r>
-            <a:pPr indent="0" marL="0">
-              <a:buNone/>
-            </a:pPr>
             <a:r>
               <a:rPr lang="en-US" sz="920" dirty="0">
                 <a:solidFill>
@@ -14327,4 +13362,265 @@
     </a:ext>
   </a:extLst>
 </a:theme>
+</file>
+
+<file path=ppt/theme/theme2.xml><?xml version="1.0" encoding="utf-8"?>
+<a:theme xmlns:a="http://schemas.openxmlformats.org/drawingml/2006/main" name="Thème Office">
+  <a:themeElements>
+    <a:clrScheme name="Office">
+      <a:dk1>
+        <a:sysClr val="windowText" lastClr="000000"/>
+      </a:dk1>
+      <a:lt1>
+        <a:sysClr val="window" lastClr="FFFFFF"/>
+      </a:lt1>
+      <a:dk2>
+        <a:srgbClr val="44546A"/>
+      </a:dk2>
+      <a:lt2>
+        <a:srgbClr val="E7E6E6"/>
+      </a:lt2>
+      <a:accent1>
+        <a:srgbClr val="5B9BD5"/>
+      </a:accent1>
+      <a:accent2>
+        <a:srgbClr val="ED7D31"/>
+      </a:accent2>
+      <a:accent3>
+        <a:srgbClr val="A5A5A5"/>
+      </a:accent3>
+      <a:accent4>
+        <a:srgbClr val="FFC000"/>
+      </a:accent4>
+      <a:accent5>
+        <a:srgbClr val="4472C4"/>
+      </a:accent5>
+      <a:accent6>
+        <a:srgbClr val="70AD47"/>
+      </a:accent6>
+      <a:hlink>
+        <a:srgbClr val="0563C1"/>
+      </a:hlink>
+      <a:folHlink>
+        <a:srgbClr val="954F72"/>
+      </a:folHlink>
+    </a:clrScheme>
+    <a:fontScheme name="Office">
+      <a:majorFont>
+        <a:latin typeface="Calibri Light" panose="020F0302020204030204"/>
+        <a:ea typeface=""/>
+        <a:cs typeface=""/>
+        <a:font script="Jpan" typeface="游ゴシック Light"/>
+        <a:font script="Hang" typeface="맑은 고딕"/>
+        <a:font script="Hans" typeface="等线 Light"/>
+        <a:font script="Hant" typeface="新細明體"/>
+        <a:font script="Arab" typeface="Times New Roman"/>
+        <a:font script="Hebr" typeface="Times New Roman"/>
+        <a:font script="Thai" typeface="Angsana New"/>
+        <a:font script="Ethi" typeface="Nyala"/>
+        <a:font script="Beng" typeface="Vrinda"/>
+        <a:font script="Gujr" typeface="Shruti"/>
+        <a:font script="Khmr" typeface="MoolBoran"/>
+        <a:font script="Knda" typeface="Tunga"/>
+        <a:font script="Guru" typeface="Raavi"/>
+        <a:font script="Cans" typeface="Euphemia"/>
+        <a:font script="Cher" typeface="Plantagenet Cherokee"/>
+        <a:font script="Yiii" typeface="Microsoft Yi Baiti"/>
+        <a:font script="Tibt" typeface="Microsoft Himalaya"/>
+        <a:font script="Thaa" typeface="MV Boli"/>
+        <a:font script="Deva" typeface="Mangal"/>
+        <a:font script="Telu" typeface="Gautami"/>
+        <a:font script="Taml" typeface="Latha"/>
+        <a:font script="Syrc" typeface="Estrangelo Edessa"/>
+        <a:font script="Orya" typeface="Kalinga"/>
+        <a:font script="Mlym" typeface="Kartika"/>
+        <a:font script="Laoo" typeface="DokChampa"/>
+        <a:font script="Sinh" typeface="Iskoola Pota"/>
+        <a:font script="Mong" typeface="Mongolian Baiti"/>
+        <a:font script="Viet" typeface="Times New Roman"/>
+        <a:font script="Uigh" typeface="Microsoft Uighur"/>
+        <a:font script="Geor" typeface="Sylfaen"/>
+      </a:majorFont>
+      <a:minorFont>
+        <a:latin typeface="Calibri" panose="020F0502020204030204"/>
+        <a:ea typeface=""/>
+        <a:cs typeface=""/>
+        <a:font script="Jpan" typeface="游ゴシック"/>
+        <a:font script="Hang" typeface="맑은 고딕"/>
+        <a:font script="Hans" typeface="等线"/>
+        <a:font script="Hant" typeface="新細明體"/>
+        <a:font script="Arab" typeface="Arial"/>
+        <a:font script="Hebr" typeface="Arial"/>
+        <a:font script="Thai" typeface="Cordia New"/>
+        <a:font script="Ethi" typeface="Nyala"/>
+        <a:font script="Beng" typeface="Vrinda"/>
+        <a:font script="Gujr" typeface="Shruti"/>
+        <a:font script="Khmr" typeface="DaunPenh"/>
+        <a:font script="Knda" typeface="Tunga"/>
+        <a:font script="Guru" typeface="Raavi"/>
+        <a:font script="Cans" typeface="Euphemia"/>
+        <a:font script="Cher" typeface="Plantagenet Cherokee"/>
+        <a:font script="Yiii" typeface="Microsoft Yi Baiti"/>
+        <a:font script="Tibt" typeface="Microsoft Himalaya"/>
+        <a:font script="Thaa" typeface="MV Boli"/>
+        <a:font script="Deva" typeface="Mangal"/>
+        <a:font script="Telu" typeface="Gautami"/>
+        <a:font script="Taml" typeface="Latha"/>
+        <a:font script="Syrc" typeface="Estrangelo Edessa"/>
+        <a:font script="Orya" typeface="Kalinga"/>
+        <a:font script="Mlym" typeface="Kartika"/>
+        <a:font script="Laoo" typeface="DokChampa"/>
+        <a:font script="Sinh" typeface="Iskoola Pota"/>
+        <a:font script="Mong" typeface="Mongolian Baiti"/>
+        <a:font script="Viet" typeface="Arial"/>
+        <a:font script="Uigh" typeface="Microsoft Uighur"/>
+        <a:font script="Geor" typeface="Sylfaen"/>
+      </a:minorFont>
+    </a:fontScheme>
+    <a:fmtScheme name="Office">
+      <a:fillStyleLst>
+        <a:solidFill>
+          <a:schemeClr val="phClr"/>
+        </a:solidFill>
+        <a:gradFill rotWithShape="1">
+          <a:gsLst>
+            <a:gs pos="0">
+              <a:schemeClr val="phClr">
+                <a:lumMod val="110000"/>
+                <a:satMod val="105000"/>
+                <a:tint val="67000"/>
+              </a:schemeClr>
+            </a:gs>
+            <a:gs pos="50000">
+              <a:schemeClr val="phClr">
+                <a:lumMod val="105000"/>
+                <a:satMod val="103000"/>
+                <a:tint val="73000"/>
+              </a:schemeClr>
+            </a:gs>
+            <a:gs pos="100000">
+              <a:schemeClr val="phClr">
+                <a:lumMod val="105000"/>
+                <a:satMod val="109000"/>
+                <a:tint val="81000"/>
+              </a:schemeClr>
+            </a:gs>
+          </a:gsLst>
+          <a:lin ang="5400000" scaled="0"/>
+        </a:gradFill>
+        <a:gradFill rotWithShape="1">
+          <a:gsLst>
+            <a:gs pos="0">
+              <a:schemeClr val="phClr">
+                <a:satMod val="103000"/>
+                <a:lumMod val="102000"/>
+                <a:tint val="94000"/>
+              </a:schemeClr>
+            </a:gs>
+            <a:gs pos="50000">
+              <a:schemeClr val="phClr">
+                <a:satMod val="110000"/>
+                <a:lumMod val="100000"/>
+                <a:shade val="100000"/>
+              </a:schemeClr>
+            </a:gs>
+            <a:gs pos="100000">
+              <a:schemeClr val="phClr">
+                <a:lumMod val="99000"/>
+                <a:satMod val="120000"/>
+                <a:shade val="78000"/>
+              </a:schemeClr>
+            </a:gs>
+          </a:gsLst>
+          <a:lin ang="5400000" scaled="0"/>
+        </a:gradFill>
+      </a:fillStyleLst>
+      <a:lnStyleLst>
+        <a:ln w="6350" cap="flat" cmpd="sng" algn="ctr">
+          <a:solidFill>
+            <a:schemeClr val="phClr"/>
+          </a:solidFill>
+          <a:prstDash val="solid"/>
+          <a:miter lim="800000"/>
+        </a:ln>
+        <a:ln w="12700" cap="flat" cmpd="sng" algn="ctr">
+          <a:solidFill>
+            <a:schemeClr val="phClr"/>
+          </a:solidFill>
+          <a:prstDash val="solid"/>
+          <a:miter lim="800000"/>
+        </a:ln>
+        <a:ln w="19050" cap="flat" cmpd="sng" algn="ctr">
+          <a:solidFill>
+            <a:schemeClr val="phClr"/>
+          </a:solidFill>
+          <a:prstDash val="solid"/>
+          <a:miter lim="800000"/>
+        </a:ln>
+      </a:lnStyleLst>
+      <a:effectStyleLst>
+        <a:effectStyle>
+          <a:effectLst/>
+        </a:effectStyle>
+        <a:effectStyle>
+          <a:effectLst/>
+        </a:effectStyle>
+        <a:effectStyle>
+          <a:effectLst>
+            <a:outerShdw blurRad="57150" dist="19050" dir="5400000" algn="ctr" rotWithShape="0">
+              <a:srgbClr val="000000">
+                <a:alpha val="63000"/>
+              </a:srgbClr>
+            </a:outerShdw>
+          </a:effectLst>
+        </a:effectStyle>
+      </a:effectStyleLst>
+      <a:bgFillStyleLst>
+        <a:solidFill>
+          <a:schemeClr val="phClr"/>
+        </a:solidFill>
+        <a:solidFill>
+          <a:schemeClr val="phClr">
+            <a:tint val="95000"/>
+            <a:satMod val="170000"/>
+          </a:schemeClr>
+        </a:solidFill>
+        <a:gradFill rotWithShape="1">
+          <a:gsLst>
+            <a:gs pos="0">
+              <a:schemeClr val="phClr">
+                <a:tint val="93000"/>
+                <a:satMod val="150000"/>
+                <a:shade val="98000"/>
+                <a:lumMod val="102000"/>
+              </a:schemeClr>
+            </a:gs>
+            <a:gs pos="50000">
+              <a:schemeClr val="phClr">
+                <a:tint val="98000"/>
+                <a:satMod val="130000"/>
+                <a:shade val="90000"/>
+                <a:lumMod val="103000"/>
+              </a:schemeClr>
+            </a:gs>
+            <a:gs pos="100000">
+              <a:schemeClr val="phClr">
+                <a:shade val="63000"/>
+                <a:satMod val="120000"/>
+              </a:schemeClr>
+            </a:gs>
+          </a:gsLst>
+          <a:lin ang="5400000" scaled="0"/>
+        </a:gradFill>
+      </a:bgFillStyleLst>
+    </a:fmtScheme>
+  </a:themeElements>
+  <a:objectDefaults/>
+  <a:extraClrSchemeLst/>
+  <a:extLst>
+    <a:ext uri="{05A4C25C-085E-4340-85A3-A5531E510DB2}">
+      <thm15:themeFamily xmlns:thm15="http://schemas.microsoft.com/office/thememl/2012/main" name="Office Theme" id="{62F939B6-93AF-4DB8-9C6B-D6C7DFDC589F}" vid="{4A3C46E8-61CC-4603-A589-7422A47A8E4A}"/>
+    </a:ext>
+  </a:extLst>
+</a:theme>
 </file>